--- a/docs/mcr_dp12_deck.pptx
+++ b/docs/mcr_dp12_deck.pptx
@@ -1644,7 +1644,7 @@
         <p:spPr>
           <a:xfrm>
             <a:off x="320040" y="1078992"/>
-            <a:ext cx="11551615" cy="310896"/>
+            <a:ext cx="4274098" cy="310896"/>
           </a:xfrm>
           <a:prstGeom prst="rect">
             <a:avLst/>
@@ -1664,7 +1664,7 @@
         <p:spPr>
           <a:xfrm>
             <a:off x="365760" y="1078992"/>
-            <a:ext cx="11460175" cy="310896"/>
+            <a:ext cx="4182658" cy="310896"/>
           </a:xfrm>
           <a:prstGeom prst="rect">
             <a:avLst/>
@@ -1702,8 +1702,8 @@
         </p:nvSpPr>
         <p:spPr>
           <a:xfrm>
-            <a:off x="365760" y="1499616"/>
-            <a:ext cx="3605077" cy="3443996"/>
+            <a:off x="365760" y="1463040"/>
+            <a:ext cx="4182658" cy="1852026"/>
           </a:xfrm>
           <a:prstGeom prst="rect">
             <a:avLst/>
@@ -1723,7 +1723,7 @@
               <a:buChar char="◆"/>
             </a:pPr>
             <a:r>
-              <a:rPr lang="en-US" sz="1150" b="1" dirty="0">
+              <a:rPr lang="en-US" sz="1050" b="1" dirty="0">
                 <a:solidFill>
                   <a:srgbClr val="262626"/>
                 </a:solidFill>
@@ -1733,7 +1733,7 @@
               </a:rPr>
               <a:t>핵심 결정 — 실행 스택(Inference·Memory Engine)을 외부 채택할지 자체 구현할지, 그 경계선을 어디에 둘 것인가</a:t>
             </a:r>
-            <a:endParaRPr lang="en-US" sz="1150" dirty="0"/>
+            <a:endParaRPr lang="en-US" sz="1050" dirty="0"/>
           </a:p>
           <a:p>
             <a:pPr algn="l" marL="177800" indent="-177800">
@@ -1744,7 +1744,7 @@
               <a:buChar char="◆"/>
             </a:pPr>
             <a:r>
-              <a:rPr lang="en-US" sz="1150" dirty="0">
+              <a:rPr lang="en-US" sz="1050" dirty="0">
                 <a:solidFill>
                   <a:srgbClr val="B3402A"/>
                 </a:solidFill>
@@ -1754,7 +1754,7 @@
               </a:rPr>
               <a:t>우측 구조도 ①②③ = vLLM의 「KV = GPU HBM 상주」 가정이 만드는 3대 구조적 마찰점</a:t>
             </a:r>
-            <a:endParaRPr lang="en-US" sz="1150" dirty="0"/>
+            <a:endParaRPr lang="en-US" sz="1050" dirty="0"/>
           </a:p>
           <a:p>
             <a:pPr algn="l" marL="177800" indent="-177800">
@@ -1765,7 +1765,7 @@
               <a:buChar char="◆"/>
             </a:pPr>
             <a:r>
-              <a:rPr lang="en-US" sz="1150" dirty="0">
+              <a:rPr lang="en-US" sz="1050" dirty="0">
                 <a:solidFill>
                   <a:srgbClr val="262626"/>
                 </a:solidFill>
@@ -1775,43 +1775,20 @@
               </a:rPr>
               <a:t>제3 압력 — LMCache가 KV-계층 표준 선점: 경쟁(자체)할지 편승(외부)할지</a:t>
             </a:r>
-            <a:endParaRPr lang="en-US" sz="1150" dirty="0"/>
+            <a:endParaRPr lang="en-US" sz="1050" dirty="0"/>
           </a:p>
         </p:txBody>
       </p:sp>
-      <p:pic>
-        <p:nvPicPr>
-          <p:cNvPr id="22" name="Image 0" descr="/home/user/architect/docs/mcr_assets/dp/dp1_problem_arch.png">    </p:cNvPr>
-          <p:cNvPicPr>
-            <a:picLocks noChangeAspect="1"/>
-          </p:cNvPicPr>
-          <p:nvPr/>
-        </p:nvPicPr>
-        <p:blipFill>
-          <a:blip r:embed="rId1"/>
-          <a:srcRect l="0" r="0" t="0" b="0"/>
-          <a:stretch/>
-        </p:blipFill>
-        <p:spPr>
-          <a:xfrm>
-            <a:off x="4245157" y="1499616"/>
-            <a:ext cx="7626498" cy="3443996"/>
-          </a:xfrm>
-          <a:prstGeom prst="rect">
-            <a:avLst/>
-          </a:prstGeom>
-        </p:spPr>
-      </p:pic>
-      <p:sp>
-        <p:nvSpPr>
-          <p:cNvPr id="23" name="Shape 20"/>
-          <p:cNvSpPr/>
-          <p:nvPr/>
-        </p:nvSpPr>
-        <p:spPr>
-          <a:xfrm>
-            <a:off x="320040" y="5053340"/>
-            <a:ext cx="11551615" cy="310896"/>
+      <p:sp>
+        <p:nvSpPr>
+          <p:cNvPr id="22" name="Shape 20"/>
+          <p:cNvSpPr/>
+          <p:nvPr/>
+        </p:nvSpPr>
+        <p:spPr>
+          <a:xfrm>
+            <a:off x="320040" y="3388218"/>
+            <a:ext cx="4274098" cy="310896"/>
           </a:xfrm>
           <a:prstGeom prst="rect">
             <a:avLst/>
@@ -1824,14 +1801,14 @@
       </p:sp>
       <p:sp>
         <p:nvSpPr>
-          <p:cNvPr id="24" name="Text 21"/>
-          <p:cNvSpPr/>
-          <p:nvPr/>
-        </p:nvSpPr>
-        <p:spPr>
-          <a:xfrm>
-            <a:off x="365760" y="5053340"/>
-            <a:ext cx="11460175" cy="310896"/>
+          <p:cNvPr id="23" name="Text 21"/>
+          <p:cNvSpPr/>
+          <p:nvPr/>
+        </p:nvSpPr>
+        <p:spPr>
+          <a:xfrm>
+            <a:off x="365760" y="3388218"/>
+            <a:ext cx="4182658" cy="310896"/>
           </a:xfrm>
           <a:prstGeom prst="rect">
             <a:avLst/>
@@ -1863,14 +1840,14 @@
       </p:sp>
       <p:sp>
         <p:nvSpPr>
-          <p:cNvPr id="25" name="Text 22"/>
-          <p:cNvSpPr/>
-          <p:nvPr/>
-        </p:nvSpPr>
-        <p:spPr>
-          <a:xfrm>
-            <a:off x="365760" y="5473964"/>
-            <a:ext cx="11460175" cy="972556"/>
+          <p:cNvPr id="24" name="Text 22"/>
+          <p:cNvSpPr/>
+          <p:nvPr/>
+        </p:nvSpPr>
+        <p:spPr>
+          <a:xfrm>
+            <a:off x="365760" y="3772266"/>
+            <a:ext cx="4182658" cy="2655966"/>
           </a:xfrm>
           <a:prstGeom prst="rect">
             <a:avLst/>
@@ -1889,7 +1866,7 @@
               <a:buNone/>
             </a:pPr>
             <a:r>
-              <a:rPr lang="en-US" sz="1150" dirty="0">
+              <a:rPr lang="en-US" sz="1050" dirty="0">
                 <a:solidFill>
                   <a:srgbClr val="262626"/>
                 </a:solidFill>
@@ -1899,7 +1876,7 @@
               </a:rPr>
               <a:t>1. 경계선의 위치 — 차별 가치(tier-aware 배치·비연속 KV 1급 관리·근접 연산)가 외부 확장 통로(vLLM 확장점·LMCache 훅) 안에서 표현 가능한가</a:t>
             </a:r>
-            <a:endParaRPr lang="en-US" sz="1150" dirty="0"/>
+            <a:endParaRPr lang="en-US" sz="1050" dirty="0"/>
           </a:p>
           <a:p>
             <a:pPr algn="l" indent="0" marL="0">
@@ -1909,7 +1886,7 @@
               <a:buNone/>
             </a:pPr>
             <a:r>
-              <a:rPr lang="en-US" sz="1150" dirty="0">
+              <a:rPr lang="en-US" sz="1050" dirty="0">
                 <a:solidFill>
                   <a:srgbClr val="262626"/>
                 </a:solidFill>
@@ -1919,7 +1896,7 @@
               </a:rPr>
               <a:t>2. 확장점 밖 수정 지점(scheduler tier 인지, block table 일반화)이 연구·제품 가치의 핵심인가 주변부인가</a:t>
             </a:r>
-            <a:endParaRPr lang="en-US" sz="1150" dirty="0"/>
+            <a:endParaRPr lang="en-US" sz="1050" dirty="0"/>
           </a:p>
           <a:p>
             <a:pPr algn="l" indent="0" marL="0">
@@ -1929,7 +1906,7 @@
               <a:buNone/>
             </a:pPr>
             <a:r>
-              <a:rPr lang="en-US" sz="1150" dirty="0">
+              <a:rPr lang="en-US" sz="1050" dirty="0">
                 <a:solidFill>
                   <a:srgbClr val="262626"/>
                 </a:solidFill>
@@ -1939,7 +1916,7 @@
               </a:rPr>
               <a:t>3. 감당 가능한 유지보수 모델 — plugin 추종 / fork rebase / 독립 코어 / KV-계층 백엔드 추종</a:t>
             </a:r>
-            <a:endParaRPr lang="en-US" sz="1150" dirty="0"/>
+            <a:endParaRPr lang="en-US" sz="1050" dirty="0"/>
           </a:p>
           <a:p>
             <a:pPr algn="l" indent="0" marL="0">
@@ -1949,7 +1926,7 @@
               <a:buNone/>
             </a:pPr>
             <a:r>
-              <a:rPr lang="en-US" sz="1150" dirty="0">
+              <a:rPr lang="en-US" sz="1050" dirty="0">
                 <a:solidFill>
                   <a:srgbClr val="1F3864"/>
                 </a:solidFill>
@@ -1959,10 +1936,34 @@
               </a:rPr>
               <a:t>4. (DP2·DP6 커플링) 채택안·변형이 정책 위치와 근접연산 통로의 실현 가능 집합을 제약</a:t>
             </a:r>
-            <a:endParaRPr lang="en-US" sz="1150" dirty="0"/>
+            <a:endParaRPr lang="en-US" sz="1050" dirty="0"/>
           </a:p>
         </p:txBody>
       </p:sp>
+      <p:pic>
+        <p:nvPicPr>
+          <p:cNvPr id="25" name="Image 0" descr="/home/user/architect/docs/mcr_assets/dp/dp1_problem_arch.png">    </p:cNvPr>
+          <p:cNvPicPr>
+            <a:picLocks noChangeAspect="1"/>
+          </p:cNvPicPr>
+          <p:nvPr/>
+        </p:nvPicPr>
+        <p:blipFill>
+          <a:blip r:embed="rId1"/>
+          <a:stretch>
+            <a:fillRect/>
+          </a:stretch>
+        </p:blipFill>
+        <p:spPr>
+          <a:xfrm>
+            <a:off x="4850170" y="1422261"/>
+            <a:ext cx="7021486" cy="4680990"/>
+          </a:xfrm>
+          <a:prstGeom prst="rect">
+            <a:avLst/>
+          </a:prstGeom>
+        </p:spPr>
+      </p:pic>
     </p:spTree>
   </p:cSld>
   <p:clrMapOvr>
@@ -2490,108 +2491,21 @@
       </p:sp>
       <p:sp>
         <p:nvSpPr>
-          <p:cNvPr id="19" name="Shape 17"/>
+          <p:cNvPr id="19" name="Text 17"/>
           <p:cNvSpPr/>
           <p:nvPr/>
         </p:nvSpPr>
         <p:spPr>
           <a:xfrm>
             <a:off x="320040" y="1078992"/>
-            <a:ext cx="960120" cy="310896"/>
+            <a:ext cx="5638648" cy="274320"/>
           </a:xfrm>
           <a:prstGeom prst="rect">
             <a:avLst/>
           </a:prstGeom>
           <a:solidFill>
-            <a:srgbClr val="3C5F2C"/>
+            <a:srgbClr val="1F3864"/>
           </a:solidFill>
-          <a:ln w="9525">
-            <a:solidFill>
-              <a:srgbClr val="A6A6A6"/>
-            </a:solidFill>
-            <a:prstDash val="solid"/>
-          </a:ln>
-        </p:spPr>
-      </p:sp>
-      <p:sp>
-        <p:nvSpPr>
-          <p:cNvPr id="20" name="Text 18"/>
-          <p:cNvSpPr/>
-          <p:nvPr/>
-        </p:nvSpPr>
-        <p:spPr>
-          <a:xfrm>
-            <a:off x="320040" y="1078992"/>
-            <a:ext cx="960120" cy="310896"/>
-          </a:xfrm>
-          <a:prstGeom prst="rect">
-            <a:avLst/>
-          </a:prstGeom>
-          <a:noFill/>
-          <a:ln/>
-        </p:spPr>
-        <p:txBody>
-          <a:bodyPr wrap="square" lIns="0" tIns="0" rIns="0" bIns="0" rtlCol="0" anchor="ctr"/>
-          <a:lstStyle/>
-          <a:p>
-            <a:pPr algn="ctr" indent="0" marL="0">
-              <a:buNone/>
-            </a:pPr>
-            <a:r>
-              <a:rPr lang="en-US" sz="1100" b="1" dirty="0">
-                <a:solidFill>
-                  <a:srgbClr val="FFFFFF"/>
-                </a:solidFill>
-                <a:latin typeface="Malgun Gothic" pitchFamily="34" charset="0"/>
-                <a:ea typeface="Malgun Gothic" pitchFamily="34" charset="-122"/>
-                <a:cs typeface="Malgun Gothic" pitchFamily="34" charset="-120"/>
-              </a:rPr>
-              <a:t>구분</a:t>
-            </a:r>
-            <a:endParaRPr lang="en-US" sz="1100" dirty="0"/>
-          </a:p>
-        </p:txBody>
-      </p:sp>
-      <p:sp>
-        <p:nvSpPr>
-          <p:cNvPr id="21" name="Shape 19"/>
-          <p:cNvSpPr/>
-          <p:nvPr/>
-        </p:nvSpPr>
-        <p:spPr>
-          <a:xfrm>
-            <a:off x="1280160" y="1078992"/>
-            <a:ext cx="5295748" cy="310896"/>
-          </a:xfrm>
-          <a:prstGeom prst="rect">
-            <a:avLst/>
-          </a:prstGeom>
-          <a:solidFill>
-            <a:srgbClr val="3C5F2C"/>
-          </a:solidFill>
-          <a:ln w="9525">
-            <a:solidFill>
-              <a:srgbClr val="A6A6A6"/>
-            </a:solidFill>
-            <a:prstDash val="solid"/>
-          </a:ln>
-        </p:spPr>
-      </p:sp>
-      <p:sp>
-        <p:nvSpPr>
-          <p:cNvPr id="22" name="Text 20"/>
-          <p:cNvSpPr/>
-          <p:nvPr/>
-        </p:nvSpPr>
-        <p:spPr>
-          <a:xfrm>
-            <a:off x="1280160" y="1078992"/>
-            <a:ext cx="5295748" cy="310896"/>
-          </a:xfrm>
-          <a:prstGeom prst="rect">
-            <a:avLst/>
-          </a:prstGeom>
-          <a:noFill/>
           <a:ln/>
         </p:spPr>
         <p:txBody>
@@ -2616,46 +2530,47 @@
           </a:p>
         </p:txBody>
       </p:sp>
-      <p:sp>
-        <p:nvSpPr>
-          <p:cNvPr id="23" name="Shape 21"/>
-          <p:cNvSpPr/>
-          <p:nvPr/>
-        </p:nvSpPr>
-        <p:spPr>
-          <a:xfrm>
-            <a:off x="6575908" y="1078992"/>
-            <a:ext cx="5295748" cy="310896"/>
+      <p:pic>
+        <p:nvPicPr>
+          <p:cNvPr id="20" name="Image 0" descr="/home/user/architect/docs/mcr_assets/dp/dp1_c1.png">    </p:cNvPr>
+          <p:cNvPicPr>
+            <a:picLocks noChangeAspect="1"/>
+          </p:cNvPicPr>
+          <p:nvPr/>
+        </p:nvPicPr>
+        <p:blipFill>
+          <a:blip r:embed="rId1"/>
+          <a:stretch>
+            <a:fillRect/>
+          </a:stretch>
+        </p:blipFill>
+        <p:spPr>
+          <a:xfrm>
+            <a:off x="1835209" y="1408176"/>
+            <a:ext cx="2608309" cy="3447288"/>
+          </a:xfrm>
+          <a:prstGeom prst="rect">
+            <a:avLst/>
+          </a:prstGeom>
+        </p:spPr>
+      </p:pic>
+      <p:sp>
+        <p:nvSpPr>
+          <p:cNvPr id="21" name="Text 18"/>
+          <p:cNvSpPr/>
+          <p:nvPr/>
+        </p:nvSpPr>
+        <p:spPr>
+          <a:xfrm>
+            <a:off x="6233008" y="1078992"/>
+            <a:ext cx="5638648" cy="274320"/>
           </a:xfrm>
           <a:prstGeom prst="rect">
             <a:avLst/>
           </a:prstGeom>
           <a:solidFill>
-            <a:srgbClr val="3C5F2C"/>
+            <a:srgbClr val="1F3864"/>
           </a:solidFill>
-          <a:ln w="9525">
-            <a:solidFill>
-              <a:srgbClr val="A6A6A6"/>
-            </a:solidFill>
-            <a:prstDash val="solid"/>
-          </a:ln>
-        </p:spPr>
-      </p:sp>
-      <p:sp>
-        <p:nvSpPr>
-          <p:cNvPr id="24" name="Text 22"/>
-          <p:cNvSpPr/>
-          <p:nvPr/>
-        </p:nvSpPr>
-        <p:spPr>
-          <a:xfrm>
-            <a:off x="6575908" y="1078992"/>
-            <a:ext cx="5295748" cy="310896"/>
-          </a:xfrm>
-          <a:prstGeom prst="rect">
-            <a:avLst/>
-          </a:prstGeom>
-          <a:noFill/>
           <a:ln/>
         </p:spPr>
         <p:txBody>
@@ -2680,1423 +2595,1312 @@
           </a:p>
         </p:txBody>
       </p:sp>
-      <p:sp>
-        <p:nvSpPr>
-          <p:cNvPr id="25" name="Shape 23"/>
-          <p:cNvSpPr/>
-          <p:nvPr/>
-        </p:nvSpPr>
-        <p:spPr>
-          <a:xfrm>
-            <a:off x="320040" y="1389888"/>
-            <a:ext cx="960120" cy="2011680"/>
-          </a:xfrm>
-          <a:prstGeom prst="rect">
-            <a:avLst/>
-          </a:prstGeom>
-          <a:solidFill>
-            <a:srgbClr val="1F3864"/>
-          </a:solidFill>
-          <a:ln w="9525">
-            <a:solidFill>
-              <a:srgbClr val="A6A6A6"/>
-            </a:solidFill>
-            <a:prstDash val="solid"/>
-          </a:ln>
-        </p:spPr>
-      </p:sp>
-      <p:sp>
-        <p:nvSpPr>
-          <p:cNvPr id="26" name="Text 24"/>
-          <p:cNvSpPr/>
-          <p:nvPr/>
-        </p:nvSpPr>
-        <p:spPr>
-          <a:xfrm>
-            <a:off x="320040" y="1389888"/>
-            <a:ext cx="960120" cy="2011680"/>
-          </a:xfrm>
-          <a:prstGeom prst="rect">
-            <a:avLst/>
-          </a:prstGeom>
-          <a:noFill/>
-          <a:ln/>
-        </p:spPr>
-        <p:txBody>
-          <a:bodyPr wrap="square" lIns="0" tIns="0" rIns="0" bIns="0" rtlCol="0" anchor="ctr"/>
-          <a:lstStyle/>
-          <a:p>
-            <a:pPr algn="ctr" indent="0" marL="0">
-              <a:buNone/>
-            </a:pPr>
-            <a:r>
-              <a:rPr lang="en-US" sz="1050" b="1" dirty="0">
-                <a:solidFill>
-                  <a:srgbClr val="FFFFFF"/>
-                </a:solidFill>
-                <a:latin typeface="Malgun Gothic" pitchFamily="34" charset="0"/>
-                <a:ea typeface="Malgun Gothic" pitchFamily="34" charset="-122"/>
-                <a:cs typeface="Malgun Gothic" pitchFamily="34" charset="-120"/>
-              </a:rPr>
-              <a:t>설계도</a:t>
-            </a:r>
-            <a:endParaRPr lang="en-US" sz="1050" dirty="0"/>
-          </a:p>
-        </p:txBody>
-      </p:sp>
-      <p:sp>
-        <p:nvSpPr>
-          <p:cNvPr id="27" name="Shape 25"/>
-          <p:cNvSpPr/>
-          <p:nvPr/>
-        </p:nvSpPr>
-        <p:spPr>
-          <a:xfrm>
-            <a:off x="1280160" y="1389888"/>
-            <a:ext cx="5295748" cy="2011680"/>
-          </a:xfrm>
-          <a:prstGeom prst="rect">
-            <a:avLst/>
-          </a:prstGeom>
-          <a:solidFill>
-            <a:srgbClr val="FFFFFF"/>
-          </a:solidFill>
-          <a:ln w="9525">
-            <a:solidFill>
-              <a:srgbClr val="A6A6A6"/>
-            </a:solidFill>
-            <a:prstDash val="solid"/>
-          </a:ln>
-        </p:spPr>
-      </p:sp>
       <p:pic>
         <p:nvPicPr>
-          <p:cNvPr id="28" name="Image 0" descr="/home/user/architect/docs/mcr_assets/dp/dp1_c1.png">    </p:cNvPr>
+          <p:cNvPr id="22" name="Image 1" descr="/home/user/architect/docs/mcr_assets/dp/dp1_c2.png">    </p:cNvPr>
           <p:cNvPicPr>
             <a:picLocks noChangeAspect="1"/>
           </p:cNvPicPr>
           <p:nvPr/>
         </p:nvPicPr>
         <p:blipFill>
-          <a:blip r:embed="rId1"/>
-          <a:srcRect l="0" r="0" t="0" b="0"/>
-          <a:stretch/>
+          <a:blip r:embed="rId2"/>
+          <a:stretch>
+            <a:fillRect/>
+          </a:stretch>
         </p:blipFill>
         <p:spPr>
           <a:xfrm>
-            <a:off x="1325880" y="1435608"/>
-            <a:ext cx="5204308" cy="1920240"/>
+            <a:off x="7645188" y="1408176"/>
+            <a:ext cx="2814287" cy="3447288"/>
           </a:xfrm>
           <a:prstGeom prst="rect">
             <a:avLst/>
           </a:prstGeom>
         </p:spPr>
       </p:pic>
-      <p:sp>
-        <p:nvSpPr>
-          <p:cNvPr id="29" name="Shape 26"/>
-          <p:cNvSpPr/>
-          <p:nvPr/>
-        </p:nvSpPr>
-        <p:spPr>
-          <a:xfrm>
-            <a:off x="6575908" y="1389888"/>
-            <a:ext cx="5295748" cy="2011680"/>
-          </a:xfrm>
-          <a:prstGeom prst="rect">
-            <a:avLst/>
-          </a:prstGeom>
-          <a:solidFill>
-            <a:srgbClr val="FFFFFF"/>
-          </a:solidFill>
-          <a:ln w="9525">
-            <a:solidFill>
-              <a:srgbClr val="A6A6A6"/>
-            </a:solidFill>
-            <a:prstDash val="solid"/>
-          </a:ln>
-        </p:spPr>
-      </p:sp>
-      <p:pic>
-        <p:nvPicPr>
-          <p:cNvPr id="30" name="Image 1" descr="/home/user/architect/docs/mcr_assets/dp/dp1_c2.png">    </p:cNvPr>
-          <p:cNvPicPr>
-            <a:picLocks noChangeAspect="1"/>
-          </p:cNvPicPr>
-          <p:nvPr/>
-        </p:nvPicPr>
-        <p:blipFill>
-          <a:blip r:embed="rId2"/>
-          <a:srcRect l="0" r="0" t="0" b="0"/>
-          <a:stretch/>
-        </p:blipFill>
-        <p:spPr>
-          <a:xfrm>
-            <a:off x="6621628" y="1435608"/>
-            <a:ext cx="5204308" cy="1920240"/>
-          </a:xfrm>
-          <a:prstGeom prst="rect">
-            <a:avLst/>
-          </a:prstGeom>
-        </p:spPr>
-      </p:pic>
-      <p:sp>
-        <p:nvSpPr>
-          <p:cNvPr id="31" name="Shape 27"/>
-          <p:cNvSpPr/>
-          <p:nvPr/>
-        </p:nvSpPr>
-        <p:spPr>
-          <a:xfrm>
-            <a:off x="320040" y="3401568"/>
-            <a:ext cx="960120" cy="640080"/>
-          </a:xfrm>
-          <a:prstGeom prst="rect">
-            <a:avLst/>
-          </a:prstGeom>
-          <a:solidFill>
-            <a:srgbClr val="1F3864"/>
-          </a:solidFill>
-          <a:ln w="9525">
-            <a:solidFill>
-              <a:srgbClr val="A6A6A6"/>
-            </a:solidFill>
-            <a:prstDash val="solid"/>
-          </a:ln>
-        </p:spPr>
-      </p:sp>
-      <p:sp>
-        <p:nvSpPr>
-          <p:cNvPr id="32" name="Text 28"/>
-          <p:cNvSpPr/>
-          <p:nvPr/>
-        </p:nvSpPr>
-        <p:spPr>
-          <a:xfrm>
-            <a:off x="320040" y="3401568"/>
-            <a:ext cx="960120" cy="640080"/>
-          </a:xfrm>
-          <a:prstGeom prst="rect">
-            <a:avLst/>
-          </a:prstGeom>
-          <a:noFill/>
-          <a:ln/>
-        </p:spPr>
-        <p:txBody>
-          <a:bodyPr wrap="square" lIns="0" tIns="0" rIns="0" bIns="0" rtlCol="0" anchor="ctr"/>
-          <a:lstStyle/>
-          <a:p>
-            <a:pPr algn="ctr" indent="0" marL="0">
-              <a:buNone/>
-            </a:pPr>
-            <a:r>
-              <a:rPr lang="en-US" sz="1050" b="1" dirty="0">
-                <a:solidFill>
-                  <a:srgbClr val="FFFFFF"/>
-                </a:solidFill>
-                <a:latin typeface="Malgun Gothic" pitchFamily="34" charset="0"/>
-                <a:ea typeface="Malgun Gothic" pitchFamily="34" charset="-122"/>
-                <a:cs typeface="Malgun Gothic" pitchFamily="34" charset="-120"/>
-              </a:rPr>
-              <a:t>특징</a:t>
-            </a:r>
-            <a:endParaRPr lang="en-US" sz="1050" dirty="0"/>
-          </a:p>
-        </p:txBody>
-      </p:sp>
-      <p:sp>
-        <p:nvSpPr>
-          <p:cNvPr id="33" name="Shape 29"/>
-          <p:cNvSpPr/>
-          <p:nvPr/>
-        </p:nvSpPr>
-        <p:spPr>
-          <a:xfrm>
-            <a:off x="1280160" y="3401568"/>
-            <a:ext cx="5295748" cy="640080"/>
-          </a:xfrm>
-          <a:prstGeom prst="rect">
-            <a:avLst/>
-          </a:prstGeom>
-          <a:solidFill>
-            <a:srgbClr val="FFFFFF"/>
-          </a:solidFill>
-          <a:ln w="9525">
-            <a:solidFill>
-              <a:srgbClr val="A6A6A6"/>
-            </a:solidFill>
-            <a:prstDash val="solid"/>
-          </a:ln>
-        </p:spPr>
-      </p:sp>
-      <p:sp>
-        <p:nvSpPr>
-          <p:cNvPr id="34" name="Text 30"/>
-          <p:cNvSpPr/>
-          <p:nvPr/>
-        </p:nvSpPr>
-        <p:spPr>
-          <a:xfrm>
-            <a:off x="1371600" y="3447288"/>
-            <a:ext cx="5112868" cy="548640"/>
-          </a:xfrm>
-          <a:prstGeom prst="rect">
-            <a:avLst/>
-          </a:prstGeom>
-          <a:noFill/>
-          <a:ln/>
-        </p:spPr>
-        <p:txBody>
-          <a:bodyPr wrap="square" lIns="0" tIns="0" rIns="0" bIns="0" rtlCol="0" anchor="t"/>
-          <a:lstStyle/>
-          <a:p>
-            <a:pPr algn="l" marL="177800" indent="-177800">
-              <a:spcAft>
-                <a:spcPts val="600"/>
-              </a:spcAft>
-              <a:buSzPct val="100000"/>
-              <a:buChar char="◆"/>
-            </a:pPr>
-            <a:r>
-              <a:rPr lang="en-US" sz="950" dirty="0">
-                <a:solidFill>
-                  <a:srgbClr val="262626"/>
-                </a:solidFill>
-                <a:latin typeface="Malgun Gothic" pitchFamily="34" charset="0"/>
-                <a:ea typeface="Malgun Gothic" pitchFamily="34" charset="-122"/>
-                <a:cs typeface="Malgun Gothic" pitchFamily="34" charset="-120"/>
-              </a:rPr>
-              <a:t>Inference Engine = vLLM(무수정), KV 골격은 변형 A(MCR 자체 주입)/B(LMCache 편승)로 소싱 — 자사 tier 자산은 변형 공통 모듈</a:t>
-            </a:r>
-            <a:endParaRPr lang="en-US" sz="950" dirty="0"/>
-          </a:p>
-        </p:txBody>
-      </p:sp>
-      <p:sp>
-        <p:nvSpPr>
-          <p:cNvPr id="35" name="Shape 31"/>
-          <p:cNvSpPr/>
-          <p:nvPr/>
-        </p:nvSpPr>
-        <p:spPr>
-          <a:xfrm>
-            <a:off x="6575908" y="3401568"/>
-            <a:ext cx="5295748" cy="640080"/>
-          </a:xfrm>
-          <a:prstGeom prst="rect">
-            <a:avLst/>
-          </a:prstGeom>
-          <a:solidFill>
-            <a:srgbClr val="FFFFFF"/>
-          </a:solidFill>
-          <a:ln w="9525">
-            <a:solidFill>
-              <a:srgbClr val="A6A6A6"/>
-            </a:solidFill>
-            <a:prstDash val="solid"/>
-          </a:ln>
-        </p:spPr>
-      </p:sp>
-      <p:sp>
-        <p:nvSpPr>
-          <p:cNvPr id="36" name="Text 32"/>
-          <p:cNvSpPr/>
-          <p:nvPr/>
-        </p:nvSpPr>
-        <p:spPr>
-          <a:xfrm>
-            <a:off x="6667348" y="3447288"/>
-            <a:ext cx="5112868" cy="548640"/>
-          </a:xfrm>
-          <a:prstGeom prst="rect">
-            <a:avLst/>
-          </a:prstGeom>
-          <a:noFill/>
-          <a:ln/>
-        </p:spPr>
-        <p:txBody>
-          <a:bodyPr wrap="square" lIns="0" tIns="0" rIns="0" bIns="0" rtlCol="0" anchor="t"/>
-          <a:lstStyle/>
-          <a:p>
-            <a:pPr algn="l" marL="177800" indent="-177800">
-              <a:spcAft>
-                <a:spcPts val="600"/>
-              </a:spcAft>
-              <a:buSzPct val="100000"/>
-              <a:buChar char="◆"/>
-            </a:pPr>
-            <a:r>
-              <a:rPr lang="en-US" sz="950" dirty="0">
-                <a:solidFill>
-                  <a:srgbClr val="262626"/>
-                </a:solidFill>
-                <a:latin typeface="Malgun Gothic" pitchFamily="34" charset="0"/>
-                <a:ea typeface="Malgun Gothic" pitchFamily="34" charset="-122"/>
-                <a:cs typeface="Malgun Gothic" pitchFamily="34" charset="-120"/>
-              </a:rPr>
-              <a:t>실행 스택 전 층 자체 구현 — scheduler·block table·executor가 tier topology를 1급으로 인지 (확정안 v2의 무제약 구현)</a:t>
-            </a:r>
-            <a:endParaRPr lang="en-US" sz="950" dirty="0"/>
-          </a:p>
-        </p:txBody>
-      </p:sp>
-      <p:sp>
-        <p:nvSpPr>
-          <p:cNvPr id="37" name="Shape 33"/>
-          <p:cNvSpPr/>
-          <p:nvPr/>
-        </p:nvSpPr>
-        <p:spPr>
-          <a:xfrm>
-            <a:off x="320040" y="4041648"/>
-            <a:ext cx="960120" cy="777240"/>
-          </a:xfrm>
-          <a:prstGeom prst="rect">
-            <a:avLst/>
-          </a:prstGeom>
-          <a:solidFill>
-            <a:srgbClr val="1F3864"/>
-          </a:solidFill>
-          <a:ln w="9525">
-            <a:solidFill>
-              <a:srgbClr val="A6A6A6"/>
-            </a:solidFill>
-            <a:prstDash val="solid"/>
-          </a:ln>
-        </p:spPr>
-      </p:sp>
-      <p:sp>
-        <p:nvSpPr>
-          <p:cNvPr id="38" name="Text 34"/>
-          <p:cNvSpPr/>
-          <p:nvPr/>
-        </p:nvSpPr>
-        <p:spPr>
-          <a:xfrm>
-            <a:off x="320040" y="4041648"/>
-            <a:ext cx="960120" cy="777240"/>
-          </a:xfrm>
-          <a:prstGeom prst="rect">
-            <a:avLst/>
-          </a:prstGeom>
-          <a:noFill/>
-          <a:ln/>
-        </p:spPr>
-        <p:txBody>
-          <a:bodyPr wrap="square" lIns="0" tIns="0" rIns="0" bIns="0" rtlCol="0" anchor="ctr"/>
-          <a:lstStyle/>
-          <a:p>
-            <a:pPr algn="ctr" indent="0" marL="0">
-              <a:buNone/>
-            </a:pPr>
-            <a:r>
-              <a:rPr lang="en-US" sz="1050" b="1" dirty="0">
-                <a:solidFill>
-                  <a:srgbClr val="FFFFFF"/>
-                </a:solidFill>
-                <a:latin typeface="Malgun Gothic" pitchFamily="34" charset="0"/>
-                <a:ea typeface="Malgun Gothic" pitchFamily="34" charset="-122"/>
-                <a:cs typeface="Malgun Gothic" pitchFamily="34" charset="-120"/>
-              </a:rPr>
-              <a:t>장점</a:t>
-            </a:r>
-            <a:endParaRPr lang="en-US" sz="1050" dirty="0"/>
-          </a:p>
-        </p:txBody>
-      </p:sp>
-      <p:sp>
-        <p:nvSpPr>
-          <p:cNvPr id="39" name="Shape 35"/>
-          <p:cNvSpPr/>
-          <p:nvPr/>
-        </p:nvSpPr>
-        <p:spPr>
-          <a:xfrm>
-            <a:off x="1280160" y="4041648"/>
-            <a:ext cx="5295748" cy="777240"/>
-          </a:xfrm>
-          <a:prstGeom prst="rect">
-            <a:avLst/>
-          </a:prstGeom>
-          <a:solidFill>
-            <a:srgbClr val="FFFFFF"/>
-          </a:solidFill>
-          <a:ln w="9525">
-            <a:solidFill>
-              <a:srgbClr val="A6A6A6"/>
-            </a:solidFill>
-            <a:prstDash val="solid"/>
-          </a:ln>
-        </p:spPr>
-      </p:sp>
-      <p:sp>
-        <p:nvSpPr>
-          <p:cNvPr id="40" name="Text 36"/>
-          <p:cNvSpPr/>
-          <p:nvPr/>
-        </p:nvSpPr>
-        <p:spPr>
-          <a:xfrm>
-            <a:off x="1371600" y="4087368"/>
-            <a:ext cx="5112868" cy="685800"/>
-          </a:xfrm>
-          <a:prstGeom prst="rect">
-            <a:avLst/>
-          </a:prstGeom>
-          <a:noFill/>
-          <a:ln/>
-        </p:spPr>
-        <p:txBody>
-          <a:bodyPr wrap="square" lIns="0" tIns="0" rIns="0" bIns="0" rtlCol="0" anchor="t"/>
-          <a:lstStyle/>
-          <a:p>
-            <a:pPr algn="l" marL="177800" indent="-177800">
-              <a:spcAft>
-                <a:spcPts val="600"/>
-              </a:spcAft>
-              <a:buSzPct val="100000"/>
-              <a:buChar char="◆"/>
-            </a:pPr>
-            <a:r>
-              <a:rPr lang="en-US" sz="950" dirty="0">
-                <a:solidFill>
-                  <a:srgbClr val="262626"/>
-                </a:solidFill>
-                <a:latin typeface="Malgun Gothic" pitchFamily="34" charset="0"/>
-                <a:ea typeface="Malgun Gothic" pitchFamily="34" charset="-122"/>
-                <a:cs typeface="Malgun Gothic" pitchFamily="34" charset="-120"/>
-              </a:rPr>
-              <a:t>생태계 무임승차 — 배칭·커널·모델 지원 흡수</a:t>
-            </a:r>
-            <a:endParaRPr lang="en-US" sz="950" dirty="0"/>
-          </a:p>
-          <a:p>
-            <a:pPr algn="l" marL="177800" indent="-177800">
-              <a:spcAft>
-                <a:spcPts val="600"/>
-              </a:spcAft>
-              <a:buSzPct val="100000"/>
-              <a:buChar char="◆"/>
-            </a:pPr>
-            <a:r>
-              <a:rPr lang="en-US" sz="950" dirty="0">
-                <a:solidFill>
-                  <a:srgbClr val="262626"/>
-                </a:solidFill>
-                <a:latin typeface="Malgun Gothic" pitchFamily="34" charset="0"/>
-                <a:ea typeface="Malgun Gothic" pitchFamily="34" charset="-122"/>
-                <a:cs typeface="Malgun Gothic" pitchFamily="34" charset="-120"/>
-              </a:rPr>
-              <a:t>검증된 코어 · 현 자산(P/D proxy·LMCache 연동) 재사용</a:t>
-            </a:r>
-            <a:endParaRPr lang="en-US" sz="950" dirty="0"/>
-          </a:p>
-          <a:p>
-            <a:pPr algn="l" marL="177800" indent="-177800">
-              <a:spcAft>
-                <a:spcPts val="600"/>
-              </a:spcAft>
-              <a:buSzPct val="100000"/>
-              <a:buChar char="◆"/>
-            </a:pPr>
-            <a:r>
-              <a:rPr lang="en-US" sz="950" dirty="0">
-                <a:solidFill>
-                  <a:srgbClr val="262626"/>
-                </a:solidFill>
-                <a:latin typeface="Malgun Gothic" pitchFamily="34" charset="0"/>
-                <a:ea typeface="Malgun Gothic" pitchFamily="34" charset="-122"/>
-                <a:cs typeface="Malgun Gothic" pitchFamily="34" charset="-120"/>
-              </a:rPr>
-              <a:t>초기 ≤6인월 — 연구 가설 검증 리드타임 최단</a:t>
-            </a:r>
-            <a:endParaRPr lang="en-US" sz="950" dirty="0"/>
-          </a:p>
-        </p:txBody>
-      </p:sp>
-      <p:sp>
-        <p:nvSpPr>
-          <p:cNvPr id="41" name="Shape 37"/>
-          <p:cNvSpPr/>
-          <p:nvPr/>
-        </p:nvSpPr>
-        <p:spPr>
-          <a:xfrm>
-            <a:off x="6575908" y="4041648"/>
-            <a:ext cx="5295748" cy="777240"/>
-          </a:xfrm>
-          <a:prstGeom prst="rect">
-            <a:avLst/>
-          </a:prstGeom>
-          <a:solidFill>
-            <a:srgbClr val="FFFFFF"/>
-          </a:solidFill>
-          <a:ln w="9525">
-            <a:solidFill>
-              <a:srgbClr val="A6A6A6"/>
-            </a:solidFill>
-            <a:prstDash val="solid"/>
-          </a:ln>
-        </p:spPr>
-      </p:sp>
-      <p:sp>
-        <p:nvSpPr>
-          <p:cNvPr id="42" name="Text 38"/>
-          <p:cNvSpPr/>
-          <p:nvPr/>
-        </p:nvSpPr>
-        <p:spPr>
-          <a:xfrm>
-            <a:off x="6667348" y="4087368"/>
-            <a:ext cx="5112868" cy="685800"/>
-          </a:xfrm>
-          <a:prstGeom prst="rect">
-            <a:avLst/>
-          </a:prstGeom>
-          <a:noFill/>
-          <a:ln/>
-        </p:spPr>
-        <p:txBody>
-          <a:bodyPr wrap="square" lIns="0" tIns="0" rIns="0" bIns="0" rtlCol="0" anchor="t"/>
-          <a:lstStyle/>
-          <a:p>
-            <a:pPr algn="l" marL="177800" indent="-177800">
-              <a:spcAft>
-                <a:spcPts val="600"/>
-              </a:spcAft>
-              <a:buSzPct val="100000"/>
-              <a:buChar char="◆"/>
-            </a:pPr>
-            <a:r>
-              <a:rPr lang="en-US" sz="950" dirty="0">
-                <a:solidFill>
-                  <a:srgbClr val="262626"/>
-                </a:solidFill>
-                <a:latin typeface="Malgun Gothic" pitchFamily="34" charset="0"/>
-                <a:ea typeface="Malgun Gothic" pitchFamily="34" charset="-122"/>
-                <a:cs typeface="Malgun Gothic" pitchFamily="34" charset="-120"/>
-              </a:rPr>
-              <a:t>placement×scheduling 진짜 co-design — 이론 상한 최고</a:t>
-            </a:r>
-            <a:endParaRPr lang="en-US" sz="950" dirty="0"/>
-          </a:p>
-          <a:p>
-            <a:pPr algn="l" marL="177800" indent="-177800">
-              <a:spcAft>
-                <a:spcPts val="600"/>
-              </a:spcAft>
-              <a:buSzPct val="100000"/>
-              <a:buChar char="◆"/>
-            </a:pPr>
-            <a:r>
-              <a:rPr lang="en-US" sz="950" dirty="0">
-                <a:solidFill>
-                  <a:srgbClr val="262626"/>
-                </a:solidFill>
-                <a:latin typeface="Malgun Gothic" pitchFamily="34" charset="0"/>
-                <a:ea typeface="Malgun Gothic" pitchFamily="34" charset="-122"/>
-                <a:cs typeface="Malgun Gothic" pitchFamily="34" charset="-120"/>
-              </a:rPr>
-              <a:t>자사 HW 로드맵(HBM4·CMM-DC·HBF) 무제약 수용</a:t>
-            </a:r>
-            <a:endParaRPr lang="en-US" sz="950" dirty="0"/>
-          </a:p>
-          <a:p>
-            <a:pPr algn="l" marL="177800" indent="-177800">
-              <a:spcAft>
-                <a:spcPts val="600"/>
-              </a:spcAft>
-              <a:buSzPct val="100000"/>
-              <a:buChar char="◆"/>
-            </a:pPr>
-            <a:r>
-              <a:rPr lang="en-US" sz="950" dirty="0">
-                <a:solidFill>
-                  <a:srgbClr val="262626"/>
-                </a:solidFill>
-                <a:latin typeface="Malgun Gothic" pitchFamily="34" charset="0"/>
-                <a:ea typeface="Malgun Gothic" pitchFamily="34" charset="-122"/>
-                <a:cs typeface="Malgun Gothic" pitchFamily="34" charset="-120"/>
-              </a:rPr>
-              <a:t>아키텍처 주도권·IP 확보</a:t>
-            </a:r>
-            <a:endParaRPr lang="en-US" sz="950" dirty="0"/>
-          </a:p>
-        </p:txBody>
-      </p:sp>
-      <p:sp>
-        <p:nvSpPr>
-          <p:cNvPr id="43" name="Shape 39"/>
-          <p:cNvSpPr/>
-          <p:nvPr/>
-        </p:nvSpPr>
-        <p:spPr>
-          <a:xfrm>
-            <a:off x="320040" y="4818888"/>
-            <a:ext cx="960120" cy="777240"/>
-          </a:xfrm>
-          <a:prstGeom prst="rect">
-            <a:avLst/>
-          </a:prstGeom>
-          <a:solidFill>
-            <a:srgbClr val="1F3864"/>
-          </a:solidFill>
-          <a:ln w="9525">
-            <a:solidFill>
-              <a:srgbClr val="A6A6A6"/>
-            </a:solidFill>
-            <a:prstDash val="solid"/>
-          </a:ln>
-        </p:spPr>
-      </p:sp>
-      <p:sp>
-        <p:nvSpPr>
-          <p:cNvPr id="44" name="Text 40"/>
-          <p:cNvSpPr/>
-          <p:nvPr/>
-        </p:nvSpPr>
-        <p:spPr>
-          <a:xfrm>
-            <a:off x="320040" y="4818888"/>
-            <a:ext cx="960120" cy="777240"/>
-          </a:xfrm>
-          <a:prstGeom prst="rect">
-            <a:avLst/>
-          </a:prstGeom>
-          <a:noFill/>
-          <a:ln/>
-        </p:spPr>
-        <p:txBody>
-          <a:bodyPr wrap="square" lIns="0" tIns="0" rIns="0" bIns="0" rtlCol="0" anchor="ctr"/>
-          <a:lstStyle/>
-          <a:p>
-            <a:pPr algn="ctr" indent="0" marL="0">
-              <a:buNone/>
-            </a:pPr>
-            <a:r>
-              <a:rPr lang="en-US" sz="1050" b="1" dirty="0">
-                <a:solidFill>
-                  <a:srgbClr val="FFFFFF"/>
-                </a:solidFill>
-                <a:latin typeface="Malgun Gothic" pitchFamily="34" charset="0"/>
-                <a:ea typeface="Malgun Gothic" pitchFamily="34" charset="-122"/>
-                <a:cs typeface="Malgun Gothic" pitchFamily="34" charset="-120"/>
-              </a:rPr>
-              <a:t>단점</a:t>
-            </a:r>
-            <a:endParaRPr lang="en-US" sz="1050" dirty="0"/>
-          </a:p>
-        </p:txBody>
-      </p:sp>
-      <p:sp>
-        <p:nvSpPr>
-          <p:cNvPr id="45" name="Shape 41"/>
-          <p:cNvSpPr/>
-          <p:nvPr/>
-        </p:nvSpPr>
-        <p:spPr>
-          <a:xfrm>
-            <a:off x="1280160" y="4818888"/>
-            <a:ext cx="5295748" cy="777240"/>
-          </a:xfrm>
-          <a:prstGeom prst="rect">
-            <a:avLst/>
-          </a:prstGeom>
-          <a:solidFill>
-            <a:srgbClr val="FFFFFF"/>
-          </a:solidFill>
-          <a:ln w="9525">
-            <a:solidFill>
-              <a:srgbClr val="A6A6A6"/>
-            </a:solidFill>
-            <a:prstDash val="solid"/>
-          </a:ln>
-        </p:spPr>
-      </p:sp>
-      <p:sp>
-        <p:nvSpPr>
-          <p:cNvPr id="46" name="Text 42"/>
-          <p:cNvSpPr/>
-          <p:nvPr/>
-        </p:nvSpPr>
-        <p:spPr>
-          <a:xfrm>
-            <a:off x="1371600" y="4864608"/>
-            <a:ext cx="5112868" cy="685800"/>
-          </a:xfrm>
-          <a:prstGeom prst="rect">
-            <a:avLst/>
-          </a:prstGeom>
-          <a:noFill/>
-          <a:ln/>
-        </p:spPr>
-        <p:txBody>
-          <a:bodyPr wrap="square" lIns="0" tIns="0" rIns="0" bIns="0" rtlCol="0" anchor="t"/>
-          <a:lstStyle/>
-          <a:p>
-            <a:pPr algn="l" marL="177800" indent="-177800">
-              <a:spcAft>
-                <a:spcPts val="600"/>
-              </a:spcAft>
-              <a:buSzPct val="100000"/>
-              <a:buChar char="◆"/>
-            </a:pPr>
-            <a:r>
-              <a:rPr lang="en-US" sz="950" dirty="0">
-                <a:solidFill>
-                  <a:srgbClr val="262626"/>
-                </a:solidFill>
-                <a:latin typeface="Malgun Gothic" pitchFamily="34" charset="0"/>
-                <a:ea typeface="Malgun Gothic" pitchFamily="34" charset="-122"/>
-                <a:cs typeface="Malgun Gothic" pitchFamily="34" charset="-120"/>
-              </a:rPr>
-              <a:t>scheduler tier 비인지 — co-scheduling 이득 미회수</a:t>
-            </a:r>
-            <a:endParaRPr lang="en-US" sz="950" dirty="0"/>
-          </a:p>
-          <a:p>
-            <a:pPr algn="l" marL="177800" indent="-177800">
-              <a:spcAft>
-                <a:spcPts val="600"/>
-              </a:spcAft>
-              <a:buSzPct val="100000"/>
-              <a:buChar char="◆"/>
-            </a:pPr>
-            <a:r>
-              <a:rPr lang="en-US" sz="950" dirty="0">
-                <a:solidFill>
-                  <a:srgbClr val="262626"/>
-                </a:solidFill>
-                <a:latin typeface="Malgun Gothic" pitchFamily="34" charset="0"/>
-                <a:ea typeface="Malgun Gothic" pitchFamily="34" charset="-122"/>
-                <a:cs typeface="Malgun Gothic" pitchFamily="34" charset="-120"/>
-              </a:rPr>
-              <a:t>비연속·압축 KV는 block table 밖 2급 시민</a:t>
-            </a:r>
-            <a:endParaRPr lang="en-US" sz="950" dirty="0"/>
-          </a:p>
-          <a:p>
-            <a:pPr algn="l" marL="177800" indent="-177800">
-              <a:spcAft>
-                <a:spcPts val="600"/>
-              </a:spcAft>
-              <a:buSzPct val="100000"/>
-              <a:buChar char="◆"/>
-            </a:pPr>
-            <a:r>
-              <a:rPr lang="en-US" sz="950" dirty="0">
-                <a:solidFill>
-                  <a:srgbClr val="262626"/>
-                </a:solidFill>
-                <a:latin typeface="Malgun Gothic" pitchFamily="34" charset="0"/>
-                <a:ea typeface="Malgun Gothic" pitchFamily="34" charset="-122"/>
-                <a:cs typeface="Malgun Gothic" pitchFamily="34" charset="-120"/>
-              </a:rPr>
-              <a:t>"vLLM 애드온" 인식 리스크 (변형 B는 희석 더 강함)</a:t>
-            </a:r>
-            <a:endParaRPr lang="en-US" sz="950" dirty="0"/>
-          </a:p>
-        </p:txBody>
-      </p:sp>
-      <p:sp>
-        <p:nvSpPr>
-          <p:cNvPr id="47" name="Shape 43"/>
-          <p:cNvSpPr/>
-          <p:nvPr/>
-        </p:nvSpPr>
-        <p:spPr>
-          <a:xfrm>
-            <a:off x="6575908" y="4818888"/>
-            <a:ext cx="5295748" cy="777240"/>
-          </a:xfrm>
-          <a:prstGeom prst="rect">
-            <a:avLst/>
-          </a:prstGeom>
-          <a:solidFill>
-            <a:srgbClr val="FFFFFF"/>
-          </a:solidFill>
-          <a:ln w="9525">
-            <a:solidFill>
-              <a:srgbClr val="A6A6A6"/>
-            </a:solidFill>
-            <a:prstDash val="solid"/>
-          </a:ln>
-        </p:spPr>
-      </p:sp>
-      <p:sp>
-        <p:nvSpPr>
-          <p:cNvPr id="48" name="Text 44"/>
-          <p:cNvSpPr/>
-          <p:nvPr/>
-        </p:nvSpPr>
-        <p:spPr>
-          <a:xfrm>
-            <a:off x="6667348" y="4864608"/>
-            <a:ext cx="5112868" cy="685800"/>
-          </a:xfrm>
-          <a:prstGeom prst="rect">
-            <a:avLst/>
-          </a:prstGeom>
-          <a:noFill/>
-          <a:ln/>
-        </p:spPr>
-        <p:txBody>
-          <a:bodyPr wrap="square" lIns="0" tIns="0" rIns="0" bIns="0" rtlCol="0" anchor="t"/>
-          <a:lstStyle/>
-          <a:p>
-            <a:pPr algn="l" marL="177800" indent="-177800">
-              <a:spcAft>
-                <a:spcPts val="600"/>
-              </a:spcAft>
-              <a:buSzPct val="100000"/>
-              <a:buChar char="◆"/>
-            </a:pPr>
-            <a:r>
-              <a:rPr lang="en-US" sz="950" dirty="0">
-                <a:solidFill>
-                  <a:srgbClr val="262626"/>
-                </a:solidFill>
-                <a:latin typeface="Malgun Gothic" pitchFamily="34" charset="0"/>
-                <a:ea typeface="Malgun Gothic" pitchFamily="34" charset="-122"/>
-                <a:cs typeface="Malgun Gothic" pitchFamily="34" charset="-120"/>
-              </a:rPr>
-              <a:t>재구현 수십 인월+ — vLLM 동등 baseline 도달 리스크</a:t>
-            </a:r>
-            <a:endParaRPr lang="en-US" sz="950" dirty="0"/>
-          </a:p>
-          <a:p>
-            <a:pPr algn="l" marL="177800" indent="-177800">
-              <a:spcAft>
-                <a:spcPts val="600"/>
-              </a:spcAft>
-              <a:buSzPct val="100000"/>
-              <a:buChar char="◆"/>
-            </a:pPr>
-            <a:r>
-              <a:rPr lang="en-US" sz="950" dirty="0">
-                <a:solidFill>
-                  <a:srgbClr val="262626"/>
-                </a:solidFill>
-                <a:latin typeface="Malgun Gothic" pitchFamily="34" charset="0"/>
-                <a:ea typeface="Malgun Gothic" pitchFamily="34" charset="-122"/>
-                <a:cs typeface="Malgun Gothic" pitchFamily="34" charset="-120"/>
-              </a:rPr>
-              <a:t>미검증 실행 코어의 수치 검증 부담</a:t>
-            </a:r>
-            <a:endParaRPr lang="en-US" sz="950" dirty="0"/>
-          </a:p>
-          <a:p>
-            <a:pPr algn="l" marL="177800" indent="-177800">
-              <a:spcAft>
-                <a:spcPts val="600"/>
-              </a:spcAft>
-              <a:buSzPct val="100000"/>
-              <a:buChar char="◆"/>
-            </a:pPr>
-            <a:r>
-              <a:rPr lang="en-US" sz="950" dirty="0">
-                <a:solidFill>
-                  <a:srgbClr val="262626"/>
-                </a:solidFill>
-                <a:latin typeface="Malgun Gothic" pitchFamily="34" charset="0"/>
-                <a:ea typeface="Malgun Gothic" pitchFamily="34" charset="-122"/>
-                <a:cs typeface="Malgun Gothic" pitchFamily="34" charset="-120"/>
-              </a:rPr>
-              <a:t>신규 모델·기법 영구 추종 (리드타임 만성 열세)</a:t>
-            </a:r>
-            <a:endParaRPr lang="en-US" sz="950" dirty="0"/>
-          </a:p>
-        </p:txBody>
-      </p:sp>
-      <p:sp>
-        <p:nvSpPr>
-          <p:cNvPr id="49" name="Shape 45"/>
-          <p:cNvSpPr/>
-          <p:nvPr/>
-        </p:nvSpPr>
-        <p:spPr>
-          <a:xfrm>
-            <a:off x="320040" y="5596128"/>
-            <a:ext cx="960120" cy="640080"/>
-          </a:xfrm>
-          <a:prstGeom prst="rect">
-            <a:avLst/>
-          </a:prstGeom>
-          <a:solidFill>
-            <a:srgbClr val="1F3864"/>
-          </a:solidFill>
-          <a:ln w="9525">
-            <a:solidFill>
-              <a:srgbClr val="A6A6A6"/>
-            </a:solidFill>
-            <a:prstDash val="solid"/>
-          </a:ln>
-        </p:spPr>
-      </p:sp>
-      <p:sp>
-        <p:nvSpPr>
-          <p:cNvPr id="50" name="Text 46"/>
-          <p:cNvSpPr/>
-          <p:nvPr/>
-        </p:nvSpPr>
-        <p:spPr>
-          <a:xfrm>
-            <a:off x="320040" y="5596128"/>
-            <a:ext cx="960120" cy="640080"/>
-          </a:xfrm>
-          <a:prstGeom prst="rect">
-            <a:avLst/>
-          </a:prstGeom>
-          <a:noFill/>
-          <a:ln/>
-        </p:spPr>
-        <p:txBody>
-          <a:bodyPr wrap="square" lIns="0" tIns="0" rIns="0" bIns="0" rtlCol="0" anchor="ctr"/>
-          <a:lstStyle/>
-          <a:p>
-            <a:pPr algn="ctr" indent="0" marL="0">
-              <a:buNone/>
-            </a:pPr>
-            <a:r>
-              <a:rPr lang="en-US" sz="1050" b="1" dirty="0">
-                <a:solidFill>
-                  <a:srgbClr val="FFFFFF"/>
-                </a:solidFill>
-                <a:latin typeface="Malgun Gothic" pitchFamily="34" charset="0"/>
-                <a:ea typeface="Malgun Gothic" pitchFamily="34" charset="-122"/>
-                <a:cs typeface="Malgun Gothic" pitchFamily="34" charset="-120"/>
-              </a:rPr>
-              <a:t>Trade-off</a:t>
-            </a:r>
-            <a:endParaRPr lang="en-US" sz="1050" dirty="0"/>
-          </a:p>
-          <a:p>
-            <a:pPr algn="ctr" indent="0" marL="0">
-              <a:buNone/>
-            </a:pPr>
-            <a:r>
-              <a:rPr lang="en-US" sz="1050" b="1" dirty="0">
-                <a:solidFill>
-                  <a:srgbClr val="FFFFFF"/>
-                </a:solidFill>
-                <a:latin typeface="Malgun Gothic" pitchFamily="34" charset="0"/>
-                <a:ea typeface="Malgun Gothic" pitchFamily="34" charset="-122"/>
-                <a:cs typeface="Malgun Gothic" pitchFamily="34" charset="-120"/>
-              </a:rPr>
-              <a:t>(QA 평가)</a:t>
-            </a:r>
-            <a:endParaRPr lang="en-US" sz="1050" dirty="0"/>
-          </a:p>
-        </p:txBody>
-      </p:sp>
-      <p:sp>
-        <p:nvSpPr>
-          <p:cNvPr id="51" name="Shape 47"/>
-          <p:cNvSpPr/>
-          <p:nvPr/>
-        </p:nvSpPr>
-        <p:spPr>
-          <a:xfrm>
-            <a:off x="1280160" y="5596128"/>
-            <a:ext cx="5295748" cy="640080"/>
-          </a:xfrm>
-          <a:prstGeom prst="rect">
-            <a:avLst/>
-          </a:prstGeom>
-          <a:solidFill>
-            <a:srgbClr val="FFFFFF"/>
-          </a:solidFill>
-          <a:ln w="9525">
-            <a:solidFill>
-              <a:srgbClr val="A6A6A6"/>
-            </a:solidFill>
-            <a:prstDash val="solid"/>
-          </a:ln>
-        </p:spPr>
-      </p:sp>
-      <p:sp>
-        <p:nvSpPr>
-          <p:cNvPr id="52" name="Text 48"/>
-          <p:cNvSpPr/>
-          <p:nvPr/>
-        </p:nvSpPr>
-        <p:spPr>
-          <a:xfrm>
-            <a:off x="1371600" y="5641848"/>
-            <a:ext cx="5112868" cy="548640"/>
-          </a:xfrm>
-          <a:prstGeom prst="rect">
-            <a:avLst/>
-          </a:prstGeom>
-          <a:noFill/>
-          <a:ln/>
-        </p:spPr>
-        <p:txBody>
-          <a:bodyPr wrap="square" lIns="0" tIns="0" rIns="0" bIns="0" rtlCol="0" anchor="t"/>
-          <a:lstStyle/>
-          <a:p>
-            <a:pPr algn="l" marL="177800" indent="-177800">
-              <a:spcAft>
-                <a:spcPts val="600"/>
-              </a:spcAft>
-              <a:buSzPct val="100000"/>
-              <a:buChar char="◆"/>
-            </a:pPr>
-            <a:r>
-              <a:rPr lang="en-US" sz="950" b="1" dirty="0">
-                <a:solidFill>
-                  <a:srgbClr val="B3402A"/>
-                </a:solidFill>
-                <a:latin typeface="Malgun Gothic" pitchFamily="34" charset="0"/>
-                <a:ea typeface="Malgun Gothic" pitchFamily="34" charset="-122"/>
-                <a:cs typeface="Malgun Gothic" pitchFamily="34" charset="-120"/>
-              </a:rPr>
-              <a:t>QA1 ★★☆</a:t>
-            </a:r>
-            <a:pPr algn="l" indent="0" marL="0">
-              <a:spcAft>
-                <a:spcPts val="600"/>
-              </a:spcAft>
-              <a:buNone/>
-            </a:pPr>
-            <a:r>
-              <a:rPr lang="en-US" sz="950" dirty="0">
-                <a:solidFill>
-                  <a:srgbClr val="262626"/>
-                </a:solidFill>
-                <a:latin typeface="Malgun Gothic" pitchFamily="34" charset="0"/>
-                <a:ea typeface="Malgun Gothic" pitchFamily="34" charset="-122"/>
-                <a:cs typeface="Malgun Gothic" pitchFamily="34" charset="-120"/>
-              </a:rPr>
-              <a:t> · </a:t>
-            </a:r>
-            <a:pPr algn="l" indent="0" marL="0">
-              <a:spcAft>
-                <a:spcPts val="600"/>
-              </a:spcAft>
-              <a:buNone/>
-            </a:pPr>
-            <a:r>
-              <a:rPr lang="en-US" sz="950" b="1" dirty="0">
-                <a:solidFill>
-                  <a:srgbClr val="B3402A"/>
-                </a:solidFill>
-                <a:latin typeface="Malgun Gothic" pitchFamily="34" charset="0"/>
-                <a:ea typeface="Malgun Gothic" pitchFamily="34" charset="-122"/>
-                <a:cs typeface="Malgun Gothic" pitchFamily="34" charset="-120"/>
-              </a:rPr>
-              <a:t>QA2 ★★☆</a:t>
-            </a:r>
-            <a:pPr algn="l" indent="0" marL="0">
-              <a:spcAft>
-                <a:spcPts val="600"/>
-              </a:spcAft>
-              <a:buNone/>
-            </a:pPr>
-            <a:r>
-              <a:rPr lang="en-US" sz="950" dirty="0">
-                <a:solidFill>
-                  <a:srgbClr val="262626"/>
-                </a:solidFill>
-                <a:latin typeface="Malgun Gothic" pitchFamily="34" charset="0"/>
-                <a:ea typeface="Malgun Gothic" pitchFamily="34" charset="-122"/>
-                <a:cs typeface="Malgun Gothic" pitchFamily="34" charset="-120"/>
-              </a:rPr>
-              <a:t> · </a:t>
-            </a:r>
-            <a:pPr algn="l" indent="0" marL="0">
-              <a:spcAft>
-                <a:spcPts val="600"/>
-              </a:spcAft>
-              <a:buNone/>
-            </a:pPr>
-            <a:r>
-              <a:rPr lang="en-US" sz="950" b="1" dirty="0">
-                <a:solidFill>
-                  <a:srgbClr val="1B7A4B"/>
-                </a:solidFill>
-                <a:latin typeface="Malgun Gothic" pitchFamily="34" charset="0"/>
-                <a:ea typeface="Malgun Gothic" pitchFamily="34" charset="-122"/>
-                <a:cs typeface="Malgun Gothic" pitchFamily="34" charset="-120"/>
-              </a:rPr>
-              <a:t>QA3 ★★★</a:t>
-            </a:r>
-            <a:pPr algn="l" indent="0" marL="0">
-              <a:spcAft>
-                <a:spcPts val="600"/>
-              </a:spcAft>
-              <a:buNone/>
-            </a:pPr>
-            <a:r>
-              <a:rPr lang="en-US" sz="950" dirty="0">
-                <a:solidFill>
-                  <a:srgbClr val="262626"/>
-                </a:solidFill>
-                <a:latin typeface="Malgun Gothic" pitchFamily="34" charset="0"/>
-                <a:ea typeface="Malgun Gothic" pitchFamily="34" charset="-122"/>
-                <a:cs typeface="Malgun Gothic" pitchFamily="34" charset="-120"/>
-              </a:rPr>
-              <a:t> · </a:t>
-            </a:r>
-            <a:pPr algn="l" indent="0" marL="0">
-              <a:spcAft>
-                <a:spcPts val="600"/>
-              </a:spcAft>
-              <a:buNone/>
-            </a:pPr>
-            <a:r>
-              <a:rPr lang="en-US" sz="950" b="1" dirty="0">
-                <a:solidFill>
-                  <a:srgbClr val="1B7A4B"/>
-                </a:solidFill>
-                <a:latin typeface="Malgun Gothic" pitchFamily="34" charset="0"/>
-                <a:ea typeface="Malgun Gothic" pitchFamily="34" charset="-122"/>
-                <a:cs typeface="Malgun Gothic" pitchFamily="34" charset="-120"/>
-              </a:rPr>
-              <a:t>QA4 ★★☆</a:t>
-            </a:r>
-            <a:pPr algn="l" indent="0" marL="0">
-              <a:spcAft>
-                <a:spcPts val="600"/>
-              </a:spcAft>
-              <a:buNone/>
-            </a:pPr>
-            <a:r>
-              <a:rPr lang="en-US" sz="950" dirty="0">
-                <a:solidFill>
-                  <a:srgbClr val="262626"/>
-                </a:solidFill>
-                <a:latin typeface="Malgun Gothic" pitchFamily="34" charset="0"/>
-                <a:ea typeface="Malgun Gothic" pitchFamily="34" charset="-122"/>
-                <a:cs typeface="Malgun Gothic" pitchFamily="34" charset="-120"/>
-              </a:rPr>
-              <a:t> · </a:t>
-            </a:r>
-            <a:pPr algn="l" indent="0" marL="0">
-              <a:spcAft>
-                <a:spcPts val="600"/>
-              </a:spcAft>
-              <a:buNone/>
-            </a:pPr>
-            <a:r>
-              <a:rPr lang="en-US" sz="950" b="1" dirty="0">
-                <a:solidFill>
-                  <a:srgbClr val="1B7A4B"/>
-                </a:solidFill>
-                <a:latin typeface="Malgun Gothic" pitchFamily="34" charset="0"/>
-                <a:ea typeface="Malgun Gothic" pitchFamily="34" charset="-122"/>
-                <a:cs typeface="Malgun Gothic" pitchFamily="34" charset="-120"/>
-              </a:rPr>
-              <a:t>QA5 ★★★</a:t>
-            </a:r>
-            <a:endParaRPr lang="en-US" sz="950" dirty="0"/>
-          </a:p>
-        </p:txBody>
-      </p:sp>
-      <p:sp>
-        <p:nvSpPr>
-          <p:cNvPr id="53" name="Shape 49"/>
-          <p:cNvSpPr/>
-          <p:nvPr/>
-        </p:nvSpPr>
-        <p:spPr>
-          <a:xfrm>
-            <a:off x="6575908" y="5596128"/>
-            <a:ext cx="5295748" cy="640080"/>
-          </a:xfrm>
-          <a:prstGeom prst="rect">
-            <a:avLst/>
-          </a:prstGeom>
-          <a:solidFill>
-            <a:srgbClr val="FFFFFF"/>
-          </a:solidFill>
-          <a:ln w="9525">
-            <a:solidFill>
-              <a:srgbClr val="A6A6A6"/>
-            </a:solidFill>
-            <a:prstDash val="solid"/>
-          </a:ln>
-        </p:spPr>
-      </p:sp>
-      <p:sp>
-        <p:nvSpPr>
-          <p:cNvPr id="54" name="Text 50"/>
-          <p:cNvSpPr/>
-          <p:nvPr/>
-        </p:nvSpPr>
-        <p:spPr>
-          <a:xfrm>
-            <a:off x="6667348" y="5641848"/>
-            <a:ext cx="5112868" cy="548640"/>
-          </a:xfrm>
-          <a:prstGeom prst="rect">
-            <a:avLst/>
-          </a:prstGeom>
-          <a:noFill/>
-          <a:ln/>
-        </p:spPr>
-        <p:txBody>
-          <a:bodyPr wrap="square" lIns="0" tIns="0" rIns="0" bIns="0" rtlCol="0" anchor="t"/>
-          <a:lstStyle/>
-          <a:p>
-            <a:pPr algn="l" marL="177800" indent="-177800">
-              <a:spcAft>
-                <a:spcPts val="600"/>
-              </a:spcAft>
-              <a:buSzPct val="100000"/>
-              <a:buChar char="◆"/>
-            </a:pPr>
-            <a:r>
-              <a:rPr lang="en-US" sz="950" b="1" dirty="0">
-                <a:solidFill>
-                  <a:srgbClr val="1B7A4B"/>
-                </a:solidFill>
-                <a:latin typeface="Malgun Gothic" pitchFamily="34" charset="0"/>
-                <a:ea typeface="Malgun Gothic" pitchFamily="34" charset="-122"/>
-                <a:cs typeface="Malgun Gothic" pitchFamily="34" charset="-120"/>
-              </a:rPr>
-              <a:t>QA1 ★★★(도달 ★☆)</a:t>
-            </a:r>
-            <a:pPr algn="l" indent="0" marL="0">
-              <a:spcAft>
-                <a:spcPts val="600"/>
-              </a:spcAft>
-              <a:buNone/>
-            </a:pPr>
-            <a:r>
-              <a:rPr lang="en-US" sz="950" dirty="0">
-                <a:solidFill>
-                  <a:srgbClr val="262626"/>
-                </a:solidFill>
-                <a:latin typeface="Malgun Gothic" pitchFamily="34" charset="0"/>
-                <a:ea typeface="Malgun Gothic" pitchFamily="34" charset="-122"/>
-                <a:cs typeface="Malgun Gothic" pitchFamily="34" charset="-120"/>
-              </a:rPr>
-              <a:t> · </a:t>
-            </a:r>
-            <a:pPr algn="l" indent="0" marL="0">
-              <a:spcAft>
-                <a:spcPts val="600"/>
-              </a:spcAft>
-              <a:buNone/>
-            </a:pPr>
-            <a:r>
-              <a:rPr lang="en-US" sz="950" b="1" dirty="0">
-                <a:solidFill>
-                  <a:srgbClr val="1B7A4B"/>
-                </a:solidFill>
-                <a:latin typeface="Malgun Gothic" pitchFamily="34" charset="0"/>
-                <a:ea typeface="Malgun Gothic" pitchFamily="34" charset="-122"/>
-                <a:cs typeface="Malgun Gothic" pitchFamily="34" charset="-120"/>
-              </a:rPr>
-              <a:t>QA2 ★★★</a:t>
-            </a:r>
-            <a:pPr algn="l" indent="0" marL="0">
-              <a:spcAft>
-                <a:spcPts val="600"/>
-              </a:spcAft>
-              <a:buNone/>
-            </a:pPr>
-            <a:r>
-              <a:rPr lang="en-US" sz="950" dirty="0">
-                <a:solidFill>
-                  <a:srgbClr val="262626"/>
-                </a:solidFill>
-                <a:latin typeface="Malgun Gothic" pitchFamily="34" charset="0"/>
-                <a:ea typeface="Malgun Gothic" pitchFamily="34" charset="-122"/>
-                <a:cs typeface="Malgun Gothic" pitchFamily="34" charset="-120"/>
-              </a:rPr>
-              <a:t> · </a:t>
-            </a:r>
-            <a:pPr algn="l" indent="0" marL="0">
-              <a:spcAft>
-                <a:spcPts val="600"/>
-              </a:spcAft>
-              <a:buNone/>
-            </a:pPr>
-            <a:r>
-              <a:rPr lang="en-US" sz="950" b="1" dirty="0">
-                <a:solidFill>
-                  <a:srgbClr val="B3402A"/>
-                </a:solidFill>
-                <a:latin typeface="Malgun Gothic" pitchFamily="34" charset="0"/>
-                <a:ea typeface="Malgun Gothic" pitchFamily="34" charset="-122"/>
-                <a:cs typeface="Malgun Gothic" pitchFamily="34" charset="-120"/>
-              </a:rPr>
-              <a:t>QA3 ★☆☆</a:t>
-            </a:r>
-            <a:pPr algn="l" indent="0" marL="0">
-              <a:spcAft>
-                <a:spcPts val="600"/>
-              </a:spcAft>
-              <a:buNone/>
-            </a:pPr>
-            <a:r>
-              <a:rPr lang="en-US" sz="950" dirty="0">
-                <a:solidFill>
-                  <a:srgbClr val="262626"/>
-                </a:solidFill>
-                <a:latin typeface="Malgun Gothic" pitchFamily="34" charset="0"/>
-                <a:ea typeface="Malgun Gothic" pitchFamily="34" charset="-122"/>
-                <a:cs typeface="Malgun Gothic" pitchFamily="34" charset="-120"/>
-              </a:rPr>
-              <a:t> · </a:t>
-            </a:r>
-            <a:pPr algn="l" indent="0" marL="0">
-              <a:spcAft>
-                <a:spcPts val="600"/>
-              </a:spcAft>
-              <a:buNone/>
-            </a:pPr>
-            <a:r>
-              <a:rPr lang="en-US" sz="950" b="1" dirty="0">
-                <a:solidFill>
-                  <a:srgbClr val="B3402A"/>
-                </a:solidFill>
-                <a:latin typeface="Malgun Gothic" pitchFamily="34" charset="0"/>
-                <a:ea typeface="Malgun Gothic" pitchFamily="34" charset="-122"/>
-                <a:cs typeface="Malgun Gothic" pitchFamily="34" charset="-120"/>
-              </a:rPr>
-              <a:t>QA4 ★☆☆</a:t>
-            </a:r>
-            <a:pPr algn="l" indent="0" marL="0">
-              <a:spcAft>
-                <a:spcPts val="600"/>
-              </a:spcAft>
-              <a:buNone/>
-            </a:pPr>
-            <a:r>
-              <a:rPr lang="en-US" sz="950" dirty="0">
-                <a:solidFill>
-                  <a:srgbClr val="262626"/>
-                </a:solidFill>
-                <a:latin typeface="Malgun Gothic" pitchFamily="34" charset="0"/>
-                <a:ea typeface="Malgun Gothic" pitchFamily="34" charset="-122"/>
-                <a:cs typeface="Malgun Gothic" pitchFamily="34" charset="-120"/>
-              </a:rPr>
-              <a:t> · </a:t>
-            </a:r>
-            <a:pPr algn="l" indent="0" marL="0">
-              <a:spcAft>
-                <a:spcPts val="600"/>
-              </a:spcAft>
-              <a:buNone/>
-            </a:pPr>
-            <a:r>
-              <a:rPr lang="en-US" sz="950" b="1" dirty="0">
-                <a:solidFill>
-                  <a:srgbClr val="B3402A"/>
-                </a:solidFill>
-                <a:latin typeface="Malgun Gothic" pitchFamily="34" charset="0"/>
-                <a:ea typeface="Malgun Gothic" pitchFamily="34" charset="-122"/>
-                <a:cs typeface="Malgun Gothic" pitchFamily="34" charset="-120"/>
-              </a:rPr>
-              <a:t>QA5 ★☆☆</a:t>
-            </a:r>
-            <a:endParaRPr lang="en-US" sz="950" dirty="0"/>
-          </a:p>
-        </p:txBody>
-      </p:sp>
+      <p:graphicFrame>
+        <p:nvGraphicFramePr>
+          <p:cNvPr id="3" name="Table 0"/>
+          <p:cNvGraphicFramePr>
+            <a:graphicFrameLocks noGrp="1"/>
+          </p:cNvGraphicFramePr>
+          <p:nvPr>
+            <p:extLst>
+              <p:ext uri="{D42A27DB-BD31-4B8C-83A1-F6EECF244321}">
+                <p14:modId xmlns:p14="http://schemas.microsoft.com/office/powerpoint/2010/main" val="1579011935"/>
+              </p:ext>
+            </p:extLst>
+          </p:nvPr>
+        </p:nvGraphicFramePr>
+        <p:xfrm>
+          <a:off x="320040" y="4965192"/>
+          <a:ext cx="11551615" cy="914400"/>
+        </p:xfrm>
+        <a:graphic>
+          <a:graphicData uri="http://schemas.openxmlformats.org/drawingml/2006/table">
+            <a:tbl>
+              <a:tblPr/>
+              <a:tblGrid>
+                <a:gridCol w="914400"/>
+                <a:gridCol w="5318608"/>
+                <a:gridCol w="5318608"/>
+              </a:tblGrid>
+              <a:tr h="219456">
+                <a:tc>
+                  <a:txBody>
+                    <a:bodyPr/>
+                    <a:lstStyle/>
+                    <a:p>
+                      <a:pPr algn="ctr" indent="0" marL="0">
+                        <a:buNone/>
+                      </a:pPr>
+                      <a:r>
+                        <a:rPr lang="en-US" sz="900" b="1" dirty="0">
+                          <a:solidFill>
+                            <a:srgbClr val="FFFFFF"/>
+                          </a:solidFill>
+                          <a:latin typeface="Malgun Gothic" pitchFamily="34" charset="0"/>
+                          <a:ea typeface="Malgun Gothic" pitchFamily="34" charset="-122"/>
+                          <a:cs typeface="Malgun Gothic" pitchFamily="34" charset="-120"/>
+                        </a:rPr>
+                        <a:t>구분</a:t>
+                      </a:r>
+                      <a:endParaRPr lang="en-US" sz="900" dirty="0">
+                        <a:latin typeface="Malgun Gothic" charset="0"/>
+                        <a:ea typeface="Malgun Gothic" charset="0"/>
+                        <a:cs typeface="Malgun Gothic" charset="0"/>
+                      </a:endParaRPr>
+                    </a:p>
+                  </a:txBody>
+                  <a:tcPr marL="91440" marR="91440" marT="45720" marB="45720" anchor="ctr">
+                    <a:lnL w="9525" cap="flat" cmpd="sng" algn="ctr">
+                      <a:solidFill>
+                        <a:srgbClr val="A6A6A6"/>
+                      </a:solidFill>
+                      <a:prstDash val="solid"/>
+                      <a:round/>
+                      <a:headEnd type="none" w="med" len="med"/>
+                      <a:tailEnd type="none" w="med" len="med"/>
+                    </a:lnL>
+                    <a:lnR w="9525" cap="flat" cmpd="sng" algn="ctr">
+                      <a:solidFill>
+                        <a:srgbClr val="A6A6A6"/>
+                      </a:solidFill>
+                      <a:prstDash val="solid"/>
+                      <a:round/>
+                      <a:headEnd type="none" w="med" len="med"/>
+                      <a:tailEnd type="none" w="med" len="med"/>
+                    </a:lnR>
+                    <a:lnT w="9525" cap="flat" cmpd="sng" algn="ctr">
+                      <a:solidFill>
+                        <a:srgbClr val="A6A6A6"/>
+                      </a:solidFill>
+                      <a:prstDash val="solid"/>
+                      <a:round/>
+                      <a:headEnd type="none" w="med" len="med"/>
+                      <a:tailEnd type="none" w="med" len="med"/>
+                    </a:lnT>
+                    <a:lnB w="9525" cap="flat" cmpd="sng" algn="ctr">
+                      <a:solidFill>
+                        <a:srgbClr val="A6A6A6"/>
+                      </a:solidFill>
+                      <a:prstDash val="solid"/>
+                      <a:round/>
+                      <a:headEnd type="none" w="med" len="med"/>
+                      <a:tailEnd type="none" w="med" len="med"/>
+                    </a:lnB>
+                    <a:solidFill>
+                      <a:srgbClr val="3C5F2C"/>
+                    </a:solidFill>
+                  </a:tcPr>
+                </a:tc>
+                <a:tc>
+                  <a:txBody>
+                    <a:bodyPr/>
+                    <a:lstStyle/>
+                    <a:p>
+                      <a:pPr algn="ctr" indent="0" marL="0">
+                        <a:buNone/>
+                      </a:pPr>
+                      <a:r>
+                        <a:rPr lang="en-US" sz="900" b="1" dirty="0">
+                          <a:solidFill>
+                            <a:srgbClr val="FFFFFF"/>
+                          </a:solidFill>
+                          <a:latin typeface="Malgun Gothic" pitchFamily="34" charset="0"/>
+                          <a:ea typeface="Malgun Gothic" pitchFamily="34" charset="-122"/>
+                          <a:cs typeface="Malgun Gothic" pitchFamily="34" charset="-120"/>
+                        </a:rPr>
+                        <a:t>후보 1 — 외부 스택 활용형 (vLLM 생태계)</a:t>
+                      </a:r>
+                      <a:endParaRPr lang="en-US" sz="900" dirty="0">
+                        <a:latin typeface="Malgun Gothic" charset="0"/>
+                        <a:ea typeface="Malgun Gothic" charset="0"/>
+                        <a:cs typeface="Malgun Gothic" charset="0"/>
+                      </a:endParaRPr>
+                    </a:p>
+                  </a:txBody>
+                  <a:tcPr marL="91440" marR="91440" marT="45720" marB="45720" anchor="ctr">
+                    <a:lnL w="9525" cap="flat" cmpd="sng" algn="ctr">
+                      <a:solidFill>
+                        <a:srgbClr val="A6A6A6"/>
+                      </a:solidFill>
+                      <a:prstDash val="solid"/>
+                      <a:round/>
+                      <a:headEnd type="none" w="med" len="med"/>
+                      <a:tailEnd type="none" w="med" len="med"/>
+                    </a:lnL>
+                    <a:lnR w="9525" cap="flat" cmpd="sng" algn="ctr">
+                      <a:solidFill>
+                        <a:srgbClr val="A6A6A6"/>
+                      </a:solidFill>
+                      <a:prstDash val="solid"/>
+                      <a:round/>
+                      <a:headEnd type="none" w="med" len="med"/>
+                      <a:tailEnd type="none" w="med" len="med"/>
+                    </a:lnR>
+                    <a:lnT w="9525" cap="flat" cmpd="sng" algn="ctr">
+                      <a:solidFill>
+                        <a:srgbClr val="A6A6A6"/>
+                      </a:solidFill>
+                      <a:prstDash val="solid"/>
+                      <a:round/>
+                      <a:headEnd type="none" w="med" len="med"/>
+                      <a:tailEnd type="none" w="med" len="med"/>
+                    </a:lnT>
+                    <a:lnB w="9525" cap="flat" cmpd="sng" algn="ctr">
+                      <a:solidFill>
+                        <a:srgbClr val="A6A6A6"/>
+                      </a:solidFill>
+                      <a:prstDash val="solid"/>
+                      <a:round/>
+                      <a:headEnd type="none" w="med" len="med"/>
+                      <a:tailEnd type="none" w="med" len="med"/>
+                    </a:lnB>
+                    <a:solidFill>
+                      <a:srgbClr val="3C5F2C"/>
+                    </a:solidFill>
+                  </a:tcPr>
+                </a:tc>
+                <a:tc>
+                  <a:txBody>
+                    <a:bodyPr/>
+                    <a:lstStyle/>
+                    <a:p>
+                      <a:pPr algn="ctr" indent="0" marL="0">
+                        <a:buNone/>
+                      </a:pPr>
+                      <a:r>
+                        <a:rPr lang="en-US" sz="900" b="1" dirty="0">
+                          <a:solidFill>
+                            <a:srgbClr val="FFFFFF"/>
+                          </a:solidFill>
+                          <a:latin typeface="Malgun Gothic" pitchFamily="34" charset="0"/>
+                          <a:ea typeface="Malgun Gothic" pitchFamily="34" charset="-122"/>
+                          <a:cs typeface="Malgun Gothic" pitchFamily="34" charset="-120"/>
+                        </a:rPr>
+                        <a:t>후보 2 — 자체 구현형 (독립 framework)</a:t>
+                      </a:r>
+                      <a:endParaRPr lang="en-US" sz="900" dirty="0">
+                        <a:latin typeface="Malgun Gothic" charset="0"/>
+                        <a:ea typeface="Malgun Gothic" charset="0"/>
+                        <a:cs typeface="Malgun Gothic" charset="0"/>
+                      </a:endParaRPr>
+                    </a:p>
+                  </a:txBody>
+                  <a:tcPr marL="91440" marR="91440" marT="45720" marB="45720" anchor="ctr">
+                    <a:lnL w="9525" cap="flat" cmpd="sng" algn="ctr">
+                      <a:solidFill>
+                        <a:srgbClr val="A6A6A6"/>
+                      </a:solidFill>
+                      <a:prstDash val="solid"/>
+                      <a:round/>
+                      <a:headEnd type="none" w="med" len="med"/>
+                      <a:tailEnd type="none" w="med" len="med"/>
+                    </a:lnL>
+                    <a:lnR w="9525" cap="flat" cmpd="sng" algn="ctr">
+                      <a:solidFill>
+                        <a:srgbClr val="A6A6A6"/>
+                      </a:solidFill>
+                      <a:prstDash val="solid"/>
+                      <a:round/>
+                      <a:headEnd type="none" w="med" len="med"/>
+                      <a:tailEnd type="none" w="med" len="med"/>
+                    </a:lnR>
+                    <a:lnT w="9525" cap="flat" cmpd="sng" algn="ctr">
+                      <a:solidFill>
+                        <a:srgbClr val="A6A6A6"/>
+                      </a:solidFill>
+                      <a:prstDash val="solid"/>
+                      <a:round/>
+                      <a:headEnd type="none" w="med" len="med"/>
+                      <a:tailEnd type="none" w="med" len="med"/>
+                    </a:lnT>
+                    <a:lnB w="9525" cap="flat" cmpd="sng" algn="ctr">
+                      <a:solidFill>
+                        <a:srgbClr val="A6A6A6"/>
+                      </a:solidFill>
+                      <a:prstDash val="solid"/>
+                      <a:round/>
+                      <a:headEnd type="none" w="med" len="med"/>
+                      <a:tailEnd type="none" w="med" len="med"/>
+                    </a:lnB>
+                    <a:solidFill>
+                      <a:srgbClr val="3C5F2C"/>
+                    </a:solidFill>
+                  </a:tcPr>
+                </a:tc>
+              </a:tr>
+              <a:tr h="274320">
+                <a:tc>
+                  <a:txBody>
+                    <a:bodyPr/>
+                    <a:lstStyle/>
+                    <a:p>
+                      <a:pPr algn="ctr" indent="0" marL="0">
+                        <a:buNone/>
+                      </a:pPr>
+                      <a:r>
+                        <a:rPr lang="en-US" sz="850" b="1" dirty="0">
+                          <a:solidFill>
+                            <a:srgbClr val="FFFFFF"/>
+                          </a:solidFill>
+                          <a:latin typeface="Malgun Gothic" pitchFamily="34" charset="0"/>
+                          <a:ea typeface="Malgun Gothic" pitchFamily="34" charset="-122"/>
+                          <a:cs typeface="Malgun Gothic" pitchFamily="34" charset="-120"/>
+                        </a:rPr>
+                        <a:t>특징</a:t>
+                      </a:r>
+                      <a:endParaRPr lang="en-US" sz="850" dirty="0">
+                        <a:latin typeface="Malgun Gothic" charset="0"/>
+                        <a:ea typeface="Malgun Gothic" charset="0"/>
+                        <a:cs typeface="Malgun Gothic" charset="0"/>
+                      </a:endParaRPr>
+                    </a:p>
+                  </a:txBody>
+                  <a:tcPr marL="91440" marR="91440" marT="45720" marB="45720" anchor="ctr">
+                    <a:lnL w="9525" cap="flat" cmpd="sng" algn="ctr">
+                      <a:solidFill>
+                        <a:srgbClr val="A6A6A6"/>
+                      </a:solidFill>
+                      <a:prstDash val="solid"/>
+                      <a:round/>
+                      <a:headEnd type="none" w="med" len="med"/>
+                      <a:tailEnd type="none" w="med" len="med"/>
+                    </a:lnL>
+                    <a:lnR w="9525" cap="flat" cmpd="sng" algn="ctr">
+                      <a:solidFill>
+                        <a:srgbClr val="A6A6A6"/>
+                      </a:solidFill>
+                      <a:prstDash val="solid"/>
+                      <a:round/>
+                      <a:headEnd type="none" w="med" len="med"/>
+                      <a:tailEnd type="none" w="med" len="med"/>
+                    </a:lnR>
+                    <a:lnT w="9525" cap="flat" cmpd="sng" algn="ctr">
+                      <a:solidFill>
+                        <a:srgbClr val="A6A6A6"/>
+                      </a:solidFill>
+                      <a:prstDash val="solid"/>
+                      <a:round/>
+                      <a:headEnd type="none" w="med" len="med"/>
+                      <a:tailEnd type="none" w="med" len="med"/>
+                    </a:lnT>
+                    <a:lnB w="9525" cap="flat" cmpd="sng" algn="ctr">
+                      <a:solidFill>
+                        <a:srgbClr val="A6A6A6"/>
+                      </a:solidFill>
+                      <a:prstDash val="solid"/>
+                      <a:round/>
+                      <a:headEnd type="none" w="med" len="med"/>
+                      <a:tailEnd type="none" w="med" len="med"/>
+                    </a:lnB>
+                    <a:solidFill>
+                      <a:srgbClr val="1F3864"/>
+                    </a:solidFill>
+                  </a:tcPr>
+                </a:tc>
+                <a:tc>
+                  <a:txBody>
+                    <a:bodyPr/>
+                    <a:lstStyle/>
+                    <a:p>
+                      <a:pPr algn="l" indent="0" marL="0">
+                        <a:buNone/>
+                      </a:pPr>
+                      <a:r>
+                        <a:rPr lang="en-US" sz="800" dirty="0">
+                          <a:solidFill>
+                            <a:srgbClr val="262626"/>
+                          </a:solidFill>
+                          <a:latin typeface="Malgun Gothic" pitchFamily="34" charset="0"/>
+                          <a:ea typeface="Malgun Gothic" pitchFamily="34" charset="-122"/>
+                          <a:cs typeface="Malgun Gothic" pitchFamily="34" charset="-120"/>
+                        </a:rPr>
+                        <a:t>Inference Engine = vLLM(무수정), KV 골격은 변형 A(MCR 자체)/B(LMCache 편승)로 소싱</a:t>
+                      </a:r>
+                      <a:endParaRPr lang="en-US" sz="800" dirty="0">
+                        <a:latin typeface="Malgun Gothic" charset="0"/>
+                        <a:ea typeface="Malgun Gothic" charset="0"/>
+                        <a:cs typeface="Malgun Gothic" charset="0"/>
+                      </a:endParaRPr>
+                    </a:p>
+                  </a:txBody>
+                  <a:tcPr marL="38100" marR="38100" marT="12700" marB="12700" anchor="ctr">
+                    <a:lnL w="9525" cap="flat" cmpd="sng" algn="ctr">
+                      <a:solidFill>
+                        <a:srgbClr val="A6A6A6"/>
+                      </a:solidFill>
+                      <a:prstDash val="solid"/>
+                      <a:round/>
+                      <a:headEnd type="none" w="med" len="med"/>
+                      <a:tailEnd type="none" w="med" len="med"/>
+                    </a:lnL>
+                    <a:lnR w="9525" cap="flat" cmpd="sng" algn="ctr">
+                      <a:solidFill>
+                        <a:srgbClr val="A6A6A6"/>
+                      </a:solidFill>
+                      <a:prstDash val="solid"/>
+                      <a:round/>
+                      <a:headEnd type="none" w="med" len="med"/>
+                      <a:tailEnd type="none" w="med" len="med"/>
+                    </a:lnR>
+                    <a:lnT w="9525" cap="flat" cmpd="sng" algn="ctr">
+                      <a:solidFill>
+                        <a:srgbClr val="A6A6A6"/>
+                      </a:solidFill>
+                      <a:prstDash val="solid"/>
+                      <a:round/>
+                      <a:headEnd type="none" w="med" len="med"/>
+                      <a:tailEnd type="none" w="med" len="med"/>
+                    </a:lnT>
+                    <a:lnB w="9525" cap="flat" cmpd="sng" algn="ctr">
+                      <a:solidFill>
+                        <a:srgbClr val="A6A6A6"/>
+                      </a:solidFill>
+                      <a:prstDash val="solid"/>
+                      <a:round/>
+                      <a:headEnd type="none" w="med" len="med"/>
+                      <a:tailEnd type="none" w="med" len="med"/>
+                    </a:lnB>
+                  </a:tcPr>
+                </a:tc>
+                <a:tc>
+                  <a:txBody>
+                    <a:bodyPr/>
+                    <a:lstStyle/>
+                    <a:p>
+                      <a:pPr algn="l" indent="0" marL="0">
+                        <a:buNone/>
+                      </a:pPr>
+                      <a:r>
+                        <a:rPr lang="en-US" sz="800" dirty="0">
+                          <a:solidFill>
+                            <a:srgbClr val="262626"/>
+                          </a:solidFill>
+                          <a:latin typeface="Malgun Gothic" pitchFamily="34" charset="0"/>
+                          <a:ea typeface="Malgun Gothic" pitchFamily="34" charset="-122"/>
+                          <a:cs typeface="Malgun Gothic" pitchFamily="34" charset="-120"/>
+                        </a:rPr>
+                        <a:t>실행 스택 전 층 자체 구현 — scheduler·block table·executor가 tier topology를 1급 인지</a:t>
+                      </a:r>
+                      <a:endParaRPr lang="en-US" sz="800" dirty="0">
+                        <a:latin typeface="Malgun Gothic" charset="0"/>
+                        <a:ea typeface="Malgun Gothic" charset="0"/>
+                        <a:cs typeface="Malgun Gothic" charset="0"/>
+                      </a:endParaRPr>
+                    </a:p>
+                  </a:txBody>
+                  <a:tcPr marL="38100" marR="38100" marT="12700" marB="12700" anchor="ctr">
+                    <a:lnL w="9525" cap="flat" cmpd="sng" algn="ctr">
+                      <a:solidFill>
+                        <a:srgbClr val="A6A6A6"/>
+                      </a:solidFill>
+                      <a:prstDash val="solid"/>
+                      <a:round/>
+                      <a:headEnd type="none" w="med" len="med"/>
+                      <a:tailEnd type="none" w="med" len="med"/>
+                    </a:lnL>
+                    <a:lnR w="9525" cap="flat" cmpd="sng" algn="ctr">
+                      <a:solidFill>
+                        <a:srgbClr val="A6A6A6"/>
+                      </a:solidFill>
+                      <a:prstDash val="solid"/>
+                      <a:round/>
+                      <a:headEnd type="none" w="med" len="med"/>
+                      <a:tailEnd type="none" w="med" len="med"/>
+                    </a:lnR>
+                    <a:lnT w="9525" cap="flat" cmpd="sng" algn="ctr">
+                      <a:solidFill>
+                        <a:srgbClr val="A6A6A6"/>
+                      </a:solidFill>
+                      <a:prstDash val="solid"/>
+                      <a:round/>
+                      <a:headEnd type="none" w="med" len="med"/>
+                      <a:tailEnd type="none" w="med" len="med"/>
+                    </a:lnT>
+                    <a:lnB w="9525" cap="flat" cmpd="sng" algn="ctr">
+                      <a:solidFill>
+                        <a:srgbClr val="A6A6A6"/>
+                      </a:solidFill>
+                      <a:prstDash val="solid"/>
+                      <a:round/>
+                      <a:headEnd type="none" w="med" len="med"/>
+                      <a:tailEnd type="none" w="med" len="med"/>
+                    </a:lnB>
+                  </a:tcPr>
+                </a:tc>
+              </a:tr>
+              <a:tr h="365760">
+                <a:tc>
+                  <a:txBody>
+                    <a:bodyPr/>
+                    <a:lstStyle/>
+                    <a:p>
+                      <a:pPr algn="ctr" indent="0" marL="0">
+                        <a:buNone/>
+                      </a:pPr>
+                      <a:r>
+                        <a:rPr lang="en-US" sz="850" b="1" dirty="0">
+                          <a:solidFill>
+                            <a:srgbClr val="FFFFFF"/>
+                          </a:solidFill>
+                          <a:latin typeface="Malgun Gothic" pitchFamily="34" charset="0"/>
+                          <a:ea typeface="Malgun Gothic" pitchFamily="34" charset="-122"/>
+                          <a:cs typeface="Malgun Gothic" pitchFamily="34" charset="-120"/>
+                        </a:rPr>
+                        <a:t>장점</a:t>
+                      </a:r>
+                      <a:endParaRPr lang="en-US" sz="850" dirty="0">
+                        <a:latin typeface="Malgun Gothic" charset="0"/>
+                        <a:ea typeface="Malgun Gothic" charset="0"/>
+                        <a:cs typeface="Malgun Gothic" charset="0"/>
+                      </a:endParaRPr>
+                    </a:p>
+                  </a:txBody>
+                  <a:tcPr marL="91440" marR="91440" marT="45720" marB="45720" anchor="ctr">
+                    <a:lnL w="9525" cap="flat" cmpd="sng" algn="ctr">
+                      <a:solidFill>
+                        <a:srgbClr val="A6A6A6"/>
+                      </a:solidFill>
+                      <a:prstDash val="solid"/>
+                      <a:round/>
+                      <a:headEnd type="none" w="med" len="med"/>
+                      <a:tailEnd type="none" w="med" len="med"/>
+                    </a:lnL>
+                    <a:lnR w="9525" cap="flat" cmpd="sng" algn="ctr">
+                      <a:solidFill>
+                        <a:srgbClr val="A6A6A6"/>
+                      </a:solidFill>
+                      <a:prstDash val="solid"/>
+                      <a:round/>
+                      <a:headEnd type="none" w="med" len="med"/>
+                      <a:tailEnd type="none" w="med" len="med"/>
+                    </a:lnR>
+                    <a:lnT w="9525" cap="flat" cmpd="sng" algn="ctr">
+                      <a:solidFill>
+                        <a:srgbClr val="A6A6A6"/>
+                      </a:solidFill>
+                      <a:prstDash val="solid"/>
+                      <a:round/>
+                      <a:headEnd type="none" w="med" len="med"/>
+                      <a:tailEnd type="none" w="med" len="med"/>
+                    </a:lnT>
+                    <a:lnB w="9525" cap="flat" cmpd="sng" algn="ctr">
+                      <a:solidFill>
+                        <a:srgbClr val="A6A6A6"/>
+                      </a:solidFill>
+                      <a:prstDash val="solid"/>
+                      <a:round/>
+                      <a:headEnd type="none" w="med" len="med"/>
+                      <a:tailEnd type="none" w="med" len="med"/>
+                    </a:lnB>
+                    <a:solidFill>
+                      <a:srgbClr val="1F3864"/>
+                    </a:solidFill>
+                  </a:tcPr>
+                </a:tc>
+                <a:tc>
+                  <a:txBody>
+                    <a:bodyPr/>
+                    <a:lstStyle/>
+                    <a:p>
+                      <a:pPr algn="l" indent="0" marL="0">
+                        <a:buNone/>
+                      </a:pPr>
+                      <a:r>
+                        <a:rPr lang="en-US" sz="800" dirty="0">
+                          <a:solidFill>
+                            <a:srgbClr val="262626"/>
+                          </a:solidFill>
+                          <a:latin typeface="Malgun Gothic" pitchFamily="34" charset="0"/>
+                          <a:ea typeface="Malgun Gothic" pitchFamily="34" charset="-122"/>
+                          <a:cs typeface="Malgun Gothic" pitchFamily="34" charset="-120"/>
+                        </a:rPr>
+                        <a:t>생태계 무임승차(배칭·커널·모델)  ·  검증된 코어·현 자산 재사용  ·  초기 ≤6인월 — 리드타임 최단</a:t>
+                      </a:r>
+                      <a:endParaRPr lang="en-US" sz="800" dirty="0">
+                        <a:latin typeface="Malgun Gothic" charset="0"/>
+                        <a:ea typeface="Malgun Gothic" charset="0"/>
+                        <a:cs typeface="Malgun Gothic" charset="0"/>
+                      </a:endParaRPr>
+                    </a:p>
+                  </a:txBody>
+                  <a:tcPr marL="38100" marR="38100" marT="12700" marB="12700" anchor="ctr">
+                    <a:lnL w="9525" cap="flat" cmpd="sng" algn="ctr">
+                      <a:solidFill>
+                        <a:srgbClr val="A6A6A6"/>
+                      </a:solidFill>
+                      <a:prstDash val="solid"/>
+                      <a:round/>
+                      <a:headEnd type="none" w="med" len="med"/>
+                      <a:tailEnd type="none" w="med" len="med"/>
+                    </a:lnL>
+                    <a:lnR w="9525" cap="flat" cmpd="sng" algn="ctr">
+                      <a:solidFill>
+                        <a:srgbClr val="A6A6A6"/>
+                      </a:solidFill>
+                      <a:prstDash val="solid"/>
+                      <a:round/>
+                      <a:headEnd type="none" w="med" len="med"/>
+                      <a:tailEnd type="none" w="med" len="med"/>
+                    </a:lnR>
+                    <a:lnT w="9525" cap="flat" cmpd="sng" algn="ctr">
+                      <a:solidFill>
+                        <a:srgbClr val="A6A6A6"/>
+                      </a:solidFill>
+                      <a:prstDash val="solid"/>
+                      <a:round/>
+                      <a:headEnd type="none" w="med" len="med"/>
+                      <a:tailEnd type="none" w="med" len="med"/>
+                    </a:lnT>
+                    <a:lnB w="9525" cap="flat" cmpd="sng" algn="ctr">
+                      <a:solidFill>
+                        <a:srgbClr val="A6A6A6"/>
+                      </a:solidFill>
+                      <a:prstDash val="solid"/>
+                      <a:round/>
+                      <a:headEnd type="none" w="med" len="med"/>
+                      <a:tailEnd type="none" w="med" len="med"/>
+                    </a:lnB>
+                  </a:tcPr>
+                </a:tc>
+                <a:tc>
+                  <a:txBody>
+                    <a:bodyPr/>
+                    <a:lstStyle/>
+                    <a:p>
+                      <a:pPr algn="l" indent="0" marL="0">
+                        <a:buNone/>
+                      </a:pPr>
+                      <a:r>
+                        <a:rPr lang="en-US" sz="800" dirty="0">
+                          <a:solidFill>
+                            <a:srgbClr val="262626"/>
+                          </a:solidFill>
+                          <a:latin typeface="Malgun Gothic" pitchFamily="34" charset="0"/>
+                          <a:ea typeface="Malgun Gothic" pitchFamily="34" charset="-122"/>
+                          <a:cs typeface="Malgun Gothic" pitchFamily="34" charset="-120"/>
+                        </a:rPr>
+                        <a:t>placement×scheduling 진짜 co-design  ·  자사 HW 로드맵 무제약 수용  ·  아키텍처 주도권·IP 확보</a:t>
+                      </a:r>
+                      <a:endParaRPr lang="en-US" sz="800" dirty="0">
+                        <a:latin typeface="Malgun Gothic" charset="0"/>
+                        <a:ea typeface="Malgun Gothic" charset="0"/>
+                        <a:cs typeface="Malgun Gothic" charset="0"/>
+                      </a:endParaRPr>
+                    </a:p>
+                  </a:txBody>
+                  <a:tcPr marL="38100" marR="38100" marT="12700" marB="12700" anchor="ctr">
+                    <a:lnL w="9525" cap="flat" cmpd="sng" algn="ctr">
+                      <a:solidFill>
+                        <a:srgbClr val="A6A6A6"/>
+                      </a:solidFill>
+                      <a:prstDash val="solid"/>
+                      <a:round/>
+                      <a:headEnd type="none" w="med" len="med"/>
+                      <a:tailEnd type="none" w="med" len="med"/>
+                    </a:lnL>
+                    <a:lnR w="9525" cap="flat" cmpd="sng" algn="ctr">
+                      <a:solidFill>
+                        <a:srgbClr val="A6A6A6"/>
+                      </a:solidFill>
+                      <a:prstDash val="solid"/>
+                      <a:round/>
+                      <a:headEnd type="none" w="med" len="med"/>
+                      <a:tailEnd type="none" w="med" len="med"/>
+                    </a:lnR>
+                    <a:lnT w="9525" cap="flat" cmpd="sng" algn="ctr">
+                      <a:solidFill>
+                        <a:srgbClr val="A6A6A6"/>
+                      </a:solidFill>
+                      <a:prstDash val="solid"/>
+                      <a:round/>
+                      <a:headEnd type="none" w="med" len="med"/>
+                      <a:tailEnd type="none" w="med" len="med"/>
+                    </a:lnT>
+                    <a:lnB w="9525" cap="flat" cmpd="sng" algn="ctr">
+                      <a:solidFill>
+                        <a:srgbClr val="A6A6A6"/>
+                      </a:solidFill>
+                      <a:prstDash val="solid"/>
+                      <a:round/>
+                      <a:headEnd type="none" w="med" len="med"/>
+                      <a:tailEnd type="none" w="med" len="med"/>
+                    </a:lnB>
+                  </a:tcPr>
+                </a:tc>
+              </a:tr>
+              <a:tr h="365760">
+                <a:tc>
+                  <a:txBody>
+                    <a:bodyPr/>
+                    <a:lstStyle/>
+                    <a:p>
+                      <a:pPr algn="ctr" indent="0" marL="0">
+                        <a:buNone/>
+                      </a:pPr>
+                      <a:r>
+                        <a:rPr lang="en-US" sz="850" b="1" dirty="0">
+                          <a:solidFill>
+                            <a:srgbClr val="FFFFFF"/>
+                          </a:solidFill>
+                          <a:latin typeface="Malgun Gothic" pitchFamily="34" charset="0"/>
+                          <a:ea typeface="Malgun Gothic" pitchFamily="34" charset="-122"/>
+                          <a:cs typeface="Malgun Gothic" pitchFamily="34" charset="-120"/>
+                        </a:rPr>
+                        <a:t>단점</a:t>
+                      </a:r>
+                      <a:endParaRPr lang="en-US" sz="850" dirty="0">
+                        <a:latin typeface="Malgun Gothic" charset="0"/>
+                        <a:ea typeface="Malgun Gothic" charset="0"/>
+                        <a:cs typeface="Malgun Gothic" charset="0"/>
+                      </a:endParaRPr>
+                    </a:p>
+                  </a:txBody>
+                  <a:tcPr marL="91440" marR="91440" marT="45720" marB="45720" anchor="ctr">
+                    <a:lnL w="9525" cap="flat" cmpd="sng" algn="ctr">
+                      <a:solidFill>
+                        <a:srgbClr val="A6A6A6"/>
+                      </a:solidFill>
+                      <a:prstDash val="solid"/>
+                      <a:round/>
+                      <a:headEnd type="none" w="med" len="med"/>
+                      <a:tailEnd type="none" w="med" len="med"/>
+                    </a:lnL>
+                    <a:lnR w="9525" cap="flat" cmpd="sng" algn="ctr">
+                      <a:solidFill>
+                        <a:srgbClr val="A6A6A6"/>
+                      </a:solidFill>
+                      <a:prstDash val="solid"/>
+                      <a:round/>
+                      <a:headEnd type="none" w="med" len="med"/>
+                      <a:tailEnd type="none" w="med" len="med"/>
+                    </a:lnR>
+                    <a:lnT w="9525" cap="flat" cmpd="sng" algn="ctr">
+                      <a:solidFill>
+                        <a:srgbClr val="A6A6A6"/>
+                      </a:solidFill>
+                      <a:prstDash val="solid"/>
+                      <a:round/>
+                      <a:headEnd type="none" w="med" len="med"/>
+                      <a:tailEnd type="none" w="med" len="med"/>
+                    </a:lnT>
+                    <a:lnB w="9525" cap="flat" cmpd="sng" algn="ctr">
+                      <a:solidFill>
+                        <a:srgbClr val="A6A6A6"/>
+                      </a:solidFill>
+                      <a:prstDash val="solid"/>
+                      <a:round/>
+                      <a:headEnd type="none" w="med" len="med"/>
+                      <a:tailEnd type="none" w="med" len="med"/>
+                    </a:lnB>
+                    <a:solidFill>
+                      <a:srgbClr val="1F3864"/>
+                    </a:solidFill>
+                  </a:tcPr>
+                </a:tc>
+                <a:tc>
+                  <a:txBody>
+                    <a:bodyPr/>
+                    <a:lstStyle/>
+                    <a:p>
+                      <a:pPr algn="l" indent="0" marL="0">
+                        <a:buNone/>
+                      </a:pPr>
+                      <a:r>
+                        <a:rPr lang="en-US" sz="800" dirty="0">
+                          <a:solidFill>
+                            <a:srgbClr val="262626"/>
+                          </a:solidFill>
+                          <a:latin typeface="Malgun Gothic" pitchFamily="34" charset="0"/>
+                          <a:ea typeface="Malgun Gothic" pitchFamily="34" charset="-122"/>
+                          <a:cs typeface="Malgun Gothic" pitchFamily="34" charset="-120"/>
+                        </a:rPr>
+                        <a:t>scheduler tier 비인지 → co-scheduling 미회수  ·  비연속·압축 KV는 block table 밖 2급  ·  "vLLM 애드온" 인식 리스크</a:t>
+                      </a:r>
+                      <a:endParaRPr lang="en-US" sz="800" dirty="0">
+                        <a:latin typeface="Malgun Gothic" charset="0"/>
+                        <a:ea typeface="Malgun Gothic" charset="0"/>
+                        <a:cs typeface="Malgun Gothic" charset="0"/>
+                      </a:endParaRPr>
+                    </a:p>
+                  </a:txBody>
+                  <a:tcPr marL="38100" marR="38100" marT="12700" marB="12700" anchor="ctr">
+                    <a:lnL w="9525" cap="flat" cmpd="sng" algn="ctr">
+                      <a:solidFill>
+                        <a:srgbClr val="A6A6A6"/>
+                      </a:solidFill>
+                      <a:prstDash val="solid"/>
+                      <a:round/>
+                      <a:headEnd type="none" w="med" len="med"/>
+                      <a:tailEnd type="none" w="med" len="med"/>
+                    </a:lnL>
+                    <a:lnR w="9525" cap="flat" cmpd="sng" algn="ctr">
+                      <a:solidFill>
+                        <a:srgbClr val="A6A6A6"/>
+                      </a:solidFill>
+                      <a:prstDash val="solid"/>
+                      <a:round/>
+                      <a:headEnd type="none" w="med" len="med"/>
+                      <a:tailEnd type="none" w="med" len="med"/>
+                    </a:lnR>
+                    <a:lnT w="9525" cap="flat" cmpd="sng" algn="ctr">
+                      <a:solidFill>
+                        <a:srgbClr val="A6A6A6"/>
+                      </a:solidFill>
+                      <a:prstDash val="solid"/>
+                      <a:round/>
+                      <a:headEnd type="none" w="med" len="med"/>
+                      <a:tailEnd type="none" w="med" len="med"/>
+                    </a:lnT>
+                    <a:lnB w="9525" cap="flat" cmpd="sng" algn="ctr">
+                      <a:solidFill>
+                        <a:srgbClr val="A6A6A6"/>
+                      </a:solidFill>
+                      <a:prstDash val="solid"/>
+                      <a:round/>
+                      <a:headEnd type="none" w="med" len="med"/>
+                      <a:tailEnd type="none" w="med" len="med"/>
+                    </a:lnB>
+                  </a:tcPr>
+                </a:tc>
+                <a:tc>
+                  <a:txBody>
+                    <a:bodyPr/>
+                    <a:lstStyle/>
+                    <a:p>
+                      <a:pPr algn="l" indent="0" marL="0">
+                        <a:buNone/>
+                      </a:pPr>
+                      <a:r>
+                        <a:rPr lang="en-US" sz="800" dirty="0">
+                          <a:solidFill>
+                            <a:srgbClr val="262626"/>
+                          </a:solidFill>
+                          <a:latin typeface="Malgun Gothic" pitchFamily="34" charset="0"/>
+                          <a:ea typeface="Malgun Gothic" pitchFamily="34" charset="-122"/>
+                          <a:cs typeface="Malgun Gothic" pitchFamily="34" charset="-120"/>
+                        </a:rPr>
+                        <a:t>재구현 수십 인월+ · baseline 도달 리스크  ·  미검증 실행 코어 수치 검증 부담  ·  신규 모델·기법 영구 추종</a:t>
+                      </a:r>
+                      <a:endParaRPr lang="en-US" sz="800" dirty="0">
+                        <a:latin typeface="Malgun Gothic" charset="0"/>
+                        <a:ea typeface="Malgun Gothic" charset="0"/>
+                        <a:cs typeface="Malgun Gothic" charset="0"/>
+                      </a:endParaRPr>
+                    </a:p>
+                  </a:txBody>
+                  <a:tcPr marL="38100" marR="38100" marT="12700" marB="12700" anchor="ctr">
+                    <a:lnL w="9525" cap="flat" cmpd="sng" algn="ctr">
+                      <a:solidFill>
+                        <a:srgbClr val="A6A6A6"/>
+                      </a:solidFill>
+                      <a:prstDash val="solid"/>
+                      <a:round/>
+                      <a:headEnd type="none" w="med" len="med"/>
+                      <a:tailEnd type="none" w="med" len="med"/>
+                    </a:lnL>
+                    <a:lnR w="9525" cap="flat" cmpd="sng" algn="ctr">
+                      <a:solidFill>
+                        <a:srgbClr val="A6A6A6"/>
+                      </a:solidFill>
+                      <a:prstDash val="solid"/>
+                      <a:round/>
+                      <a:headEnd type="none" w="med" len="med"/>
+                      <a:tailEnd type="none" w="med" len="med"/>
+                    </a:lnR>
+                    <a:lnT w="9525" cap="flat" cmpd="sng" algn="ctr">
+                      <a:solidFill>
+                        <a:srgbClr val="A6A6A6"/>
+                      </a:solidFill>
+                      <a:prstDash val="solid"/>
+                      <a:round/>
+                      <a:headEnd type="none" w="med" len="med"/>
+                      <a:tailEnd type="none" w="med" len="med"/>
+                    </a:lnT>
+                    <a:lnB w="9525" cap="flat" cmpd="sng" algn="ctr">
+                      <a:solidFill>
+                        <a:srgbClr val="A6A6A6"/>
+                      </a:solidFill>
+                      <a:prstDash val="solid"/>
+                      <a:round/>
+                      <a:headEnd type="none" w="med" len="med"/>
+                      <a:tailEnd type="none" w="med" len="med"/>
+                    </a:lnB>
+                  </a:tcPr>
+                </a:tc>
+              </a:tr>
+              <a:tr h="256032">
+                <a:tc>
+                  <a:txBody>
+                    <a:bodyPr/>
+                    <a:lstStyle/>
+                    <a:p>
+                      <a:pPr algn="ctr" indent="0" marL="0">
+                        <a:buNone/>
+                      </a:pPr>
+                      <a:r>
+                        <a:rPr lang="en-US" sz="850" b="1" dirty="0">
+                          <a:solidFill>
+                            <a:srgbClr val="FFFFFF"/>
+                          </a:solidFill>
+                          <a:latin typeface="Malgun Gothic" pitchFamily="34" charset="0"/>
+                          <a:ea typeface="Malgun Gothic" pitchFamily="34" charset="-122"/>
+                          <a:cs typeface="Malgun Gothic" pitchFamily="34" charset="-120"/>
+                        </a:rPr>
+                        <a:t>Trade-off</a:t>
+                      </a:r>
+                      <a:endParaRPr lang="en-US" sz="850" dirty="0">
+                        <a:latin typeface="Malgun Gothic" charset="0"/>
+                        <a:ea typeface="Malgun Gothic" charset="0"/>
+                        <a:cs typeface="Malgun Gothic" charset="0"/>
+                      </a:endParaRPr>
+                    </a:p>
+                    <a:p>
+                      <a:pPr algn="ctr" indent="0" marL="0">
+                        <a:buNone/>
+                      </a:pPr>
+                      <a:r>
+                        <a:rPr lang="en-US" sz="850" b="1" dirty="0">
+                          <a:solidFill>
+                            <a:srgbClr val="FFFFFF"/>
+                          </a:solidFill>
+                          <a:latin typeface="Malgun Gothic" pitchFamily="34" charset="0"/>
+                          <a:ea typeface="Malgun Gothic" pitchFamily="34" charset="-122"/>
+                          <a:cs typeface="Malgun Gothic" pitchFamily="34" charset="-120"/>
+                        </a:rPr>
+                        <a:t>(QA 평가)</a:t>
+                      </a:r>
+                      <a:endParaRPr lang="en-US" sz="850" dirty="0">
+                        <a:latin typeface="Malgun Gothic" charset="0"/>
+                        <a:ea typeface="Malgun Gothic" charset="0"/>
+                        <a:cs typeface="Malgun Gothic" charset="0"/>
+                      </a:endParaRPr>
+                    </a:p>
+                  </a:txBody>
+                  <a:tcPr marL="91440" marR="91440" marT="45720" marB="45720" anchor="ctr">
+                    <a:lnL w="9525" cap="flat" cmpd="sng" algn="ctr">
+                      <a:solidFill>
+                        <a:srgbClr val="A6A6A6"/>
+                      </a:solidFill>
+                      <a:prstDash val="solid"/>
+                      <a:round/>
+                      <a:headEnd type="none" w="med" len="med"/>
+                      <a:tailEnd type="none" w="med" len="med"/>
+                    </a:lnL>
+                    <a:lnR w="9525" cap="flat" cmpd="sng" algn="ctr">
+                      <a:solidFill>
+                        <a:srgbClr val="A6A6A6"/>
+                      </a:solidFill>
+                      <a:prstDash val="solid"/>
+                      <a:round/>
+                      <a:headEnd type="none" w="med" len="med"/>
+                      <a:tailEnd type="none" w="med" len="med"/>
+                    </a:lnR>
+                    <a:lnT w="9525" cap="flat" cmpd="sng" algn="ctr">
+                      <a:solidFill>
+                        <a:srgbClr val="A6A6A6"/>
+                      </a:solidFill>
+                      <a:prstDash val="solid"/>
+                      <a:round/>
+                      <a:headEnd type="none" w="med" len="med"/>
+                      <a:tailEnd type="none" w="med" len="med"/>
+                    </a:lnT>
+                    <a:lnB w="9525" cap="flat" cmpd="sng" algn="ctr">
+                      <a:solidFill>
+                        <a:srgbClr val="A6A6A6"/>
+                      </a:solidFill>
+                      <a:prstDash val="solid"/>
+                      <a:round/>
+                      <a:headEnd type="none" w="med" len="med"/>
+                      <a:tailEnd type="none" w="med" len="med"/>
+                    </a:lnB>
+                    <a:solidFill>
+                      <a:srgbClr val="1F3864"/>
+                    </a:solidFill>
+                  </a:tcPr>
+                </a:tc>
+                <a:tc>
+                  <a:txBody>
+                    <a:bodyPr/>
+                    <a:lstStyle/>
+                    <a:p>
+                      <a:pPr algn="l" indent="0" marL="0">
+                        <a:buNone/>
+                      </a:pPr>
+                      <a:r>
+                        <a:rPr lang="en-US" sz="800" b="1" dirty="0">
+                          <a:solidFill>
+                            <a:srgbClr val="B3402A"/>
+                          </a:solidFill>
+                          <a:latin typeface="Malgun Gothic" pitchFamily="34" charset="0"/>
+                          <a:ea typeface="Malgun Gothic" pitchFamily="34" charset="-122"/>
+                          <a:cs typeface="Malgun Gothic" pitchFamily="34" charset="-120"/>
+                        </a:rPr>
+                        <a:t>QA1 ★★☆</a:t>
+                      </a:r>
+                      <a:pPr algn="l" indent="0" marL="0">
+                        <a:buNone/>
+                      </a:pPr>
+                      <a:r>
+                        <a:rPr lang="en-US" sz="800" dirty="0">
+                          <a:solidFill>
+                            <a:srgbClr val="9AA0A6"/>
+                          </a:solidFill>
+                          <a:latin typeface="Malgun Gothic" pitchFamily="34" charset="0"/>
+                          <a:ea typeface="Malgun Gothic" pitchFamily="34" charset="-122"/>
+                          <a:cs typeface="Malgun Gothic" pitchFamily="34" charset="-120"/>
+                        </a:rPr>
+                        <a:t>  ·  </a:t>
+                      </a:r>
+                      <a:pPr algn="l" indent="0" marL="0">
+                        <a:buNone/>
+                      </a:pPr>
+                      <a:r>
+                        <a:rPr lang="en-US" sz="800" b="1" dirty="0">
+                          <a:solidFill>
+                            <a:srgbClr val="B3402A"/>
+                          </a:solidFill>
+                          <a:latin typeface="Malgun Gothic" pitchFamily="34" charset="0"/>
+                          <a:ea typeface="Malgun Gothic" pitchFamily="34" charset="-122"/>
+                          <a:cs typeface="Malgun Gothic" pitchFamily="34" charset="-120"/>
+                        </a:rPr>
+                        <a:t>QA2 ★★☆</a:t>
+                      </a:r>
+                      <a:pPr algn="l" indent="0" marL="0">
+                        <a:buNone/>
+                      </a:pPr>
+                      <a:r>
+                        <a:rPr lang="en-US" sz="800" dirty="0">
+                          <a:solidFill>
+                            <a:srgbClr val="9AA0A6"/>
+                          </a:solidFill>
+                          <a:latin typeface="Malgun Gothic" pitchFamily="34" charset="0"/>
+                          <a:ea typeface="Malgun Gothic" pitchFamily="34" charset="-122"/>
+                          <a:cs typeface="Malgun Gothic" pitchFamily="34" charset="-120"/>
+                        </a:rPr>
+                        <a:t>  ·  </a:t>
+                      </a:r>
+                      <a:pPr algn="l" indent="0" marL="0">
+                        <a:buNone/>
+                      </a:pPr>
+                      <a:r>
+                        <a:rPr lang="en-US" sz="800" b="1" dirty="0">
+                          <a:solidFill>
+                            <a:srgbClr val="1B7A4B"/>
+                          </a:solidFill>
+                          <a:latin typeface="Malgun Gothic" pitchFamily="34" charset="0"/>
+                          <a:ea typeface="Malgun Gothic" pitchFamily="34" charset="-122"/>
+                          <a:cs typeface="Malgun Gothic" pitchFamily="34" charset="-120"/>
+                        </a:rPr>
+                        <a:t>QA3 ★★★</a:t>
+                      </a:r>
+                      <a:pPr algn="l" indent="0" marL="0">
+                        <a:buNone/>
+                      </a:pPr>
+                      <a:r>
+                        <a:rPr lang="en-US" sz="800" dirty="0">
+                          <a:solidFill>
+                            <a:srgbClr val="9AA0A6"/>
+                          </a:solidFill>
+                          <a:latin typeface="Malgun Gothic" pitchFamily="34" charset="0"/>
+                          <a:ea typeface="Malgun Gothic" pitchFamily="34" charset="-122"/>
+                          <a:cs typeface="Malgun Gothic" pitchFamily="34" charset="-120"/>
+                        </a:rPr>
+                        <a:t>  ·  </a:t>
+                      </a:r>
+                      <a:pPr algn="l" indent="0" marL="0">
+                        <a:buNone/>
+                      </a:pPr>
+                      <a:r>
+                        <a:rPr lang="en-US" sz="800" b="1" dirty="0">
+                          <a:solidFill>
+                            <a:srgbClr val="1B7A4B"/>
+                          </a:solidFill>
+                          <a:latin typeface="Malgun Gothic" pitchFamily="34" charset="0"/>
+                          <a:ea typeface="Malgun Gothic" pitchFamily="34" charset="-122"/>
+                          <a:cs typeface="Malgun Gothic" pitchFamily="34" charset="-120"/>
+                        </a:rPr>
+                        <a:t>QA4 ★★☆</a:t>
+                      </a:r>
+                      <a:pPr algn="l" indent="0" marL="0">
+                        <a:buNone/>
+                      </a:pPr>
+                      <a:r>
+                        <a:rPr lang="en-US" sz="800" dirty="0">
+                          <a:solidFill>
+                            <a:srgbClr val="9AA0A6"/>
+                          </a:solidFill>
+                          <a:latin typeface="Malgun Gothic" pitchFamily="34" charset="0"/>
+                          <a:ea typeface="Malgun Gothic" pitchFamily="34" charset="-122"/>
+                          <a:cs typeface="Malgun Gothic" pitchFamily="34" charset="-120"/>
+                        </a:rPr>
+                        <a:t>  ·  </a:t>
+                      </a:r>
+                      <a:pPr algn="l" indent="0" marL="0">
+                        <a:buNone/>
+                      </a:pPr>
+                      <a:r>
+                        <a:rPr lang="en-US" sz="800" b="1" dirty="0">
+                          <a:solidFill>
+                            <a:srgbClr val="1B7A4B"/>
+                          </a:solidFill>
+                          <a:latin typeface="Malgun Gothic" pitchFamily="34" charset="0"/>
+                          <a:ea typeface="Malgun Gothic" pitchFamily="34" charset="-122"/>
+                          <a:cs typeface="Malgun Gothic" pitchFamily="34" charset="-120"/>
+                        </a:rPr>
+                        <a:t>QA5 ★★★</a:t>
+                      </a:r>
+                      <a:endParaRPr lang="en-US" sz="800" dirty="0">
+                        <a:latin typeface="Malgun Gothic" charset="0"/>
+                        <a:ea typeface="Malgun Gothic" charset="0"/>
+                        <a:cs typeface="Malgun Gothic" charset="0"/>
+                      </a:endParaRPr>
+                    </a:p>
+                  </a:txBody>
+                  <a:tcPr marL="38100" marR="38100" marT="12700" marB="12700" anchor="ctr">
+                    <a:lnL w="9525" cap="flat" cmpd="sng" algn="ctr">
+                      <a:solidFill>
+                        <a:srgbClr val="A6A6A6"/>
+                      </a:solidFill>
+                      <a:prstDash val="solid"/>
+                      <a:round/>
+                      <a:headEnd type="none" w="med" len="med"/>
+                      <a:tailEnd type="none" w="med" len="med"/>
+                    </a:lnL>
+                    <a:lnR w="9525" cap="flat" cmpd="sng" algn="ctr">
+                      <a:solidFill>
+                        <a:srgbClr val="A6A6A6"/>
+                      </a:solidFill>
+                      <a:prstDash val="solid"/>
+                      <a:round/>
+                      <a:headEnd type="none" w="med" len="med"/>
+                      <a:tailEnd type="none" w="med" len="med"/>
+                    </a:lnR>
+                    <a:lnT w="9525" cap="flat" cmpd="sng" algn="ctr">
+                      <a:solidFill>
+                        <a:srgbClr val="A6A6A6"/>
+                      </a:solidFill>
+                      <a:prstDash val="solid"/>
+                      <a:round/>
+                      <a:headEnd type="none" w="med" len="med"/>
+                      <a:tailEnd type="none" w="med" len="med"/>
+                    </a:lnT>
+                    <a:lnB w="9525" cap="flat" cmpd="sng" algn="ctr">
+                      <a:solidFill>
+                        <a:srgbClr val="A6A6A6"/>
+                      </a:solidFill>
+                      <a:prstDash val="solid"/>
+                      <a:round/>
+                      <a:headEnd type="none" w="med" len="med"/>
+                      <a:tailEnd type="none" w="med" len="med"/>
+                    </a:lnB>
+                  </a:tcPr>
+                </a:tc>
+                <a:tc>
+                  <a:txBody>
+                    <a:bodyPr/>
+                    <a:lstStyle/>
+                    <a:p>
+                      <a:pPr algn="l" indent="0" marL="0">
+                        <a:buNone/>
+                      </a:pPr>
+                      <a:r>
+                        <a:rPr lang="en-US" sz="800" b="1" dirty="0">
+                          <a:solidFill>
+                            <a:srgbClr val="1B7A4B"/>
+                          </a:solidFill>
+                          <a:latin typeface="Malgun Gothic" pitchFamily="34" charset="0"/>
+                          <a:ea typeface="Malgun Gothic" pitchFamily="34" charset="-122"/>
+                          <a:cs typeface="Malgun Gothic" pitchFamily="34" charset="-120"/>
+                        </a:rPr>
+                        <a:t>QA1 ★★★(도달★☆)</a:t>
+                      </a:r>
+                      <a:pPr algn="l" indent="0" marL="0">
+                        <a:buNone/>
+                      </a:pPr>
+                      <a:r>
+                        <a:rPr lang="en-US" sz="800" dirty="0">
+                          <a:solidFill>
+                            <a:srgbClr val="9AA0A6"/>
+                          </a:solidFill>
+                          <a:latin typeface="Malgun Gothic" pitchFamily="34" charset="0"/>
+                          <a:ea typeface="Malgun Gothic" pitchFamily="34" charset="-122"/>
+                          <a:cs typeface="Malgun Gothic" pitchFamily="34" charset="-120"/>
+                        </a:rPr>
+                        <a:t>  ·  </a:t>
+                      </a:r>
+                      <a:pPr algn="l" indent="0" marL="0">
+                        <a:buNone/>
+                      </a:pPr>
+                      <a:r>
+                        <a:rPr lang="en-US" sz="800" b="1" dirty="0">
+                          <a:solidFill>
+                            <a:srgbClr val="1B7A4B"/>
+                          </a:solidFill>
+                          <a:latin typeface="Malgun Gothic" pitchFamily="34" charset="0"/>
+                          <a:ea typeface="Malgun Gothic" pitchFamily="34" charset="-122"/>
+                          <a:cs typeface="Malgun Gothic" pitchFamily="34" charset="-120"/>
+                        </a:rPr>
+                        <a:t>QA2 ★★★</a:t>
+                      </a:r>
+                      <a:pPr algn="l" indent="0" marL="0">
+                        <a:buNone/>
+                      </a:pPr>
+                      <a:r>
+                        <a:rPr lang="en-US" sz="800" dirty="0">
+                          <a:solidFill>
+                            <a:srgbClr val="9AA0A6"/>
+                          </a:solidFill>
+                          <a:latin typeface="Malgun Gothic" pitchFamily="34" charset="0"/>
+                          <a:ea typeface="Malgun Gothic" pitchFamily="34" charset="-122"/>
+                          <a:cs typeface="Malgun Gothic" pitchFamily="34" charset="-120"/>
+                        </a:rPr>
+                        <a:t>  ·  </a:t>
+                      </a:r>
+                      <a:pPr algn="l" indent="0" marL="0">
+                        <a:buNone/>
+                      </a:pPr>
+                      <a:r>
+                        <a:rPr lang="en-US" sz="800" b="1" dirty="0">
+                          <a:solidFill>
+                            <a:srgbClr val="B3402A"/>
+                          </a:solidFill>
+                          <a:latin typeface="Malgun Gothic" pitchFamily="34" charset="0"/>
+                          <a:ea typeface="Malgun Gothic" pitchFamily="34" charset="-122"/>
+                          <a:cs typeface="Malgun Gothic" pitchFamily="34" charset="-120"/>
+                        </a:rPr>
+                        <a:t>QA3 ★☆☆</a:t>
+                      </a:r>
+                      <a:pPr algn="l" indent="0" marL="0">
+                        <a:buNone/>
+                      </a:pPr>
+                      <a:r>
+                        <a:rPr lang="en-US" sz="800" dirty="0">
+                          <a:solidFill>
+                            <a:srgbClr val="9AA0A6"/>
+                          </a:solidFill>
+                          <a:latin typeface="Malgun Gothic" pitchFamily="34" charset="0"/>
+                          <a:ea typeface="Malgun Gothic" pitchFamily="34" charset="-122"/>
+                          <a:cs typeface="Malgun Gothic" pitchFamily="34" charset="-120"/>
+                        </a:rPr>
+                        <a:t>  ·  </a:t>
+                      </a:r>
+                      <a:pPr algn="l" indent="0" marL="0">
+                        <a:buNone/>
+                      </a:pPr>
+                      <a:r>
+                        <a:rPr lang="en-US" sz="800" b="1" dirty="0">
+                          <a:solidFill>
+                            <a:srgbClr val="B3402A"/>
+                          </a:solidFill>
+                          <a:latin typeface="Malgun Gothic" pitchFamily="34" charset="0"/>
+                          <a:ea typeface="Malgun Gothic" pitchFamily="34" charset="-122"/>
+                          <a:cs typeface="Malgun Gothic" pitchFamily="34" charset="-120"/>
+                        </a:rPr>
+                        <a:t>QA4 ★☆☆</a:t>
+                      </a:r>
+                      <a:pPr algn="l" indent="0" marL="0">
+                        <a:buNone/>
+                      </a:pPr>
+                      <a:r>
+                        <a:rPr lang="en-US" sz="800" dirty="0">
+                          <a:solidFill>
+                            <a:srgbClr val="9AA0A6"/>
+                          </a:solidFill>
+                          <a:latin typeface="Malgun Gothic" pitchFamily="34" charset="0"/>
+                          <a:ea typeface="Malgun Gothic" pitchFamily="34" charset="-122"/>
+                          <a:cs typeface="Malgun Gothic" pitchFamily="34" charset="-120"/>
+                        </a:rPr>
+                        <a:t>  ·  </a:t>
+                      </a:r>
+                      <a:pPr algn="l" indent="0" marL="0">
+                        <a:buNone/>
+                      </a:pPr>
+                      <a:r>
+                        <a:rPr lang="en-US" sz="800" b="1" dirty="0">
+                          <a:solidFill>
+                            <a:srgbClr val="B3402A"/>
+                          </a:solidFill>
+                          <a:latin typeface="Malgun Gothic" pitchFamily="34" charset="0"/>
+                          <a:ea typeface="Malgun Gothic" pitchFamily="34" charset="-122"/>
+                          <a:cs typeface="Malgun Gothic" pitchFamily="34" charset="-120"/>
+                        </a:rPr>
+                        <a:t>QA5 ★☆☆</a:t>
+                      </a:r>
+                      <a:endParaRPr lang="en-US" sz="800" dirty="0">
+                        <a:latin typeface="Malgun Gothic" charset="0"/>
+                        <a:ea typeface="Malgun Gothic" charset="0"/>
+                        <a:cs typeface="Malgun Gothic" charset="0"/>
+                      </a:endParaRPr>
+                    </a:p>
+                  </a:txBody>
+                  <a:tcPr marL="38100" marR="38100" marT="12700" marB="12700" anchor="ctr">
+                    <a:lnL w="9525" cap="flat" cmpd="sng" algn="ctr">
+                      <a:solidFill>
+                        <a:srgbClr val="A6A6A6"/>
+                      </a:solidFill>
+                      <a:prstDash val="solid"/>
+                      <a:round/>
+                      <a:headEnd type="none" w="med" len="med"/>
+                      <a:tailEnd type="none" w="med" len="med"/>
+                    </a:lnL>
+                    <a:lnR w="9525" cap="flat" cmpd="sng" algn="ctr">
+                      <a:solidFill>
+                        <a:srgbClr val="A6A6A6"/>
+                      </a:solidFill>
+                      <a:prstDash val="solid"/>
+                      <a:round/>
+                      <a:headEnd type="none" w="med" len="med"/>
+                      <a:tailEnd type="none" w="med" len="med"/>
+                    </a:lnR>
+                    <a:lnT w="9525" cap="flat" cmpd="sng" algn="ctr">
+                      <a:solidFill>
+                        <a:srgbClr val="A6A6A6"/>
+                      </a:solidFill>
+                      <a:prstDash val="solid"/>
+                      <a:round/>
+                      <a:headEnd type="none" w="med" len="med"/>
+                      <a:tailEnd type="none" w="med" len="med"/>
+                    </a:lnT>
+                    <a:lnB w="9525" cap="flat" cmpd="sng" algn="ctr">
+                      <a:solidFill>
+                        <a:srgbClr val="A6A6A6"/>
+                      </a:solidFill>
+                      <a:prstDash val="solid"/>
+                      <a:round/>
+                      <a:headEnd type="none" w="med" len="med"/>
+                      <a:tailEnd type="none" w="med" len="med"/>
+                    </a:lnB>
+                  </a:tcPr>
+                </a:tc>
+              </a:tr>
+            </a:tbl>
+          </a:graphicData>
+        </a:graphic>
+      </p:graphicFrame>
     </p:spTree>
   </p:cSld>
   <p:clrMapOvr>
@@ -4631,7 +4435,7 @@
         <p:spPr>
           <a:xfrm>
             <a:off x="320040" y="1078992"/>
-            <a:ext cx="11551615" cy="310896"/>
+            <a:ext cx="4274098" cy="310896"/>
           </a:xfrm>
           <a:prstGeom prst="rect">
             <a:avLst/>
@@ -4651,7 +4455,7 @@
         <p:spPr>
           <a:xfrm>
             <a:off x="365760" y="1078992"/>
-            <a:ext cx="11460175" cy="310896"/>
+            <a:ext cx="4182658" cy="310896"/>
           </a:xfrm>
           <a:prstGeom prst="rect">
             <a:avLst/>
@@ -4689,8 +4493,8 @@
         </p:nvSpPr>
         <p:spPr>
           <a:xfrm>
-            <a:off x="365760" y="1499616"/>
-            <a:ext cx="3605077" cy="3443996"/>
+            <a:off x="365760" y="1463040"/>
+            <a:ext cx="4182658" cy="1852026"/>
           </a:xfrm>
           <a:prstGeom prst="rect">
             <a:avLst/>
@@ -4710,7 +4514,7 @@
               <a:buChar char="◆"/>
             </a:pPr>
             <a:r>
-              <a:rPr lang="en-US" sz="1150" b="1" dirty="0">
+              <a:rPr lang="en-US" sz="1050" b="1" dirty="0">
                 <a:solidFill>
                   <a:srgbClr val="262626"/>
                 </a:solidFill>
@@ -4720,7 +4524,7 @@
               </a:rPr>
               <a:t>핵심 결정 — 이종 tier 위 KV의 배치·압축·이동을 누가 결정하는가: 품질 예산의 집행 주체</a:t>
             </a:r>
-            <a:endParaRPr lang="en-US" sz="1150" dirty="0"/>
+            <a:endParaRPr lang="en-US" sz="1050" dirty="0"/>
           </a:p>
           <a:p>
             <a:pPr algn="l" marL="177800" indent="-177800">
@@ -4731,7 +4535,7 @@
               <a:buChar char="◆"/>
             </a:pPr>
             <a:r>
-              <a:rPr lang="en-US" sz="1150" dirty="0">
+              <a:rPr lang="en-US" sz="1050" dirty="0">
                 <a:solidFill>
                   <a:srgbClr val="B3402A"/>
                 </a:solidFill>
@@ -4741,7 +4545,7 @@
               </a:rPr>
               <a:t>결정에 필요한 두 정보(요청 문맥·자원 상태)가 서로 다른 패키지에 있음 — 우측 구조도의 「?」</a:t>
             </a:r>
-            <a:endParaRPr lang="en-US" sz="1150" dirty="0"/>
+            <a:endParaRPr lang="en-US" sz="1050" dirty="0"/>
           </a:p>
           <a:p>
             <a:pPr algn="l" marL="177800" indent="-177800">
@@ -4752,7 +4556,7 @@
               <a:buChar char="◆"/>
             </a:pPr>
             <a:r>
-              <a:rPr lang="en-US" sz="1150" dirty="0">
+              <a:rPr lang="en-US" sz="1050" dirty="0">
                 <a:solidFill>
                   <a:srgbClr val="262626"/>
                 </a:solidFill>
@@ -4760,45 +4564,22 @@
                 <a:ea typeface="Malgun Gothic" pitchFamily="34" charset="-122"/>
                 <a:cs typeface="Malgun Gothic" pitchFamily="34" charset="-120"/>
               </a:rPr>
-              <a:t>요청 문맥 = orchestration만 앎 / 자원 상태 = memory engine만 신선하게 앎 (μs~ms 변화)</a:t>
+              <a:t>요청 문맥 = orchestration만 앎 / 자원 상태 = memory engine만 신선하게 앎 (μs~ms)</a:t>
             </a:r>
-            <a:endParaRPr lang="en-US" sz="1150" dirty="0"/>
+            <a:endParaRPr lang="en-US" sz="1050" dirty="0"/>
           </a:p>
         </p:txBody>
       </p:sp>
-      <p:pic>
-        <p:nvPicPr>
-          <p:cNvPr id="22" name="Image 0" descr="/home/user/architect/docs/mcr_assets/dp/dp2_problem_arch.png">    </p:cNvPr>
-          <p:cNvPicPr>
-            <a:picLocks noChangeAspect="1"/>
-          </p:cNvPicPr>
-          <p:nvPr/>
-        </p:nvPicPr>
-        <p:blipFill>
-          <a:blip r:embed="rId1"/>
-          <a:srcRect l="0" r="0" t="0" b="0"/>
-          <a:stretch/>
-        </p:blipFill>
-        <p:spPr>
-          <a:xfrm>
-            <a:off x="4245157" y="1499616"/>
-            <a:ext cx="7626498" cy="3443996"/>
-          </a:xfrm>
-          <a:prstGeom prst="rect">
-            <a:avLst/>
-          </a:prstGeom>
-        </p:spPr>
-      </p:pic>
-      <p:sp>
-        <p:nvSpPr>
-          <p:cNvPr id="23" name="Shape 20"/>
-          <p:cNvSpPr/>
-          <p:nvPr/>
-        </p:nvSpPr>
-        <p:spPr>
-          <a:xfrm>
-            <a:off x="320040" y="5053340"/>
-            <a:ext cx="11551615" cy="310896"/>
+      <p:sp>
+        <p:nvSpPr>
+          <p:cNvPr id="22" name="Shape 20"/>
+          <p:cNvSpPr/>
+          <p:nvPr/>
+        </p:nvSpPr>
+        <p:spPr>
+          <a:xfrm>
+            <a:off x="320040" y="3388218"/>
+            <a:ext cx="4274098" cy="310896"/>
           </a:xfrm>
           <a:prstGeom prst="rect">
             <a:avLst/>
@@ -4811,14 +4592,14 @@
       </p:sp>
       <p:sp>
         <p:nvSpPr>
-          <p:cNvPr id="24" name="Text 21"/>
-          <p:cNvSpPr/>
-          <p:nvPr/>
-        </p:nvSpPr>
-        <p:spPr>
-          <a:xfrm>
-            <a:off x="365760" y="5053340"/>
-            <a:ext cx="11460175" cy="310896"/>
+          <p:cNvPr id="23" name="Text 21"/>
+          <p:cNvSpPr/>
+          <p:nvPr/>
+        </p:nvSpPr>
+        <p:spPr>
+          <a:xfrm>
+            <a:off x="365760" y="3388218"/>
+            <a:ext cx="4182658" cy="310896"/>
           </a:xfrm>
           <a:prstGeom prst="rect">
             <a:avLst/>
@@ -4850,14 +4631,14 @@
       </p:sp>
       <p:sp>
         <p:nvSpPr>
-          <p:cNvPr id="25" name="Text 22"/>
-          <p:cNvSpPr/>
-          <p:nvPr/>
-        </p:nvSpPr>
-        <p:spPr>
-          <a:xfrm>
-            <a:off x="365760" y="5473964"/>
-            <a:ext cx="11460175" cy="972556"/>
+          <p:cNvPr id="24" name="Text 22"/>
+          <p:cNvSpPr/>
+          <p:nvPr/>
+        </p:nvSpPr>
+        <p:spPr>
+          <a:xfrm>
+            <a:off x="365760" y="3772266"/>
+            <a:ext cx="4182658" cy="2655966"/>
           </a:xfrm>
           <a:prstGeom prst="rect">
             <a:avLst/>
@@ -4876,7 +4657,7 @@
               <a:buNone/>
             </a:pPr>
             <a:r>
-              <a:rPr lang="en-US" sz="1150" dirty="0">
+              <a:rPr lang="en-US" sz="1050" dirty="0">
                 <a:solidFill>
                   <a:srgbClr val="262626"/>
                 </a:solidFill>
@@ -4886,7 +4667,7 @@
               </a:rPr>
               <a:t>1. 품질 예산을 요청별로 차등 집행하려면 — 요청 문맥을 어느 레벨까지 내릴 것인가</a:t>
             </a:r>
-            <a:endParaRPr lang="en-US" sz="1150" dirty="0"/>
+            <a:endParaRPr lang="en-US" sz="1050" dirty="0"/>
           </a:p>
           <a:p>
             <a:pPr algn="l" indent="0" marL="0">
@@ -4896,7 +4677,7 @@
               <a:buNone/>
             </a:pPr>
             <a:r>
-              <a:rPr lang="en-US" sz="1150" dirty="0">
+              <a:rPr lang="en-US" sz="1050" dirty="0">
                 <a:solidFill>
                   <a:srgbClr val="262626"/>
                 </a:solidFill>
@@ -4906,7 +4687,7 @@
               </a:rPr>
               <a:t>2. 메모리 압박 스파이크 대응은 μs 반응 필요 — 어느 레벨까지 자율성을 줄 것인가</a:t>
             </a:r>
-            <a:endParaRPr lang="en-US" sz="1150" dirty="0"/>
+            <a:endParaRPr lang="en-US" sz="1050" dirty="0"/>
           </a:p>
           <a:p>
             <a:pPr algn="l" indent="0" marL="0">
@@ -4916,7 +4697,7 @@
               <a:buNone/>
             </a:pPr>
             <a:r>
-              <a:rPr lang="en-US" sz="1150" dirty="0">
+              <a:rPr lang="en-US" sz="1050" dirty="0">
                 <a:solidFill>
                   <a:srgbClr val="262626"/>
                 </a:solidFill>
@@ -4926,7 +4707,7 @@
               </a:rPr>
               <a:t>3. Memory Engine의 독립 재사용성(타 엔진 이식·생태계 전략)을 policy 결합이 훼손하지 않는가</a:t>
             </a:r>
-            <a:endParaRPr lang="en-US" sz="1150" dirty="0"/>
+            <a:endParaRPr lang="en-US" sz="1050" dirty="0"/>
           </a:p>
           <a:p>
             <a:pPr algn="l" indent="0" marL="0">
@@ -4936,7 +4717,7 @@
               <a:buNone/>
             </a:pPr>
             <a:r>
-              <a:rPr lang="en-US" sz="1150" dirty="0">
+              <a:rPr lang="en-US" sz="1050" dirty="0">
                 <a:solidFill>
                   <a:srgbClr val="1F3864"/>
                 </a:solidFill>
@@ -4946,10 +4727,34 @@
               </a:rPr>
               <a:t>4. (DP1 커플링) 외부 스택에선 중앙 정책을 엔진 scheduler에 심을 수 없음 — 변형 B(LMCache)는 제약 최강</a:t>
             </a:r>
-            <a:endParaRPr lang="en-US" sz="1150" dirty="0"/>
+            <a:endParaRPr lang="en-US" sz="1050" dirty="0"/>
           </a:p>
         </p:txBody>
       </p:sp>
+      <p:pic>
+        <p:nvPicPr>
+          <p:cNvPr id="25" name="Image 0" descr="/home/user/architect/docs/mcr_assets/dp/dp2_problem_arch.png">    </p:cNvPr>
+          <p:cNvPicPr>
+            <a:picLocks noChangeAspect="1"/>
+          </p:cNvPicPr>
+          <p:nvPr/>
+        </p:nvPicPr>
+        <p:blipFill>
+          <a:blip r:embed="rId1"/>
+          <a:stretch>
+            <a:fillRect/>
+          </a:stretch>
+        </p:blipFill>
+        <p:spPr>
+          <a:xfrm>
+            <a:off x="4850170" y="1422261"/>
+            <a:ext cx="7021486" cy="4680990"/>
+          </a:xfrm>
+          <a:prstGeom prst="rect">
+            <a:avLst/>
+          </a:prstGeom>
+        </p:spPr>
+      </p:pic>
     </p:spTree>
   </p:cSld>
   <p:clrMapOvr>
@@ -5477,108 +5282,21 @@
       </p:sp>
       <p:sp>
         <p:nvSpPr>
-          <p:cNvPr id="19" name="Shape 17"/>
+          <p:cNvPr id="19" name="Text 17"/>
           <p:cNvSpPr/>
           <p:nvPr/>
         </p:nvSpPr>
         <p:spPr>
           <a:xfrm>
             <a:off x="320040" y="1078992"/>
-            <a:ext cx="960120" cy="310896"/>
+            <a:ext cx="5638648" cy="274320"/>
           </a:xfrm>
           <a:prstGeom prst="rect">
             <a:avLst/>
           </a:prstGeom>
           <a:solidFill>
-            <a:srgbClr val="3C5F2C"/>
+            <a:srgbClr val="1F3864"/>
           </a:solidFill>
-          <a:ln w="9525">
-            <a:solidFill>
-              <a:srgbClr val="A6A6A6"/>
-            </a:solidFill>
-            <a:prstDash val="solid"/>
-          </a:ln>
-        </p:spPr>
-      </p:sp>
-      <p:sp>
-        <p:nvSpPr>
-          <p:cNvPr id="20" name="Text 18"/>
-          <p:cNvSpPr/>
-          <p:nvPr/>
-        </p:nvSpPr>
-        <p:spPr>
-          <a:xfrm>
-            <a:off x="320040" y="1078992"/>
-            <a:ext cx="960120" cy="310896"/>
-          </a:xfrm>
-          <a:prstGeom prst="rect">
-            <a:avLst/>
-          </a:prstGeom>
-          <a:noFill/>
-          <a:ln/>
-        </p:spPr>
-        <p:txBody>
-          <a:bodyPr wrap="square" lIns="0" tIns="0" rIns="0" bIns="0" rtlCol="0" anchor="ctr"/>
-          <a:lstStyle/>
-          <a:p>
-            <a:pPr algn="ctr" indent="0" marL="0">
-              <a:buNone/>
-            </a:pPr>
-            <a:r>
-              <a:rPr lang="en-US" sz="1100" b="1" dirty="0">
-                <a:solidFill>
-                  <a:srgbClr val="FFFFFF"/>
-                </a:solidFill>
-                <a:latin typeface="Malgun Gothic" pitchFamily="34" charset="0"/>
-                <a:ea typeface="Malgun Gothic" pitchFamily="34" charset="-122"/>
-                <a:cs typeface="Malgun Gothic" pitchFamily="34" charset="-120"/>
-              </a:rPr>
-              <a:t>구분</a:t>
-            </a:r>
-            <a:endParaRPr lang="en-US" sz="1100" dirty="0"/>
-          </a:p>
-        </p:txBody>
-      </p:sp>
-      <p:sp>
-        <p:nvSpPr>
-          <p:cNvPr id="21" name="Shape 19"/>
-          <p:cNvSpPr/>
-          <p:nvPr/>
-        </p:nvSpPr>
-        <p:spPr>
-          <a:xfrm>
-            <a:off x="1280160" y="1078992"/>
-            <a:ext cx="5295748" cy="310896"/>
-          </a:xfrm>
-          <a:prstGeom prst="rect">
-            <a:avLst/>
-          </a:prstGeom>
-          <a:solidFill>
-            <a:srgbClr val="3C5F2C"/>
-          </a:solidFill>
-          <a:ln w="9525">
-            <a:solidFill>
-              <a:srgbClr val="A6A6A6"/>
-            </a:solidFill>
-            <a:prstDash val="solid"/>
-          </a:ln>
-        </p:spPr>
-      </p:sp>
-      <p:sp>
-        <p:nvSpPr>
-          <p:cNvPr id="22" name="Text 20"/>
-          <p:cNvSpPr/>
-          <p:nvPr/>
-        </p:nvSpPr>
-        <p:spPr>
-          <a:xfrm>
-            <a:off x="1280160" y="1078992"/>
-            <a:ext cx="5295748" cy="310896"/>
-          </a:xfrm>
-          <a:prstGeom prst="rect">
-            <a:avLst/>
-          </a:prstGeom>
-          <a:noFill/>
           <a:ln/>
         </p:spPr>
         <p:txBody>
@@ -5603,46 +5321,47 @@
           </a:p>
         </p:txBody>
       </p:sp>
-      <p:sp>
-        <p:nvSpPr>
-          <p:cNvPr id="23" name="Shape 21"/>
-          <p:cNvSpPr/>
-          <p:nvPr/>
-        </p:nvSpPr>
-        <p:spPr>
-          <a:xfrm>
-            <a:off x="6575908" y="1078992"/>
-            <a:ext cx="5295748" cy="310896"/>
+      <p:pic>
+        <p:nvPicPr>
+          <p:cNvPr id="20" name="Image 0" descr="/home/user/architect/docs/mcr_assets/dp/dp2_c1.png">    </p:cNvPr>
+          <p:cNvPicPr>
+            <a:picLocks noChangeAspect="1"/>
+          </p:cNvPicPr>
+          <p:nvPr/>
+        </p:nvPicPr>
+        <p:blipFill>
+          <a:blip r:embed="rId1"/>
+          <a:stretch>
+            <a:fillRect/>
+          </a:stretch>
+        </p:blipFill>
+        <p:spPr>
+          <a:xfrm>
+            <a:off x="1737229" y="1408176"/>
+            <a:ext cx="2804271" cy="3447288"/>
+          </a:xfrm>
+          <a:prstGeom prst="rect">
+            <a:avLst/>
+          </a:prstGeom>
+        </p:spPr>
+      </p:pic>
+      <p:sp>
+        <p:nvSpPr>
+          <p:cNvPr id="21" name="Text 18"/>
+          <p:cNvSpPr/>
+          <p:nvPr/>
+        </p:nvSpPr>
+        <p:spPr>
+          <a:xfrm>
+            <a:off x="6233008" y="1078992"/>
+            <a:ext cx="5638648" cy="274320"/>
           </a:xfrm>
           <a:prstGeom prst="rect">
             <a:avLst/>
           </a:prstGeom>
           <a:solidFill>
-            <a:srgbClr val="3C5F2C"/>
+            <a:srgbClr val="1F3864"/>
           </a:solidFill>
-          <a:ln w="9525">
-            <a:solidFill>
-              <a:srgbClr val="A6A6A6"/>
-            </a:solidFill>
-            <a:prstDash val="solid"/>
-          </a:ln>
-        </p:spPr>
-      </p:sp>
-      <p:sp>
-        <p:nvSpPr>
-          <p:cNvPr id="24" name="Text 22"/>
-          <p:cNvSpPr/>
-          <p:nvPr/>
-        </p:nvSpPr>
-        <p:spPr>
-          <a:xfrm>
-            <a:off x="6575908" y="1078992"/>
-            <a:ext cx="5295748" cy="310896"/>
-          </a:xfrm>
-          <a:prstGeom prst="rect">
-            <a:avLst/>
-          </a:prstGeom>
-          <a:noFill/>
           <a:ln/>
         </p:spPr>
         <p:txBody>
@@ -5667,1402 +5386,1312 @@
           </a:p>
         </p:txBody>
       </p:sp>
-      <p:sp>
-        <p:nvSpPr>
-          <p:cNvPr id="25" name="Shape 23"/>
-          <p:cNvSpPr/>
-          <p:nvPr/>
-        </p:nvSpPr>
-        <p:spPr>
-          <a:xfrm>
-            <a:off x="320040" y="1389888"/>
-            <a:ext cx="960120" cy="2011680"/>
-          </a:xfrm>
-          <a:prstGeom prst="rect">
-            <a:avLst/>
-          </a:prstGeom>
-          <a:solidFill>
-            <a:srgbClr val="1F3864"/>
-          </a:solidFill>
-          <a:ln w="9525">
-            <a:solidFill>
-              <a:srgbClr val="A6A6A6"/>
-            </a:solidFill>
-            <a:prstDash val="solid"/>
-          </a:ln>
-        </p:spPr>
-      </p:sp>
-      <p:sp>
-        <p:nvSpPr>
-          <p:cNvPr id="26" name="Text 24"/>
-          <p:cNvSpPr/>
-          <p:nvPr/>
-        </p:nvSpPr>
-        <p:spPr>
-          <a:xfrm>
-            <a:off x="320040" y="1389888"/>
-            <a:ext cx="960120" cy="2011680"/>
-          </a:xfrm>
-          <a:prstGeom prst="rect">
-            <a:avLst/>
-          </a:prstGeom>
-          <a:noFill/>
-          <a:ln/>
-        </p:spPr>
-        <p:txBody>
-          <a:bodyPr wrap="square" lIns="0" tIns="0" rIns="0" bIns="0" rtlCol="0" anchor="ctr"/>
-          <a:lstStyle/>
-          <a:p>
-            <a:pPr algn="ctr" indent="0" marL="0">
-              <a:buNone/>
-            </a:pPr>
-            <a:r>
-              <a:rPr lang="en-US" sz="1050" b="1" dirty="0">
-                <a:solidFill>
-                  <a:srgbClr val="FFFFFF"/>
-                </a:solidFill>
-                <a:latin typeface="Malgun Gothic" pitchFamily="34" charset="0"/>
-                <a:ea typeface="Malgun Gothic" pitchFamily="34" charset="-122"/>
-                <a:cs typeface="Malgun Gothic" pitchFamily="34" charset="-120"/>
-              </a:rPr>
-              <a:t>설계도</a:t>
-            </a:r>
-            <a:endParaRPr lang="en-US" sz="1050" dirty="0"/>
-          </a:p>
-        </p:txBody>
-      </p:sp>
-      <p:sp>
-        <p:nvSpPr>
-          <p:cNvPr id="27" name="Shape 25"/>
-          <p:cNvSpPr/>
-          <p:nvPr/>
-        </p:nvSpPr>
-        <p:spPr>
-          <a:xfrm>
-            <a:off x="1280160" y="1389888"/>
-            <a:ext cx="5295748" cy="2011680"/>
-          </a:xfrm>
-          <a:prstGeom prst="rect">
-            <a:avLst/>
-          </a:prstGeom>
-          <a:solidFill>
-            <a:srgbClr val="FFFFFF"/>
-          </a:solidFill>
-          <a:ln w="9525">
-            <a:solidFill>
-              <a:srgbClr val="A6A6A6"/>
-            </a:solidFill>
-            <a:prstDash val="solid"/>
-          </a:ln>
-        </p:spPr>
-      </p:sp>
       <p:pic>
         <p:nvPicPr>
-          <p:cNvPr id="28" name="Image 0" descr="/home/user/architect/docs/mcr_assets/dp/dp2_c1.png">    </p:cNvPr>
+          <p:cNvPr id="22" name="Image 1" descr="/home/user/architect/docs/mcr_assets/dp/dp2_c2.png">    </p:cNvPr>
           <p:cNvPicPr>
             <a:picLocks noChangeAspect="1"/>
           </p:cNvPicPr>
           <p:nvPr/>
         </p:nvPicPr>
         <p:blipFill>
-          <a:blip r:embed="rId1"/>
-          <a:srcRect l="0" r="0" t="0" b="0"/>
-          <a:stretch/>
+          <a:blip r:embed="rId2"/>
+          <a:stretch>
+            <a:fillRect/>
+          </a:stretch>
         </p:blipFill>
         <p:spPr>
           <a:xfrm>
-            <a:off x="1325880" y="1435608"/>
-            <a:ext cx="5204308" cy="1920240"/>
+            <a:off x="7583215" y="1408176"/>
+            <a:ext cx="2938233" cy="3447288"/>
           </a:xfrm>
           <a:prstGeom prst="rect">
             <a:avLst/>
           </a:prstGeom>
         </p:spPr>
       </p:pic>
-      <p:sp>
-        <p:nvSpPr>
-          <p:cNvPr id="29" name="Shape 26"/>
-          <p:cNvSpPr/>
-          <p:nvPr/>
-        </p:nvSpPr>
-        <p:spPr>
-          <a:xfrm>
-            <a:off x="6575908" y="1389888"/>
-            <a:ext cx="5295748" cy="2011680"/>
-          </a:xfrm>
-          <a:prstGeom prst="rect">
-            <a:avLst/>
-          </a:prstGeom>
-          <a:solidFill>
-            <a:srgbClr val="FFFFFF"/>
-          </a:solidFill>
-          <a:ln w="9525">
-            <a:solidFill>
-              <a:srgbClr val="A6A6A6"/>
-            </a:solidFill>
-            <a:prstDash val="solid"/>
-          </a:ln>
-        </p:spPr>
-      </p:sp>
-      <p:pic>
-        <p:nvPicPr>
-          <p:cNvPr id="30" name="Image 1" descr="/home/user/architect/docs/mcr_assets/dp/dp2_c2.png">    </p:cNvPr>
-          <p:cNvPicPr>
-            <a:picLocks noChangeAspect="1"/>
-          </p:cNvPicPr>
-          <p:nvPr/>
-        </p:nvPicPr>
-        <p:blipFill>
-          <a:blip r:embed="rId2"/>
-          <a:srcRect l="0" r="0" t="0" b="0"/>
-          <a:stretch/>
-        </p:blipFill>
-        <p:spPr>
-          <a:xfrm>
-            <a:off x="6621628" y="1435608"/>
-            <a:ext cx="5204308" cy="1920240"/>
-          </a:xfrm>
-          <a:prstGeom prst="rect">
-            <a:avLst/>
-          </a:prstGeom>
-        </p:spPr>
-      </p:pic>
-      <p:sp>
-        <p:nvSpPr>
-          <p:cNvPr id="31" name="Shape 27"/>
-          <p:cNvSpPr/>
-          <p:nvPr/>
-        </p:nvSpPr>
-        <p:spPr>
-          <a:xfrm>
-            <a:off x="320040" y="3401568"/>
-            <a:ext cx="960120" cy="640080"/>
-          </a:xfrm>
-          <a:prstGeom prst="rect">
-            <a:avLst/>
-          </a:prstGeom>
-          <a:solidFill>
-            <a:srgbClr val="1F3864"/>
-          </a:solidFill>
-          <a:ln w="9525">
-            <a:solidFill>
-              <a:srgbClr val="A6A6A6"/>
-            </a:solidFill>
-            <a:prstDash val="solid"/>
-          </a:ln>
-        </p:spPr>
-      </p:sp>
-      <p:sp>
-        <p:nvSpPr>
-          <p:cNvPr id="32" name="Text 28"/>
-          <p:cNvSpPr/>
-          <p:nvPr/>
-        </p:nvSpPr>
-        <p:spPr>
-          <a:xfrm>
-            <a:off x="320040" y="3401568"/>
-            <a:ext cx="960120" cy="640080"/>
-          </a:xfrm>
-          <a:prstGeom prst="rect">
-            <a:avLst/>
-          </a:prstGeom>
-          <a:noFill/>
-          <a:ln/>
-        </p:spPr>
-        <p:txBody>
-          <a:bodyPr wrap="square" lIns="0" tIns="0" rIns="0" bIns="0" rtlCol="0" anchor="ctr"/>
-          <a:lstStyle/>
-          <a:p>
-            <a:pPr algn="ctr" indent="0" marL="0">
-              <a:buNone/>
-            </a:pPr>
-            <a:r>
-              <a:rPr lang="en-US" sz="1050" b="1" dirty="0">
-                <a:solidFill>
-                  <a:srgbClr val="FFFFFF"/>
-                </a:solidFill>
-                <a:latin typeface="Malgun Gothic" pitchFamily="34" charset="0"/>
-                <a:ea typeface="Malgun Gothic" pitchFamily="34" charset="-122"/>
-                <a:cs typeface="Malgun Gothic" pitchFamily="34" charset="-120"/>
-              </a:rPr>
-              <a:t>특징</a:t>
-            </a:r>
-            <a:endParaRPr lang="en-US" sz="1050" dirty="0"/>
-          </a:p>
-        </p:txBody>
-      </p:sp>
-      <p:sp>
-        <p:nvSpPr>
-          <p:cNvPr id="33" name="Shape 29"/>
-          <p:cNvSpPr/>
-          <p:nvPr/>
-        </p:nvSpPr>
-        <p:spPr>
-          <a:xfrm>
-            <a:off x="1280160" y="3401568"/>
-            <a:ext cx="5295748" cy="640080"/>
-          </a:xfrm>
-          <a:prstGeom prst="rect">
-            <a:avLst/>
-          </a:prstGeom>
-          <a:solidFill>
-            <a:srgbClr val="FFFFFF"/>
-          </a:solidFill>
-          <a:ln w="9525">
-            <a:solidFill>
-              <a:srgbClr val="A6A6A6"/>
-            </a:solidFill>
-            <a:prstDash val="solid"/>
-          </a:ln>
-        </p:spPr>
-      </p:sp>
-      <p:sp>
-        <p:nvSpPr>
-          <p:cNvPr id="34" name="Text 30"/>
-          <p:cNvSpPr/>
-          <p:nvPr/>
-        </p:nvSpPr>
-        <p:spPr>
-          <a:xfrm>
-            <a:off x="1371600" y="3447288"/>
-            <a:ext cx="5112868" cy="548640"/>
-          </a:xfrm>
-          <a:prstGeom prst="rect">
-            <a:avLst/>
-          </a:prstGeom>
-          <a:noFill/>
-          <a:ln/>
-        </p:spPr>
-        <p:txBody>
-          <a:bodyPr wrap="square" lIns="0" tIns="0" rIns="0" bIns="0" rtlCol="0" anchor="t"/>
-          <a:lstStyle/>
-          <a:p>
-            <a:pPr algn="l" marL="177800" indent="-177800">
-              <a:spcAft>
-                <a:spcPts val="600"/>
-              </a:spcAft>
-              <a:buSzPct val="100000"/>
-              <a:buChar char="◆"/>
-            </a:pPr>
-            <a:r>
-              <a:rPr lang="en-US" sz="950" dirty="0">
-                <a:solidFill>
-                  <a:srgbClr val="262626"/>
-                </a:solidFill>
-                <a:latin typeface="Malgun Gothic" pitchFamily="34" charset="0"/>
-                <a:ea typeface="Malgun Gothic" pitchFamily="34" charset="-122"/>
-                <a:cs typeface="Malgun Gothic" pitchFamily="34" charset="-120"/>
-              </a:rPr>
-              <a:t>Scheduling에 KV Placement &amp; Compression Policy 신설 — Router가 목표 tier·압축 수준·재사용까지 지시, Memory Engine은 집행 전담</a:t>
-            </a:r>
-            <a:endParaRPr lang="en-US" sz="950" dirty="0"/>
-          </a:p>
-        </p:txBody>
-      </p:sp>
-      <p:sp>
-        <p:nvSpPr>
-          <p:cNvPr id="35" name="Shape 31"/>
-          <p:cNvSpPr/>
-          <p:nvPr/>
-        </p:nvSpPr>
-        <p:spPr>
-          <a:xfrm>
-            <a:off x="6575908" y="3401568"/>
-            <a:ext cx="5295748" cy="640080"/>
-          </a:xfrm>
-          <a:prstGeom prst="rect">
-            <a:avLst/>
-          </a:prstGeom>
-          <a:solidFill>
-            <a:srgbClr val="FFFFFF"/>
-          </a:solidFill>
-          <a:ln w="9525">
-            <a:solidFill>
-              <a:srgbClr val="A6A6A6"/>
-            </a:solidFill>
-            <a:prstDash val="solid"/>
-          </a:ln>
-        </p:spPr>
-      </p:sp>
-      <p:sp>
-        <p:nvSpPr>
-          <p:cNvPr id="36" name="Text 32"/>
-          <p:cNvSpPr/>
-          <p:nvPr/>
-        </p:nvSpPr>
-        <p:spPr>
-          <a:xfrm>
-            <a:off x="6667348" y="3447288"/>
-            <a:ext cx="5112868" cy="548640"/>
-          </a:xfrm>
-          <a:prstGeom prst="rect">
-            <a:avLst/>
-          </a:prstGeom>
-          <a:noFill/>
-          <a:ln/>
-        </p:spPr>
-        <p:txBody>
-          <a:bodyPr wrap="square" lIns="0" tIns="0" rIns="0" bIns="0" rtlCol="0" anchor="t"/>
-          <a:lstStyle/>
-          <a:p>
-            <a:pPr algn="l" marL="177800" indent="-177800">
-              <a:spcAft>
-                <a:spcPts val="600"/>
-              </a:spcAft>
-              <a:buSzPct val="100000"/>
-              <a:buChar char="◆"/>
-            </a:pPr>
-            <a:r>
-              <a:rPr lang="en-US" sz="950" dirty="0">
-                <a:solidFill>
-                  <a:srgbClr val="262626"/>
-                </a:solidFill>
-                <a:latin typeface="Malgun Gothic" pitchFamily="34" charset="0"/>
-                <a:ea typeface="Malgun Gothic" pitchFamily="34" charset="-122"/>
-                <a:cs typeface="Malgun Gothic" pitchFamily="34" charset="-120"/>
-              </a:rPr>
-              <a:t>Cache Manager가 자체 정책(접근 온도·watermark) 내장 — Orchestration은 얇은 hint API(pin·priority·품질 예산)만 (madvise 모델)</a:t>
-            </a:r>
-            <a:endParaRPr lang="en-US" sz="950" dirty="0"/>
-          </a:p>
-        </p:txBody>
-      </p:sp>
-      <p:sp>
-        <p:nvSpPr>
-          <p:cNvPr id="37" name="Shape 33"/>
-          <p:cNvSpPr/>
-          <p:nvPr/>
-        </p:nvSpPr>
-        <p:spPr>
-          <a:xfrm>
-            <a:off x="320040" y="4041648"/>
-            <a:ext cx="960120" cy="777240"/>
-          </a:xfrm>
-          <a:prstGeom prst="rect">
-            <a:avLst/>
-          </a:prstGeom>
-          <a:solidFill>
-            <a:srgbClr val="1F3864"/>
-          </a:solidFill>
-          <a:ln w="9525">
-            <a:solidFill>
-              <a:srgbClr val="A6A6A6"/>
-            </a:solidFill>
-            <a:prstDash val="solid"/>
-          </a:ln>
-        </p:spPr>
-      </p:sp>
-      <p:sp>
-        <p:nvSpPr>
-          <p:cNvPr id="38" name="Text 34"/>
-          <p:cNvSpPr/>
-          <p:nvPr/>
-        </p:nvSpPr>
-        <p:spPr>
-          <a:xfrm>
-            <a:off x="320040" y="4041648"/>
-            <a:ext cx="960120" cy="777240"/>
-          </a:xfrm>
-          <a:prstGeom prst="rect">
-            <a:avLst/>
-          </a:prstGeom>
-          <a:noFill/>
-          <a:ln/>
-        </p:spPr>
-        <p:txBody>
-          <a:bodyPr wrap="square" lIns="0" tIns="0" rIns="0" bIns="0" rtlCol="0" anchor="ctr"/>
-          <a:lstStyle/>
-          <a:p>
-            <a:pPr algn="ctr" indent="0" marL="0">
-              <a:buNone/>
-            </a:pPr>
-            <a:r>
-              <a:rPr lang="en-US" sz="1050" b="1" dirty="0">
-                <a:solidFill>
-                  <a:srgbClr val="FFFFFF"/>
-                </a:solidFill>
-                <a:latin typeface="Malgun Gothic" pitchFamily="34" charset="0"/>
-                <a:ea typeface="Malgun Gothic" pitchFamily="34" charset="-122"/>
-                <a:cs typeface="Malgun Gothic" pitchFamily="34" charset="-120"/>
-              </a:rPr>
-              <a:t>장점</a:t>
-            </a:r>
-            <a:endParaRPr lang="en-US" sz="1050" dirty="0"/>
-          </a:p>
-        </p:txBody>
-      </p:sp>
-      <p:sp>
-        <p:nvSpPr>
-          <p:cNvPr id="39" name="Shape 35"/>
-          <p:cNvSpPr/>
-          <p:nvPr/>
-        </p:nvSpPr>
-        <p:spPr>
-          <a:xfrm>
-            <a:off x="1280160" y="4041648"/>
-            <a:ext cx="5295748" cy="777240"/>
-          </a:xfrm>
-          <a:prstGeom prst="rect">
-            <a:avLst/>
-          </a:prstGeom>
-          <a:solidFill>
-            <a:srgbClr val="FFFFFF"/>
-          </a:solidFill>
-          <a:ln w="9525">
-            <a:solidFill>
-              <a:srgbClr val="A6A6A6"/>
-            </a:solidFill>
-            <a:prstDash val="solid"/>
-          </a:ln>
-        </p:spPr>
-      </p:sp>
-      <p:sp>
-        <p:nvSpPr>
-          <p:cNvPr id="40" name="Text 36"/>
-          <p:cNvSpPr/>
-          <p:nvPr/>
-        </p:nvSpPr>
-        <p:spPr>
-          <a:xfrm>
-            <a:off x="1371600" y="4087368"/>
-            <a:ext cx="5112868" cy="685800"/>
-          </a:xfrm>
-          <a:prstGeom prst="rect">
-            <a:avLst/>
-          </a:prstGeom>
-          <a:noFill/>
-          <a:ln/>
-        </p:spPr>
-        <p:txBody>
-          <a:bodyPr wrap="square" lIns="0" tIns="0" rIns="0" bIns="0" rtlCol="0" anchor="t"/>
-          <a:lstStyle/>
-          <a:p>
-            <a:pPr algn="l" marL="177800" indent="-177800">
-              <a:spcAft>
-                <a:spcPts val="600"/>
-              </a:spcAft>
-              <a:buSzPct val="100000"/>
-              <a:buChar char="◆"/>
-            </a:pPr>
-            <a:r>
-              <a:rPr lang="en-US" sz="950" dirty="0">
-                <a:solidFill>
-                  <a:srgbClr val="262626"/>
-                </a:solidFill>
-                <a:latin typeface="Malgun Gothic" pitchFamily="34" charset="0"/>
-                <a:ea typeface="Malgun Gothic" pitchFamily="34" charset="-122"/>
-                <a:cs typeface="Malgun Gothic" pitchFamily="34" charset="-120"/>
-              </a:rPr>
-              <a:t>전역 최적화 — quality-aware joint orchestration의 구현 위치</a:t>
-            </a:r>
-            <a:endParaRPr lang="en-US" sz="950" dirty="0"/>
-          </a:p>
-          <a:p>
-            <a:pPr algn="l" marL="177800" indent="-177800">
-              <a:spcAft>
-                <a:spcPts val="600"/>
-              </a:spcAft>
-              <a:buSzPct val="100000"/>
-              <a:buChar char="◆"/>
-            </a:pPr>
-            <a:r>
-              <a:rPr lang="en-US" sz="950" dirty="0">
-                <a:solidFill>
-                  <a:srgbClr val="262626"/>
-                </a:solidFill>
-                <a:latin typeface="Malgun Gothic" pitchFamily="34" charset="0"/>
-                <a:ea typeface="Malgun Gothic" pitchFamily="34" charset="-122"/>
-                <a:cs typeface="Malgun Gothic" pitchFamily="34" charset="-120"/>
-              </a:rPr>
-              <a:t>요청별 품질 예산 중앙 집행 — 품질 편차 통제</a:t>
-            </a:r>
-            <a:endParaRPr lang="en-US" sz="950" dirty="0"/>
-          </a:p>
-          <a:p>
-            <a:pPr algn="l" marL="177800" indent="-177800">
-              <a:spcAft>
-                <a:spcPts val="600"/>
-              </a:spcAft>
-              <a:buSzPct val="100000"/>
-              <a:buChar char="◆"/>
-            </a:pPr>
-            <a:r>
-              <a:rPr lang="en-US" sz="950" dirty="0">
-                <a:solidFill>
-                  <a:srgbClr val="262626"/>
-                </a:solidFill>
-                <a:latin typeface="Malgun Gothic" pitchFamily="34" charset="0"/>
-                <a:ea typeface="Malgun Gothic" pitchFamily="34" charset="-122"/>
-                <a:cs typeface="Malgun Gothic" pitchFamily="34" charset="-120"/>
-              </a:rPr>
-              <a:t>결정 로직 단일화 — 설명가능성</a:t>
-            </a:r>
-            <a:endParaRPr lang="en-US" sz="950" dirty="0"/>
-          </a:p>
-        </p:txBody>
-      </p:sp>
-      <p:sp>
-        <p:nvSpPr>
-          <p:cNvPr id="41" name="Shape 37"/>
-          <p:cNvSpPr/>
-          <p:nvPr/>
-        </p:nvSpPr>
-        <p:spPr>
-          <a:xfrm>
-            <a:off x="6575908" y="4041648"/>
-            <a:ext cx="5295748" cy="777240"/>
-          </a:xfrm>
-          <a:prstGeom prst="rect">
-            <a:avLst/>
-          </a:prstGeom>
-          <a:solidFill>
-            <a:srgbClr val="FFFFFF"/>
-          </a:solidFill>
-          <a:ln w="9525">
-            <a:solidFill>
-              <a:srgbClr val="A6A6A6"/>
-            </a:solidFill>
-            <a:prstDash val="solid"/>
-          </a:ln>
-        </p:spPr>
-      </p:sp>
-      <p:sp>
-        <p:nvSpPr>
-          <p:cNvPr id="42" name="Text 38"/>
-          <p:cNvSpPr/>
-          <p:nvPr/>
-        </p:nvSpPr>
-        <p:spPr>
-          <a:xfrm>
-            <a:off x="6667348" y="4087368"/>
-            <a:ext cx="5112868" cy="685800"/>
-          </a:xfrm>
-          <a:prstGeom prst="rect">
-            <a:avLst/>
-          </a:prstGeom>
-          <a:noFill/>
-          <a:ln/>
-        </p:spPr>
-        <p:txBody>
-          <a:bodyPr wrap="square" lIns="0" tIns="0" rIns="0" bIns="0" rtlCol="0" anchor="t"/>
-          <a:lstStyle/>
-          <a:p>
-            <a:pPr algn="l" marL="177800" indent="-177800">
-              <a:spcAft>
-                <a:spcPts val="600"/>
-              </a:spcAft>
-              <a:buSzPct val="100000"/>
-              <a:buChar char="◆"/>
-            </a:pPr>
-            <a:r>
-              <a:rPr lang="en-US" sz="950" dirty="0">
-                <a:solidFill>
-                  <a:srgbClr val="262626"/>
-                </a:solidFill>
-                <a:latin typeface="Malgun Gothic" pitchFamily="34" charset="0"/>
-                <a:ea typeface="Malgun Gothic" pitchFamily="34" charset="-122"/>
-                <a:cs typeface="Malgun Gothic" pitchFamily="34" charset="-120"/>
-              </a:rPr>
-              <a:t>μs 즉시 반응 — 압박 스파이크 흡수 (tail 방어)</a:t>
-            </a:r>
-            <a:endParaRPr lang="en-US" sz="950" dirty="0"/>
-          </a:p>
-          <a:p>
-            <a:pPr algn="l" marL="177800" indent="-177800">
-              <a:spcAft>
-                <a:spcPts val="600"/>
-              </a:spcAft>
-              <a:buSzPct val="100000"/>
-              <a:buChar char="◆"/>
-            </a:pPr>
-            <a:r>
-              <a:rPr lang="en-US" sz="950" dirty="0">
-                <a:solidFill>
-                  <a:srgbClr val="262626"/>
-                </a:solidFill>
-                <a:latin typeface="Malgun Gothic" pitchFamily="34" charset="0"/>
-                <a:ea typeface="Malgun Gothic" pitchFamily="34" charset="-122"/>
-                <a:cs typeface="Malgun Gothic" pitchFamily="34" charset="-120"/>
-              </a:rPr>
-              <a:t>얇은 인터페이스 — DP1 후보1과 가장 정합</a:t>
-            </a:r>
-            <a:endParaRPr lang="en-US" sz="950" dirty="0"/>
-          </a:p>
-          <a:p>
-            <a:pPr algn="l" marL="177800" indent="-177800">
-              <a:spcAft>
-                <a:spcPts val="600"/>
-              </a:spcAft>
-              <a:buSzPct val="100000"/>
-              <a:buChar char="◆"/>
-            </a:pPr>
-            <a:r>
-              <a:rPr lang="en-US" sz="950" dirty="0">
-                <a:solidFill>
-                  <a:srgbClr val="262626"/>
-                </a:solidFill>
-                <a:latin typeface="Malgun Gothic" pitchFamily="34" charset="0"/>
-                <a:ea typeface="Malgun Gothic" pitchFamily="34" charset="-122"/>
-                <a:cs typeface="Malgun Gothic" pitchFamily="34" charset="-120"/>
-              </a:rPr>
-              <a:t>Memory Engine 독립 이식성 — 생태계 전략 부합</a:t>
-            </a:r>
-            <a:endParaRPr lang="en-US" sz="950" dirty="0"/>
-          </a:p>
-        </p:txBody>
-      </p:sp>
-      <p:sp>
-        <p:nvSpPr>
-          <p:cNvPr id="43" name="Shape 39"/>
-          <p:cNvSpPr/>
-          <p:nvPr/>
-        </p:nvSpPr>
-        <p:spPr>
-          <a:xfrm>
-            <a:off x="320040" y="4818888"/>
-            <a:ext cx="960120" cy="777240"/>
-          </a:xfrm>
-          <a:prstGeom prst="rect">
-            <a:avLst/>
-          </a:prstGeom>
-          <a:solidFill>
-            <a:srgbClr val="1F3864"/>
-          </a:solidFill>
-          <a:ln w="9525">
-            <a:solidFill>
-              <a:srgbClr val="A6A6A6"/>
-            </a:solidFill>
-            <a:prstDash val="solid"/>
-          </a:ln>
-        </p:spPr>
-      </p:sp>
-      <p:sp>
-        <p:nvSpPr>
-          <p:cNvPr id="44" name="Text 40"/>
-          <p:cNvSpPr/>
-          <p:nvPr/>
-        </p:nvSpPr>
-        <p:spPr>
-          <a:xfrm>
-            <a:off x="320040" y="4818888"/>
-            <a:ext cx="960120" cy="777240"/>
-          </a:xfrm>
-          <a:prstGeom prst="rect">
-            <a:avLst/>
-          </a:prstGeom>
-          <a:noFill/>
-          <a:ln/>
-        </p:spPr>
-        <p:txBody>
-          <a:bodyPr wrap="square" lIns="0" tIns="0" rIns="0" bIns="0" rtlCol="0" anchor="ctr"/>
-          <a:lstStyle/>
-          <a:p>
-            <a:pPr algn="ctr" indent="0" marL="0">
-              <a:buNone/>
-            </a:pPr>
-            <a:r>
-              <a:rPr lang="en-US" sz="1050" b="1" dirty="0">
-                <a:solidFill>
-                  <a:srgbClr val="FFFFFF"/>
-                </a:solidFill>
-                <a:latin typeface="Malgun Gothic" pitchFamily="34" charset="0"/>
-                <a:ea typeface="Malgun Gothic" pitchFamily="34" charset="-122"/>
-                <a:cs typeface="Malgun Gothic" pitchFamily="34" charset="-120"/>
-              </a:rPr>
-              <a:t>단점</a:t>
-            </a:r>
-            <a:endParaRPr lang="en-US" sz="1050" dirty="0"/>
-          </a:p>
-        </p:txBody>
-      </p:sp>
-      <p:sp>
-        <p:nvSpPr>
-          <p:cNvPr id="45" name="Shape 41"/>
-          <p:cNvSpPr/>
-          <p:nvPr/>
-        </p:nvSpPr>
-        <p:spPr>
-          <a:xfrm>
-            <a:off x="1280160" y="4818888"/>
-            <a:ext cx="5295748" cy="777240"/>
-          </a:xfrm>
-          <a:prstGeom prst="rect">
-            <a:avLst/>
-          </a:prstGeom>
-          <a:solidFill>
-            <a:srgbClr val="FFFFFF"/>
-          </a:solidFill>
-          <a:ln w="9525">
-            <a:solidFill>
-              <a:srgbClr val="A6A6A6"/>
-            </a:solidFill>
-            <a:prstDash val="solid"/>
-          </a:ln>
-        </p:spPr>
-      </p:sp>
-      <p:sp>
-        <p:nvSpPr>
-          <p:cNvPr id="46" name="Text 42"/>
-          <p:cNvSpPr/>
-          <p:nvPr/>
-        </p:nvSpPr>
-        <p:spPr>
-          <a:xfrm>
-            <a:off x="1371600" y="4864608"/>
-            <a:ext cx="5112868" cy="685800"/>
-          </a:xfrm>
-          <a:prstGeom prst="rect">
-            <a:avLst/>
-          </a:prstGeom>
-          <a:noFill/>
-          <a:ln/>
-        </p:spPr>
-        <p:txBody>
-          <a:bodyPr wrap="square" lIns="0" tIns="0" rIns="0" bIns="0" rtlCol="0" anchor="t"/>
-          <a:lstStyle/>
-          <a:p>
-            <a:pPr algn="l" marL="177800" indent="-177800">
-              <a:spcAft>
-                <a:spcPts val="600"/>
-              </a:spcAft>
-              <a:buSzPct val="100000"/>
-              <a:buChar char="◆"/>
-            </a:pPr>
-            <a:r>
-              <a:rPr lang="en-US" sz="950" dirty="0">
-                <a:solidFill>
-                  <a:srgbClr val="262626"/>
-                </a:solidFill>
-                <a:latin typeface="Malgun Gothic" pitchFamily="34" charset="0"/>
-                <a:ea typeface="Malgun Gothic" pitchFamily="34" charset="-122"/>
-                <a:cs typeface="Malgun Gothic" pitchFamily="34" charset="-120"/>
-              </a:rPr>
-              <a:t>요청 단위 제어 루프 — μs 스파이크에 늦음 (tail 악화)</a:t>
-            </a:r>
-            <a:endParaRPr lang="en-US" sz="950" dirty="0"/>
-          </a:p>
-          <a:p>
-            <a:pPr algn="l" marL="177800" indent="-177800">
-              <a:spcAft>
-                <a:spcPts val="600"/>
-              </a:spcAft>
-              <a:buSzPct val="100000"/>
-              <a:buChar char="◆"/>
-            </a:pPr>
-            <a:r>
-              <a:rPr lang="en-US" sz="950" dirty="0">
-                <a:solidFill>
-                  <a:srgbClr val="262626"/>
-                </a:solidFill>
-                <a:latin typeface="Malgun Gothic" pitchFamily="34" charset="0"/>
-                <a:ea typeface="Malgun Gothic" pitchFamily="34" charset="-122"/>
-                <a:cs typeface="Malgun Gothic" pitchFamily="34" charset="-120"/>
-              </a:rPr>
-              <a:t>tier 상태 상시 상향 보고 — 인터페이스 비대·결합도↑</a:t>
-            </a:r>
-            <a:endParaRPr lang="en-US" sz="950" dirty="0"/>
-          </a:p>
-          <a:p>
-            <a:pPr algn="l" marL="177800" indent="-177800">
-              <a:spcAft>
-                <a:spcPts val="600"/>
-              </a:spcAft>
-              <a:buSzPct val="100000"/>
-              <a:buChar char="◆"/>
-            </a:pPr>
-            <a:r>
-              <a:rPr lang="en-US" sz="950" dirty="0">
-                <a:solidFill>
-                  <a:srgbClr val="262626"/>
-                </a:solidFill>
-                <a:latin typeface="Malgun Gothic" pitchFamily="34" charset="0"/>
-                <a:ea typeface="Malgun Gothic" pitchFamily="34" charset="-122"/>
-                <a:cs typeface="Malgun Gothic" pitchFamily="34" charset="-120"/>
-              </a:rPr>
-              <a:t>Memory Engine이 수동 executor로 격하</a:t>
-            </a:r>
-            <a:endParaRPr lang="en-US" sz="950" dirty="0"/>
-          </a:p>
-        </p:txBody>
-      </p:sp>
-      <p:sp>
-        <p:nvSpPr>
-          <p:cNvPr id="47" name="Shape 43"/>
-          <p:cNvSpPr/>
-          <p:nvPr/>
-        </p:nvSpPr>
-        <p:spPr>
-          <a:xfrm>
-            <a:off x="6575908" y="4818888"/>
-            <a:ext cx="5295748" cy="777240"/>
-          </a:xfrm>
-          <a:prstGeom prst="rect">
-            <a:avLst/>
-          </a:prstGeom>
-          <a:solidFill>
-            <a:srgbClr val="FFFFFF"/>
-          </a:solidFill>
-          <a:ln w="9525">
-            <a:solidFill>
-              <a:srgbClr val="A6A6A6"/>
-            </a:solidFill>
-            <a:prstDash val="solid"/>
-          </a:ln>
-        </p:spPr>
-      </p:sp>
-      <p:sp>
-        <p:nvSpPr>
-          <p:cNvPr id="48" name="Text 44"/>
-          <p:cNvSpPr/>
-          <p:nvPr/>
-        </p:nvSpPr>
-        <p:spPr>
-          <a:xfrm>
-            <a:off x="6667348" y="4864608"/>
-            <a:ext cx="5112868" cy="685800"/>
-          </a:xfrm>
-          <a:prstGeom prst="rect">
-            <a:avLst/>
-          </a:prstGeom>
-          <a:noFill/>
-          <a:ln/>
-        </p:spPr>
-        <p:txBody>
-          <a:bodyPr wrap="square" lIns="0" tIns="0" rIns="0" bIns="0" rtlCol="0" anchor="t"/>
-          <a:lstStyle/>
-          <a:p>
-            <a:pPr algn="l" marL="177800" indent="-177800">
-              <a:spcAft>
-                <a:spcPts val="600"/>
-              </a:spcAft>
-              <a:buSzPct val="100000"/>
-              <a:buChar char="◆"/>
-            </a:pPr>
-            <a:r>
-              <a:rPr lang="en-US" sz="950" dirty="0">
-                <a:solidFill>
-                  <a:srgbClr val="262626"/>
-                </a:solidFill>
-                <a:latin typeface="Malgun Gothic" pitchFamily="34" charset="0"/>
-                <a:ea typeface="Malgun Gothic" pitchFamily="34" charset="-122"/>
-                <a:cs typeface="Malgun Gothic" pitchFamily="34" charset="-120"/>
-              </a:rPr>
-              <a:t>문맥 부재 — 재사용 예정 KV 오강등, 전역 최적 미달</a:t>
-            </a:r>
-            <a:endParaRPr lang="en-US" sz="950" dirty="0"/>
-          </a:p>
-          <a:p>
-            <a:pPr algn="l" marL="177800" indent="-177800">
-              <a:spcAft>
-                <a:spcPts val="600"/>
-              </a:spcAft>
-              <a:buSzPct val="100000"/>
-              <a:buChar char="◆"/>
-            </a:pPr>
-            <a:r>
-              <a:rPr lang="en-US" sz="950" dirty="0">
-                <a:solidFill>
-                  <a:srgbClr val="262626"/>
-                </a:solidFill>
-                <a:latin typeface="Malgun Gothic" pitchFamily="34" charset="0"/>
-                <a:ea typeface="Malgun Gothic" pitchFamily="34" charset="-122"/>
-                <a:cs typeface="Malgun Gothic" pitchFamily="34" charset="-120"/>
-              </a:rPr>
-              <a:t>품질 예산 로컬 집행 — 요청 간 품질 편차, joint orchestration 기여 소실</a:t>
-            </a:r>
-            <a:endParaRPr lang="en-US" sz="950" dirty="0"/>
-          </a:p>
-        </p:txBody>
-      </p:sp>
-      <p:sp>
-        <p:nvSpPr>
-          <p:cNvPr id="49" name="Shape 45"/>
-          <p:cNvSpPr/>
-          <p:nvPr/>
-        </p:nvSpPr>
-        <p:spPr>
-          <a:xfrm>
-            <a:off x="320040" y="5596128"/>
-            <a:ext cx="960120" cy="640080"/>
-          </a:xfrm>
-          <a:prstGeom prst="rect">
-            <a:avLst/>
-          </a:prstGeom>
-          <a:solidFill>
-            <a:srgbClr val="1F3864"/>
-          </a:solidFill>
-          <a:ln w="9525">
-            <a:solidFill>
-              <a:srgbClr val="A6A6A6"/>
-            </a:solidFill>
-            <a:prstDash val="solid"/>
-          </a:ln>
-        </p:spPr>
-      </p:sp>
-      <p:sp>
-        <p:nvSpPr>
-          <p:cNvPr id="50" name="Text 46"/>
-          <p:cNvSpPr/>
-          <p:nvPr/>
-        </p:nvSpPr>
-        <p:spPr>
-          <a:xfrm>
-            <a:off x="320040" y="5596128"/>
-            <a:ext cx="960120" cy="640080"/>
-          </a:xfrm>
-          <a:prstGeom prst="rect">
-            <a:avLst/>
-          </a:prstGeom>
-          <a:noFill/>
-          <a:ln/>
-        </p:spPr>
-        <p:txBody>
-          <a:bodyPr wrap="square" lIns="0" tIns="0" rIns="0" bIns="0" rtlCol="0" anchor="ctr"/>
-          <a:lstStyle/>
-          <a:p>
-            <a:pPr algn="ctr" indent="0" marL="0">
-              <a:buNone/>
-            </a:pPr>
-            <a:r>
-              <a:rPr lang="en-US" sz="1050" b="1" dirty="0">
-                <a:solidFill>
-                  <a:srgbClr val="FFFFFF"/>
-                </a:solidFill>
-                <a:latin typeface="Malgun Gothic" pitchFamily="34" charset="0"/>
-                <a:ea typeface="Malgun Gothic" pitchFamily="34" charset="-122"/>
-                <a:cs typeface="Malgun Gothic" pitchFamily="34" charset="-120"/>
-              </a:rPr>
-              <a:t>Trade-off</a:t>
-            </a:r>
-            <a:endParaRPr lang="en-US" sz="1050" dirty="0"/>
-          </a:p>
-          <a:p>
-            <a:pPr algn="ctr" indent="0" marL="0">
-              <a:buNone/>
-            </a:pPr>
-            <a:r>
-              <a:rPr lang="en-US" sz="1050" b="1" dirty="0">
-                <a:solidFill>
-                  <a:srgbClr val="FFFFFF"/>
-                </a:solidFill>
-                <a:latin typeface="Malgun Gothic" pitchFamily="34" charset="0"/>
-                <a:ea typeface="Malgun Gothic" pitchFamily="34" charset="-122"/>
-                <a:cs typeface="Malgun Gothic" pitchFamily="34" charset="-120"/>
-              </a:rPr>
-              <a:t>(QA 평가)</a:t>
-            </a:r>
-            <a:endParaRPr lang="en-US" sz="1050" dirty="0"/>
-          </a:p>
-        </p:txBody>
-      </p:sp>
-      <p:sp>
-        <p:nvSpPr>
-          <p:cNvPr id="51" name="Shape 47"/>
-          <p:cNvSpPr/>
-          <p:nvPr/>
-        </p:nvSpPr>
-        <p:spPr>
-          <a:xfrm>
-            <a:off x="1280160" y="5596128"/>
-            <a:ext cx="5295748" cy="640080"/>
-          </a:xfrm>
-          <a:prstGeom prst="rect">
-            <a:avLst/>
-          </a:prstGeom>
-          <a:solidFill>
-            <a:srgbClr val="FFFFFF"/>
-          </a:solidFill>
-          <a:ln w="9525">
-            <a:solidFill>
-              <a:srgbClr val="A6A6A6"/>
-            </a:solidFill>
-            <a:prstDash val="solid"/>
-          </a:ln>
-        </p:spPr>
-      </p:sp>
-      <p:sp>
-        <p:nvSpPr>
-          <p:cNvPr id="52" name="Text 48"/>
-          <p:cNvSpPr/>
-          <p:nvPr/>
-        </p:nvSpPr>
-        <p:spPr>
-          <a:xfrm>
-            <a:off x="1371600" y="5641848"/>
-            <a:ext cx="5112868" cy="548640"/>
-          </a:xfrm>
-          <a:prstGeom prst="rect">
-            <a:avLst/>
-          </a:prstGeom>
-          <a:noFill/>
-          <a:ln/>
-        </p:spPr>
-        <p:txBody>
-          <a:bodyPr wrap="square" lIns="0" tIns="0" rIns="0" bIns="0" rtlCol="0" anchor="t"/>
-          <a:lstStyle/>
-          <a:p>
-            <a:pPr algn="l" marL="177800" indent="-177800">
-              <a:spcAft>
-                <a:spcPts val="600"/>
-              </a:spcAft>
-              <a:buSzPct val="100000"/>
-              <a:buChar char="◆"/>
-            </a:pPr>
-            <a:r>
-              <a:rPr lang="en-US" sz="950" b="1" dirty="0">
-                <a:solidFill>
-                  <a:srgbClr val="B3402A"/>
-                </a:solidFill>
-                <a:latin typeface="Malgun Gothic" pitchFamily="34" charset="0"/>
-                <a:ea typeface="Malgun Gothic" pitchFamily="34" charset="-122"/>
-                <a:cs typeface="Malgun Gothic" pitchFamily="34" charset="-120"/>
-              </a:rPr>
-              <a:t>QA1 ★★☆</a:t>
-            </a:r>
-            <a:pPr algn="l" indent="0" marL="0">
-              <a:spcAft>
-                <a:spcPts val="600"/>
-              </a:spcAft>
-              <a:buNone/>
-            </a:pPr>
-            <a:r>
-              <a:rPr lang="en-US" sz="950" dirty="0">
-                <a:solidFill>
-                  <a:srgbClr val="262626"/>
-                </a:solidFill>
-                <a:latin typeface="Malgun Gothic" pitchFamily="34" charset="0"/>
-                <a:ea typeface="Malgun Gothic" pitchFamily="34" charset="-122"/>
-                <a:cs typeface="Malgun Gothic" pitchFamily="34" charset="-120"/>
-              </a:rPr>
-              <a:t> · </a:t>
-            </a:r>
-            <a:pPr algn="l" indent="0" marL="0">
-              <a:spcAft>
-                <a:spcPts val="600"/>
-              </a:spcAft>
-              <a:buNone/>
-            </a:pPr>
-            <a:r>
-              <a:rPr lang="en-US" sz="950" b="1" dirty="0">
-                <a:solidFill>
-                  <a:srgbClr val="1B7A4B"/>
-                </a:solidFill>
-                <a:latin typeface="Malgun Gothic" pitchFamily="34" charset="0"/>
-                <a:ea typeface="Malgun Gothic" pitchFamily="34" charset="-122"/>
-                <a:cs typeface="Malgun Gothic" pitchFamily="34" charset="-120"/>
-              </a:rPr>
-              <a:t>QA2 ★★★</a:t>
-            </a:r>
-            <a:pPr algn="l" indent="0" marL="0">
-              <a:spcAft>
-                <a:spcPts val="600"/>
-              </a:spcAft>
-              <a:buNone/>
-            </a:pPr>
-            <a:r>
-              <a:rPr lang="en-US" sz="950" dirty="0">
-                <a:solidFill>
-                  <a:srgbClr val="262626"/>
-                </a:solidFill>
-                <a:latin typeface="Malgun Gothic" pitchFamily="34" charset="0"/>
-                <a:ea typeface="Malgun Gothic" pitchFamily="34" charset="-122"/>
-                <a:cs typeface="Malgun Gothic" pitchFamily="34" charset="-120"/>
-              </a:rPr>
-              <a:t> · </a:t>
-            </a:r>
-            <a:pPr algn="l" indent="0" marL="0">
-              <a:spcAft>
-                <a:spcPts val="600"/>
-              </a:spcAft>
-              <a:buNone/>
-            </a:pPr>
-            <a:r>
-              <a:rPr lang="en-US" sz="950" b="1" dirty="0">
-                <a:solidFill>
-                  <a:srgbClr val="1B7A4B"/>
-                </a:solidFill>
-                <a:latin typeface="Malgun Gothic" pitchFamily="34" charset="0"/>
-                <a:ea typeface="Malgun Gothic" pitchFamily="34" charset="-122"/>
-                <a:cs typeface="Malgun Gothic" pitchFamily="34" charset="-120"/>
-              </a:rPr>
-              <a:t>QA3 ★★★</a:t>
-            </a:r>
-            <a:pPr algn="l" indent="0" marL="0">
-              <a:spcAft>
-                <a:spcPts val="600"/>
-              </a:spcAft>
-              <a:buNone/>
-            </a:pPr>
-            <a:r>
-              <a:rPr lang="en-US" sz="950" dirty="0">
-                <a:solidFill>
-                  <a:srgbClr val="262626"/>
-                </a:solidFill>
-                <a:latin typeface="Malgun Gothic" pitchFamily="34" charset="0"/>
-                <a:ea typeface="Malgun Gothic" pitchFamily="34" charset="-122"/>
-                <a:cs typeface="Malgun Gothic" pitchFamily="34" charset="-120"/>
-              </a:rPr>
-              <a:t> · </a:t>
-            </a:r>
-            <a:pPr algn="l" indent="0" marL="0">
-              <a:spcAft>
-                <a:spcPts val="600"/>
-              </a:spcAft>
-              <a:buNone/>
-            </a:pPr>
-            <a:r>
-              <a:rPr lang="en-US" sz="950" b="1" dirty="0">
-                <a:solidFill>
-                  <a:srgbClr val="B3402A"/>
-                </a:solidFill>
-                <a:latin typeface="Malgun Gothic" pitchFamily="34" charset="0"/>
-                <a:ea typeface="Malgun Gothic" pitchFamily="34" charset="-122"/>
-                <a:cs typeface="Malgun Gothic" pitchFamily="34" charset="-120"/>
-              </a:rPr>
-              <a:t>QA4 ★★☆</a:t>
-            </a:r>
-            <a:pPr algn="l" indent="0" marL="0">
-              <a:spcAft>
-                <a:spcPts val="600"/>
-              </a:spcAft>
-              <a:buNone/>
-            </a:pPr>
-            <a:r>
-              <a:rPr lang="en-US" sz="950" dirty="0">
-                <a:solidFill>
-                  <a:srgbClr val="262626"/>
-                </a:solidFill>
-                <a:latin typeface="Malgun Gothic" pitchFamily="34" charset="0"/>
-                <a:ea typeface="Malgun Gothic" pitchFamily="34" charset="-122"/>
-                <a:cs typeface="Malgun Gothic" pitchFamily="34" charset="-120"/>
-              </a:rPr>
-              <a:t> · </a:t>
-            </a:r>
-            <a:pPr algn="l" indent="0" marL="0">
-              <a:spcAft>
-                <a:spcPts val="600"/>
-              </a:spcAft>
-              <a:buNone/>
-            </a:pPr>
-            <a:r>
-              <a:rPr lang="en-US" sz="950" b="1" dirty="0">
-                <a:solidFill>
-                  <a:srgbClr val="B3402A"/>
-                </a:solidFill>
-                <a:latin typeface="Malgun Gothic" pitchFamily="34" charset="0"/>
-                <a:ea typeface="Malgun Gothic" pitchFamily="34" charset="-122"/>
-                <a:cs typeface="Malgun Gothic" pitchFamily="34" charset="-120"/>
-              </a:rPr>
-              <a:t>QA5 ★★☆</a:t>
-            </a:r>
-            <a:endParaRPr lang="en-US" sz="950" dirty="0"/>
-          </a:p>
-        </p:txBody>
-      </p:sp>
-      <p:sp>
-        <p:nvSpPr>
-          <p:cNvPr id="53" name="Shape 49"/>
-          <p:cNvSpPr/>
-          <p:nvPr/>
-        </p:nvSpPr>
-        <p:spPr>
-          <a:xfrm>
-            <a:off x="6575908" y="5596128"/>
-            <a:ext cx="5295748" cy="640080"/>
-          </a:xfrm>
-          <a:prstGeom prst="rect">
-            <a:avLst/>
-          </a:prstGeom>
-          <a:solidFill>
-            <a:srgbClr val="FFFFFF"/>
-          </a:solidFill>
-          <a:ln w="9525">
-            <a:solidFill>
-              <a:srgbClr val="A6A6A6"/>
-            </a:solidFill>
-            <a:prstDash val="solid"/>
-          </a:ln>
-        </p:spPr>
-      </p:sp>
-      <p:sp>
-        <p:nvSpPr>
-          <p:cNvPr id="54" name="Text 50"/>
-          <p:cNvSpPr/>
-          <p:nvPr/>
-        </p:nvSpPr>
-        <p:spPr>
-          <a:xfrm>
-            <a:off x="6667348" y="5641848"/>
-            <a:ext cx="5112868" cy="548640"/>
-          </a:xfrm>
-          <a:prstGeom prst="rect">
-            <a:avLst/>
-          </a:prstGeom>
-          <a:noFill/>
-          <a:ln/>
-        </p:spPr>
-        <p:txBody>
-          <a:bodyPr wrap="square" lIns="0" tIns="0" rIns="0" bIns="0" rtlCol="0" anchor="t"/>
-          <a:lstStyle/>
-          <a:p>
-            <a:pPr algn="l" marL="177800" indent="-177800">
-              <a:spcAft>
-                <a:spcPts val="600"/>
-              </a:spcAft>
-              <a:buSzPct val="100000"/>
-              <a:buChar char="◆"/>
-            </a:pPr>
-            <a:r>
-              <a:rPr lang="en-US" sz="950" b="1" dirty="0">
-                <a:solidFill>
-                  <a:srgbClr val="1B7A4B"/>
-                </a:solidFill>
-                <a:latin typeface="Malgun Gothic" pitchFamily="34" charset="0"/>
-                <a:ea typeface="Malgun Gothic" pitchFamily="34" charset="-122"/>
-                <a:cs typeface="Malgun Gothic" pitchFamily="34" charset="-120"/>
-              </a:rPr>
-              <a:t>QA1 ★★★</a:t>
-            </a:r>
-            <a:pPr algn="l" indent="0" marL="0">
-              <a:spcAft>
-                <a:spcPts val="600"/>
-              </a:spcAft>
-              <a:buNone/>
-            </a:pPr>
-            <a:r>
-              <a:rPr lang="en-US" sz="950" dirty="0">
-                <a:solidFill>
-                  <a:srgbClr val="262626"/>
-                </a:solidFill>
-                <a:latin typeface="Malgun Gothic" pitchFamily="34" charset="0"/>
-                <a:ea typeface="Malgun Gothic" pitchFamily="34" charset="-122"/>
-                <a:cs typeface="Malgun Gothic" pitchFamily="34" charset="-120"/>
-              </a:rPr>
-              <a:t> · </a:t>
-            </a:r>
-            <a:pPr algn="l" indent="0" marL="0">
-              <a:spcAft>
-                <a:spcPts val="600"/>
-              </a:spcAft>
-              <a:buNone/>
-            </a:pPr>
-            <a:r>
-              <a:rPr lang="en-US" sz="950" b="1" dirty="0">
-                <a:solidFill>
-                  <a:srgbClr val="B3402A"/>
-                </a:solidFill>
-                <a:latin typeface="Malgun Gothic" pitchFamily="34" charset="0"/>
-                <a:ea typeface="Malgun Gothic" pitchFamily="34" charset="-122"/>
-                <a:cs typeface="Malgun Gothic" pitchFamily="34" charset="-120"/>
-              </a:rPr>
-              <a:t>QA2 ★★☆</a:t>
-            </a:r>
-            <a:pPr algn="l" indent="0" marL="0">
-              <a:spcAft>
-                <a:spcPts val="600"/>
-              </a:spcAft>
-              <a:buNone/>
-            </a:pPr>
-            <a:r>
-              <a:rPr lang="en-US" sz="950" dirty="0">
-                <a:solidFill>
-                  <a:srgbClr val="262626"/>
-                </a:solidFill>
-                <a:latin typeface="Malgun Gothic" pitchFamily="34" charset="0"/>
-                <a:ea typeface="Malgun Gothic" pitchFamily="34" charset="-122"/>
-                <a:cs typeface="Malgun Gothic" pitchFamily="34" charset="-120"/>
-              </a:rPr>
-              <a:t> · </a:t>
-            </a:r>
-            <a:pPr algn="l" indent="0" marL="0">
-              <a:spcAft>
-                <a:spcPts val="600"/>
-              </a:spcAft>
-              <a:buNone/>
-            </a:pPr>
-            <a:r>
-              <a:rPr lang="en-US" sz="950" b="1" dirty="0">
-                <a:solidFill>
-                  <a:srgbClr val="B3402A"/>
-                </a:solidFill>
-                <a:latin typeface="Malgun Gothic" pitchFamily="34" charset="0"/>
-                <a:ea typeface="Malgun Gothic" pitchFamily="34" charset="-122"/>
-                <a:cs typeface="Malgun Gothic" pitchFamily="34" charset="-120"/>
-              </a:rPr>
-              <a:t>QA3 ★★☆</a:t>
-            </a:r>
-            <a:pPr algn="l" indent="0" marL="0">
-              <a:spcAft>
-                <a:spcPts val="600"/>
-              </a:spcAft>
-              <a:buNone/>
-            </a:pPr>
-            <a:r>
-              <a:rPr lang="en-US" sz="950" dirty="0">
-                <a:solidFill>
-                  <a:srgbClr val="262626"/>
-                </a:solidFill>
-                <a:latin typeface="Malgun Gothic" pitchFamily="34" charset="0"/>
-                <a:ea typeface="Malgun Gothic" pitchFamily="34" charset="-122"/>
-                <a:cs typeface="Malgun Gothic" pitchFamily="34" charset="-120"/>
-              </a:rPr>
-              <a:t> · </a:t>
-            </a:r>
-            <a:pPr algn="l" indent="0" marL="0">
-              <a:spcAft>
-                <a:spcPts val="600"/>
-              </a:spcAft>
-              <a:buNone/>
-            </a:pPr>
-            <a:r>
-              <a:rPr lang="en-US" sz="950" b="1" dirty="0">
-                <a:solidFill>
-                  <a:srgbClr val="1B7A4B"/>
-                </a:solidFill>
-                <a:latin typeface="Malgun Gothic" pitchFamily="34" charset="0"/>
-                <a:ea typeface="Malgun Gothic" pitchFamily="34" charset="-122"/>
-                <a:cs typeface="Malgun Gothic" pitchFamily="34" charset="-120"/>
-              </a:rPr>
-              <a:t>QA4 ★★★</a:t>
-            </a:r>
-            <a:pPr algn="l" indent="0" marL="0">
-              <a:spcAft>
-                <a:spcPts val="600"/>
-              </a:spcAft>
-              <a:buNone/>
-            </a:pPr>
-            <a:r>
-              <a:rPr lang="en-US" sz="950" dirty="0">
-                <a:solidFill>
-                  <a:srgbClr val="262626"/>
-                </a:solidFill>
-                <a:latin typeface="Malgun Gothic" pitchFamily="34" charset="0"/>
-                <a:ea typeface="Malgun Gothic" pitchFamily="34" charset="-122"/>
-                <a:cs typeface="Malgun Gothic" pitchFamily="34" charset="-120"/>
-              </a:rPr>
-              <a:t> · </a:t>
-            </a:r>
-            <a:pPr algn="l" indent="0" marL="0">
-              <a:spcAft>
-                <a:spcPts val="600"/>
-              </a:spcAft>
-              <a:buNone/>
-            </a:pPr>
-            <a:r>
-              <a:rPr lang="en-US" sz="950" b="1" dirty="0">
-                <a:solidFill>
-                  <a:srgbClr val="1B7A4B"/>
-                </a:solidFill>
-                <a:latin typeface="Malgun Gothic" pitchFamily="34" charset="0"/>
-                <a:ea typeface="Malgun Gothic" pitchFamily="34" charset="-122"/>
-                <a:cs typeface="Malgun Gothic" pitchFamily="34" charset="-120"/>
-              </a:rPr>
-              <a:t>QA5 ★★★</a:t>
-            </a:r>
-            <a:endParaRPr lang="en-US" sz="950" dirty="0"/>
-          </a:p>
-        </p:txBody>
-      </p:sp>
+      <p:graphicFrame>
+        <p:nvGraphicFramePr>
+          <p:cNvPr id="5" name="Table 0"/>
+          <p:cNvGraphicFramePr>
+            <a:graphicFrameLocks noGrp="1"/>
+          </p:cNvGraphicFramePr>
+          <p:nvPr>
+            <p:extLst>
+              <p:ext uri="{D42A27DB-BD31-4B8C-83A1-F6EECF244321}">
+                <p14:modId xmlns:p14="http://schemas.microsoft.com/office/powerpoint/2010/main" val="1579011935"/>
+              </p:ext>
+            </p:extLst>
+          </p:nvPr>
+        </p:nvGraphicFramePr>
+        <p:xfrm>
+          <a:off x="320040" y="4965192"/>
+          <a:ext cx="11551615" cy="914400"/>
+        </p:xfrm>
+        <a:graphic>
+          <a:graphicData uri="http://schemas.openxmlformats.org/drawingml/2006/table">
+            <a:tbl>
+              <a:tblPr/>
+              <a:tblGrid>
+                <a:gridCol w="914400"/>
+                <a:gridCol w="5318608"/>
+                <a:gridCol w="5318608"/>
+              </a:tblGrid>
+              <a:tr h="219456">
+                <a:tc>
+                  <a:txBody>
+                    <a:bodyPr/>
+                    <a:lstStyle/>
+                    <a:p>
+                      <a:pPr algn="ctr" indent="0" marL="0">
+                        <a:buNone/>
+                      </a:pPr>
+                      <a:r>
+                        <a:rPr lang="en-US" sz="900" b="1" dirty="0">
+                          <a:solidFill>
+                            <a:srgbClr val="FFFFFF"/>
+                          </a:solidFill>
+                          <a:latin typeface="Malgun Gothic" pitchFamily="34" charset="0"/>
+                          <a:ea typeface="Malgun Gothic" pitchFamily="34" charset="-122"/>
+                          <a:cs typeface="Malgun Gothic" pitchFamily="34" charset="-120"/>
+                        </a:rPr>
+                        <a:t>구분</a:t>
+                      </a:r>
+                      <a:endParaRPr lang="en-US" sz="900" dirty="0">
+                        <a:latin typeface="Malgun Gothic" charset="0"/>
+                        <a:ea typeface="Malgun Gothic" charset="0"/>
+                        <a:cs typeface="Malgun Gothic" charset="0"/>
+                      </a:endParaRPr>
+                    </a:p>
+                  </a:txBody>
+                  <a:tcPr marL="91440" marR="91440" marT="45720" marB="45720" anchor="ctr">
+                    <a:lnL w="9525" cap="flat" cmpd="sng" algn="ctr">
+                      <a:solidFill>
+                        <a:srgbClr val="A6A6A6"/>
+                      </a:solidFill>
+                      <a:prstDash val="solid"/>
+                      <a:round/>
+                      <a:headEnd type="none" w="med" len="med"/>
+                      <a:tailEnd type="none" w="med" len="med"/>
+                    </a:lnL>
+                    <a:lnR w="9525" cap="flat" cmpd="sng" algn="ctr">
+                      <a:solidFill>
+                        <a:srgbClr val="A6A6A6"/>
+                      </a:solidFill>
+                      <a:prstDash val="solid"/>
+                      <a:round/>
+                      <a:headEnd type="none" w="med" len="med"/>
+                      <a:tailEnd type="none" w="med" len="med"/>
+                    </a:lnR>
+                    <a:lnT w="9525" cap="flat" cmpd="sng" algn="ctr">
+                      <a:solidFill>
+                        <a:srgbClr val="A6A6A6"/>
+                      </a:solidFill>
+                      <a:prstDash val="solid"/>
+                      <a:round/>
+                      <a:headEnd type="none" w="med" len="med"/>
+                      <a:tailEnd type="none" w="med" len="med"/>
+                    </a:lnT>
+                    <a:lnB w="9525" cap="flat" cmpd="sng" algn="ctr">
+                      <a:solidFill>
+                        <a:srgbClr val="A6A6A6"/>
+                      </a:solidFill>
+                      <a:prstDash val="solid"/>
+                      <a:round/>
+                      <a:headEnd type="none" w="med" len="med"/>
+                      <a:tailEnd type="none" w="med" len="med"/>
+                    </a:lnB>
+                    <a:solidFill>
+                      <a:srgbClr val="3C5F2C"/>
+                    </a:solidFill>
+                  </a:tcPr>
+                </a:tc>
+                <a:tc>
+                  <a:txBody>
+                    <a:bodyPr/>
+                    <a:lstStyle/>
+                    <a:p>
+                      <a:pPr algn="ctr" indent="0" marL="0">
+                        <a:buNone/>
+                      </a:pPr>
+                      <a:r>
+                        <a:rPr lang="en-US" sz="900" b="1" dirty="0">
+                          <a:solidFill>
+                            <a:srgbClr val="FFFFFF"/>
+                          </a:solidFill>
+                          <a:latin typeface="Malgun Gothic" pitchFamily="34" charset="0"/>
+                          <a:ea typeface="Malgun Gothic" pitchFamily="34" charset="-122"/>
+                          <a:cs typeface="Malgun Gothic" pitchFamily="34" charset="-120"/>
+                        </a:rPr>
+                        <a:t>후보 1 — Orchestration 중앙 정책</a:t>
+                      </a:r>
+                      <a:endParaRPr lang="en-US" sz="900" dirty="0">
+                        <a:latin typeface="Malgun Gothic" charset="0"/>
+                        <a:ea typeface="Malgun Gothic" charset="0"/>
+                        <a:cs typeface="Malgun Gothic" charset="0"/>
+                      </a:endParaRPr>
+                    </a:p>
+                  </a:txBody>
+                  <a:tcPr marL="91440" marR="91440" marT="45720" marB="45720" anchor="ctr">
+                    <a:lnL w="9525" cap="flat" cmpd="sng" algn="ctr">
+                      <a:solidFill>
+                        <a:srgbClr val="A6A6A6"/>
+                      </a:solidFill>
+                      <a:prstDash val="solid"/>
+                      <a:round/>
+                      <a:headEnd type="none" w="med" len="med"/>
+                      <a:tailEnd type="none" w="med" len="med"/>
+                    </a:lnL>
+                    <a:lnR w="9525" cap="flat" cmpd="sng" algn="ctr">
+                      <a:solidFill>
+                        <a:srgbClr val="A6A6A6"/>
+                      </a:solidFill>
+                      <a:prstDash val="solid"/>
+                      <a:round/>
+                      <a:headEnd type="none" w="med" len="med"/>
+                      <a:tailEnd type="none" w="med" len="med"/>
+                    </a:lnR>
+                    <a:lnT w="9525" cap="flat" cmpd="sng" algn="ctr">
+                      <a:solidFill>
+                        <a:srgbClr val="A6A6A6"/>
+                      </a:solidFill>
+                      <a:prstDash val="solid"/>
+                      <a:round/>
+                      <a:headEnd type="none" w="med" len="med"/>
+                      <a:tailEnd type="none" w="med" len="med"/>
+                    </a:lnT>
+                    <a:lnB w="9525" cap="flat" cmpd="sng" algn="ctr">
+                      <a:solidFill>
+                        <a:srgbClr val="A6A6A6"/>
+                      </a:solidFill>
+                      <a:prstDash val="solid"/>
+                      <a:round/>
+                      <a:headEnd type="none" w="med" len="med"/>
+                      <a:tailEnd type="none" w="med" len="med"/>
+                    </a:lnB>
+                    <a:solidFill>
+                      <a:srgbClr val="3C5F2C"/>
+                    </a:solidFill>
+                  </a:tcPr>
+                </a:tc>
+                <a:tc>
+                  <a:txBody>
+                    <a:bodyPr/>
+                    <a:lstStyle/>
+                    <a:p>
+                      <a:pPr algn="ctr" indent="0" marL="0">
+                        <a:buNone/>
+                      </a:pPr>
+                      <a:r>
+                        <a:rPr lang="en-US" sz="900" b="1" dirty="0">
+                          <a:solidFill>
+                            <a:srgbClr val="FFFFFF"/>
+                          </a:solidFill>
+                          <a:latin typeface="Malgun Gothic" pitchFamily="34" charset="0"/>
+                          <a:ea typeface="Malgun Gothic" pitchFamily="34" charset="-122"/>
+                          <a:cs typeface="Malgun Gothic" pitchFamily="34" charset="-120"/>
+                        </a:rPr>
+                        <a:t>후보 2 — Memory Engine 자율 (hint)</a:t>
+                      </a:r>
+                      <a:endParaRPr lang="en-US" sz="900" dirty="0">
+                        <a:latin typeface="Malgun Gothic" charset="0"/>
+                        <a:ea typeface="Malgun Gothic" charset="0"/>
+                        <a:cs typeface="Malgun Gothic" charset="0"/>
+                      </a:endParaRPr>
+                    </a:p>
+                  </a:txBody>
+                  <a:tcPr marL="91440" marR="91440" marT="45720" marB="45720" anchor="ctr">
+                    <a:lnL w="9525" cap="flat" cmpd="sng" algn="ctr">
+                      <a:solidFill>
+                        <a:srgbClr val="A6A6A6"/>
+                      </a:solidFill>
+                      <a:prstDash val="solid"/>
+                      <a:round/>
+                      <a:headEnd type="none" w="med" len="med"/>
+                      <a:tailEnd type="none" w="med" len="med"/>
+                    </a:lnL>
+                    <a:lnR w="9525" cap="flat" cmpd="sng" algn="ctr">
+                      <a:solidFill>
+                        <a:srgbClr val="A6A6A6"/>
+                      </a:solidFill>
+                      <a:prstDash val="solid"/>
+                      <a:round/>
+                      <a:headEnd type="none" w="med" len="med"/>
+                      <a:tailEnd type="none" w="med" len="med"/>
+                    </a:lnR>
+                    <a:lnT w="9525" cap="flat" cmpd="sng" algn="ctr">
+                      <a:solidFill>
+                        <a:srgbClr val="A6A6A6"/>
+                      </a:solidFill>
+                      <a:prstDash val="solid"/>
+                      <a:round/>
+                      <a:headEnd type="none" w="med" len="med"/>
+                      <a:tailEnd type="none" w="med" len="med"/>
+                    </a:lnT>
+                    <a:lnB w="9525" cap="flat" cmpd="sng" algn="ctr">
+                      <a:solidFill>
+                        <a:srgbClr val="A6A6A6"/>
+                      </a:solidFill>
+                      <a:prstDash val="solid"/>
+                      <a:round/>
+                      <a:headEnd type="none" w="med" len="med"/>
+                      <a:tailEnd type="none" w="med" len="med"/>
+                    </a:lnB>
+                    <a:solidFill>
+                      <a:srgbClr val="3C5F2C"/>
+                    </a:solidFill>
+                  </a:tcPr>
+                </a:tc>
+              </a:tr>
+              <a:tr h="274320">
+                <a:tc>
+                  <a:txBody>
+                    <a:bodyPr/>
+                    <a:lstStyle/>
+                    <a:p>
+                      <a:pPr algn="ctr" indent="0" marL="0">
+                        <a:buNone/>
+                      </a:pPr>
+                      <a:r>
+                        <a:rPr lang="en-US" sz="850" b="1" dirty="0">
+                          <a:solidFill>
+                            <a:srgbClr val="FFFFFF"/>
+                          </a:solidFill>
+                          <a:latin typeface="Malgun Gothic" pitchFamily="34" charset="0"/>
+                          <a:ea typeface="Malgun Gothic" pitchFamily="34" charset="-122"/>
+                          <a:cs typeface="Malgun Gothic" pitchFamily="34" charset="-120"/>
+                        </a:rPr>
+                        <a:t>특징</a:t>
+                      </a:r>
+                      <a:endParaRPr lang="en-US" sz="850" dirty="0">
+                        <a:latin typeface="Malgun Gothic" charset="0"/>
+                        <a:ea typeface="Malgun Gothic" charset="0"/>
+                        <a:cs typeface="Malgun Gothic" charset="0"/>
+                      </a:endParaRPr>
+                    </a:p>
+                  </a:txBody>
+                  <a:tcPr marL="91440" marR="91440" marT="45720" marB="45720" anchor="ctr">
+                    <a:lnL w="9525" cap="flat" cmpd="sng" algn="ctr">
+                      <a:solidFill>
+                        <a:srgbClr val="A6A6A6"/>
+                      </a:solidFill>
+                      <a:prstDash val="solid"/>
+                      <a:round/>
+                      <a:headEnd type="none" w="med" len="med"/>
+                      <a:tailEnd type="none" w="med" len="med"/>
+                    </a:lnL>
+                    <a:lnR w="9525" cap="flat" cmpd="sng" algn="ctr">
+                      <a:solidFill>
+                        <a:srgbClr val="A6A6A6"/>
+                      </a:solidFill>
+                      <a:prstDash val="solid"/>
+                      <a:round/>
+                      <a:headEnd type="none" w="med" len="med"/>
+                      <a:tailEnd type="none" w="med" len="med"/>
+                    </a:lnR>
+                    <a:lnT w="9525" cap="flat" cmpd="sng" algn="ctr">
+                      <a:solidFill>
+                        <a:srgbClr val="A6A6A6"/>
+                      </a:solidFill>
+                      <a:prstDash val="solid"/>
+                      <a:round/>
+                      <a:headEnd type="none" w="med" len="med"/>
+                      <a:tailEnd type="none" w="med" len="med"/>
+                    </a:lnT>
+                    <a:lnB w="9525" cap="flat" cmpd="sng" algn="ctr">
+                      <a:solidFill>
+                        <a:srgbClr val="A6A6A6"/>
+                      </a:solidFill>
+                      <a:prstDash val="solid"/>
+                      <a:round/>
+                      <a:headEnd type="none" w="med" len="med"/>
+                      <a:tailEnd type="none" w="med" len="med"/>
+                    </a:lnB>
+                    <a:solidFill>
+                      <a:srgbClr val="1F3864"/>
+                    </a:solidFill>
+                  </a:tcPr>
+                </a:tc>
+                <a:tc>
+                  <a:txBody>
+                    <a:bodyPr/>
+                    <a:lstStyle/>
+                    <a:p>
+                      <a:pPr algn="l" indent="0" marL="0">
+                        <a:buNone/>
+                      </a:pPr>
+                      <a:r>
+                        <a:rPr lang="en-US" sz="800" dirty="0">
+                          <a:solidFill>
+                            <a:srgbClr val="262626"/>
+                          </a:solidFill>
+                          <a:latin typeface="Malgun Gothic" pitchFamily="34" charset="0"/>
+                          <a:ea typeface="Malgun Gothic" pitchFamily="34" charset="-122"/>
+                          <a:cs typeface="Malgun Gothic" pitchFamily="34" charset="-120"/>
+                        </a:rPr>
+                        <a:t>Scheduling에 Placement·Compression Policy 신설 — Router가 목표 tier·압축·재사용 지시, Memory Engine은 집행</a:t>
+                      </a:r>
+                      <a:endParaRPr lang="en-US" sz="800" dirty="0">
+                        <a:latin typeface="Malgun Gothic" charset="0"/>
+                        <a:ea typeface="Malgun Gothic" charset="0"/>
+                        <a:cs typeface="Malgun Gothic" charset="0"/>
+                      </a:endParaRPr>
+                    </a:p>
+                  </a:txBody>
+                  <a:tcPr marL="38100" marR="38100" marT="12700" marB="12700" anchor="ctr">
+                    <a:lnL w="9525" cap="flat" cmpd="sng" algn="ctr">
+                      <a:solidFill>
+                        <a:srgbClr val="A6A6A6"/>
+                      </a:solidFill>
+                      <a:prstDash val="solid"/>
+                      <a:round/>
+                      <a:headEnd type="none" w="med" len="med"/>
+                      <a:tailEnd type="none" w="med" len="med"/>
+                    </a:lnL>
+                    <a:lnR w="9525" cap="flat" cmpd="sng" algn="ctr">
+                      <a:solidFill>
+                        <a:srgbClr val="A6A6A6"/>
+                      </a:solidFill>
+                      <a:prstDash val="solid"/>
+                      <a:round/>
+                      <a:headEnd type="none" w="med" len="med"/>
+                      <a:tailEnd type="none" w="med" len="med"/>
+                    </a:lnR>
+                    <a:lnT w="9525" cap="flat" cmpd="sng" algn="ctr">
+                      <a:solidFill>
+                        <a:srgbClr val="A6A6A6"/>
+                      </a:solidFill>
+                      <a:prstDash val="solid"/>
+                      <a:round/>
+                      <a:headEnd type="none" w="med" len="med"/>
+                      <a:tailEnd type="none" w="med" len="med"/>
+                    </a:lnT>
+                    <a:lnB w="9525" cap="flat" cmpd="sng" algn="ctr">
+                      <a:solidFill>
+                        <a:srgbClr val="A6A6A6"/>
+                      </a:solidFill>
+                      <a:prstDash val="solid"/>
+                      <a:round/>
+                      <a:headEnd type="none" w="med" len="med"/>
+                      <a:tailEnd type="none" w="med" len="med"/>
+                    </a:lnB>
+                  </a:tcPr>
+                </a:tc>
+                <a:tc>
+                  <a:txBody>
+                    <a:bodyPr/>
+                    <a:lstStyle/>
+                    <a:p>
+                      <a:pPr algn="l" indent="0" marL="0">
+                        <a:buNone/>
+                      </a:pPr>
+                      <a:r>
+                        <a:rPr lang="en-US" sz="800" dirty="0">
+                          <a:solidFill>
+                            <a:srgbClr val="262626"/>
+                          </a:solidFill>
+                          <a:latin typeface="Malgun Gothic" pitchFamily="34" charset="0"/>
+                          <a:ea typeface="Malgun Gothic" pitchFamily="34" charset="-122"/>
+                          <a:cs typeface="Malgun Gothic" pitchFamily="34" charset="-120"/>
+                        </a:rPr>
+                        <a:t>Cache Manager가 자체 정책(접근 온도·watermark) 내장 — Orchestration은 얇은 hint API만 (madvise 모델)</a:t>
+                      </a:r>
+                      <a:endParaRPr lang="en-US" sz="800" dirty="0">
+                        <a:latin typeface="Malgun Gothic" charset="0"/>
+                        <a:ea typeface="Malgun Gothic" charset="0"/>
+                        <a:cs typeface="Malgun Gothic" charset="0"/>
+                      </a:endParaRPr>
+                    </a:p>
+                  </a:txBody>
+                  <a:tcPr marL="38100" marR="38100" marT="12700" marB="12700" anchor="ctr">
+                    <a:lnL w="9525" cap="flat" cmpd="sng" algn="ctr">
+                      <a:solidFill>
+                        <a:srgbClr val="A6A6A6"/>
+                      </a:solidFill>
+                      <a:prstDash val="solid"/>
+                      <a:round/>
+                      <a:headEnd type="none" w="med" len="med"/>
+                      <a:tailEnd type="none" w="med" len="med"/>
+                    </a:lnL>
+                    <a:lnR w="9525" cap="flat" cmpd="sng" algn="ctr">
+                      <a:solidFill>
+                        <a:srgbClr val="A6A6A6"/>
+                      </a:solidFill>
+                      <a:prstDash val="solid"/>
+                      <a:round/>
+                      <a:headEnd type="none" w="med" len="med"/>
+                      <a:tailEnd type="none" w="med" len="med"/>
+                    </a:lnR>
+                    <a:lnT w="9525" cap="flat" cmpd="sng" algn="ctr">
+                      <a:solidFill>
+                        <a:srgbClr val="A6A6A6"/>
+                      </a:solidFill>
+                      <a:prstDash val="solid"/>
+                      <a:round/>
+                      <a:headEnd type="none" w="med" len="med"/>
+                      <a:tailEnd type="none" w="med" len="med"/>
+                    </a:lnT>
+                    <a:lnB w="9525" cap="flat" cmpd="sng" algn="ctr">
+                      <a:solidFill>
+                        <a:srgbClr val="A6A6A6"/>
+                      </a:solidFill>
+                      <a:prstDash val="solid"/>
+                      <a:round/>
+                      <a:headEnd type="none" w="med" len="med"/>
+                      <a:tailEnd type="none" w="med" len="med"/>
+                    </a:lnB>
+                  </a:tcPr>
+                </a:tc>
+              </a:tr>
+              <a:tr h="365760">
+                <a:tc>
+                  <a:txBody>
+                    <a:bodyPr/>
+                    <a:lstStyle/>
+                    <a:p>
+                      <a:pPr algn="ctr" indent="0" marL="0">
+                        <a:buNone/>
+                      </a:pPr>
+                      <a:r>
+                        <a:rPr lang="en-US" sz="850" b="1" dirty="0">
+                          <a:solidFill>
+                            <a:srgbClr val="FFFFFF"/>
+                          </a:solidFill>
+                          <a:latin typeface="Malgun Gothic" pitchFamily="34" charset="0"/>
+                          <a:ea typeface="Malgun Gothic" pitchFamily="34" charset="-122"/>
+                          <a:cs typeface="Malgun Gothic" pitchFamily="34" charset="-120"/>
+                        </a:rPr>
+                        <a:t>장점</a:t>
+                      </a:r>
+                      <a:endParaRPr lang="en-US" sz="850" dirty="0">
+                        <a:latin typeface="Malgun Gothic" charset="0"/>
+                        <a:ea typeface="Malgun Gothic" charset="0"/>
+                        <a:cs typeface="Malgun Gothic" charset="0"/>
+                      </a:endParaRPr>
+                    </a:p>
+                  </a:txBody>
+                  <a:tcPr marL="91440" marR="91440" marT="45720" marB="45720" anchor="ctr">
+                    <a:lnL w="9525" cap="flat" cmpd="sng" algn="ctr">
+                      <a:solidFill>
+                        <a:srgbClr val="A6A6A6"/>
+                      </a:solidFill>
+                      <a:prstDash val="solid"/>
+                      <a:round/>
+                      <a:headEnd type="none" w="med" len="med"/>
+                      <a:tailEnd type="none" w="med" len="med"/>
+                    </a:lnL>
+                    <a:lnR w="9525" cap="flat" cmpd="sng" algn="ctr">
+                      <a:solidFill>
+                        <a:srgbClr val="A6A6A6"/>
+                      </a:solidFill>
+                      <a:prstDash val="solid"/>
+                      <a:round/>
+                      <a:headEnd type="none" w="med" len="med"/>
+                      <a:tailEnd type="none" w="med" len="med"/>
+                    </a:lnR>
+                    <a:lnT w="9525" cap="flat" cmpd="sng" algn="ctr">
+                      <a:solidFill>
+                        <a:srgbClr val="A6A6A6"/>
+                      </a:solidFill>
+                      <a:prstDash val="solid"/>
+                      <a:round/>
+                      <a:headEnd type="none" w="med" len="med"/>
+                      <a:tailEnd type="none" w="med" len="med"/>
+                    </a:lnT>
+                    <a:lnB w="9525" cap="flat" cmpd="sng" algn="ctr">
+                      <a:solidFill>
+                        <a:srgbClr val="A6A6A6"/>
+                      </a:solidFill>
+                      <a:prstDash val="solid"/>
+                      <a:round/>
+                      <a:headEnd type="none" w="med" len="med"/>
+                      <a:tailEnd type="none" w="med" len="med"/>
+                    </a:lnB>
+                    <a:solidFill>
+                      <a:srgbClr val="1F3864"/>
+                    </a:solidFill>
+                  </a:tcPr>
+                </a:tc>
+                <a:tc>
+                  <a:txBody>
+                    <a:bodyPr/>
+                    <a:lstStyle/>
+                    <a:p>
+                      <a:pPr algn="l" indent="0" marL="0">
+                        <a:buNone/>
+                      </a:pPr>
+                      <a:r>
+                        <a:rPr lang="en-US" sz="800" dirty="0">
+                          <a:solidFill>
+                            <a:srgbClr val="262626"/>
+                          </a:solidFill>
+                          <a:latin typeface="Malgun Gothic" pitchFamily="34" charset="0"/>
+                          <a:ea typeface="Malgun Gothic" pitchFamily="34" charset="-122"/>
+                          <a:cs typeface="Malgun Gothic" pitchFamily="34" charset="-120"/>
+                        </a:rPr>
+                        <a:t>전역 최적화(quality-aware joint orch.)  ·  요청별 품질 예산 중앙 집행  ·  결정 로직 단일화·설명가능성</a:t>
+                      </a:r>
+                      <a:endParaRPr lang="en-US" sz="800" dirty="0">
+                        <a:latin typeface="Malgun Gothic" charset="0"/>
+                        <a:ea typeface="Malgun Gothic" charset="0"/>
+                        <a:cs typeface="Malgun Gothic" charset="0"/>
+                      </a:endParaRPr>
+                    </a:p>
+                  </a:txBody>
+                  <a:tcPr marL="38100" marR="38100" marT="12700" marB="12700" anchor="ctr">
+                    <a:lnL w="9525" cap="flat" cmpd="sng" algn="ctr">
+                      <a:solidFill>
+                        <a:srgbClr val="A6A6A6"/>
+                      </a:solidFill>
+                      <a:prstDash val="solid"/>
+                      <a:round/>
+                      <a:headEnd type="none" w="med" len="med"/>
+                      <a:tailEnd type="none" w="med" len="med"/>
+                    </a:lnL>
+                    <a:lnR w="9525" cap="flat" cmpd="sng" algn="ctr">
+                      <a:solidFill>
+                        <a:srgbClr val="A6A6A6"/>
+                      </a:solidFill>
+                      <a:prstDash val="solid"/>
+                      <a:round/>
+                      <a:headEnd type="none" w="med" len="med"/>
+                      <a:tailEnd type="none" w="med" len="med"/>
+                    </a:lnR>
+                    <a:lnT w="9525" cap="flat" cmpd="sng" algn="ctr">
+                      <a:solidFill>
+                        <a:srgbClr val="A6A6A6"/>
+                      </a:solidFill>
+                      <a:prstDash val="solid"/>
+                      <a:round/>
+                      <a:headEnd type="none" w="med" len="med"/>
+                      <a:tailEnd type="none" w="med" len="med"/>
+                    </a:lnT>
+                    <a:lnB w="9525" cap="flat" cmpd="sng" algn="ctr">
+                      <a:solidFill>
+                        <a:srgbClr val="A6A6A6"/>
+                      </a:solidFill>
+                      <a:prstDash val="solid"/>
+                      <a:round/>
+                      <a:headEnd type="none" w="med" len="med"/>
+                      <a:tailEnd type="none" w="med" len="med"/>
+                    </a:lnB>
+                  </a:tcPr>
+                </a:tc>
+                <a:tc>
+                  <a:txBody>
+                    <a:bodyPr/>
+                    <a:lstStyle/>
+                    <a:p>
+                      <a:pPr algn="l" indent="0" marL="0">
+                        <a:buNone/>
+                      </a:pPr>
+                      <a:r>
+                        <a:rPr lang="en-US" sz="800" dirty="0">
+                          <a:solidFill>
+                            <a:srgbClr val="262626"/>
+                          </a:solidFill>
+                          <a:latin typeface="Malgun Gothic" pitchFamily="34" charset="0"/>
+                          <a:ea typeface="Malgun Gothic" pitchFamily="34" charset="-122"/>
+                          <a:cs typeface="Malgun Gothic" pitchFamily="34" charset="-120"/>
+                        </a:rPr>
+                        <a:t>μs 즉시 반응 — 압박 스파이크 흡수  ·  얇은 인터페이스 — DP1 후보1과 정합  ·  Memory Engine 독립 이식성</a:t>
+                      </a:r>
+                      <a:endParaRPr lang="en-US" sz="800" dirty="0">
+                        <a:latin typeface="Malgun Gothic" charset="0"/>
+                        <a:ea typeface="Malgun Gothic" charset="0"/>
+                        <a:cs typeface="Malgun Gothic" charset="0"/>
+                      </a:endParaRPr>
+                    </a:p>
+                  </a:txBody>
+                  <a:tcPr marL="38100" marR="38100" marT="12700" marB="12700" anchor="ctr">
+                    <a:lnL w="9525" cap="flat" cmpd="sng" algn="ctr">
+                      <a:solidFill>
+                        <a:srgbClr val="A6A6A6"/>
+                      </a:solidFill>
+                      <a:prstDash val="solid"/>
+                      <a:round/>
+                      <a:headEnd type="none" w="med" len="med"/>
+                      <a:tailEnd type="none" w="med" len="med"/>
+                    </a:lnL>
+                    <a:lnR w="9525" cap="flat" cmpd="sng" algn="ctr">
+                      <a:solidFill>
+                        <a:srgbClr val="A6A6A6"/>
+                      </a:solidFill>
+                      <a:prstDash val="solid"/>
+                      <a:round/>
+                      <a:headEnd type="none" w="med" len="med"/>
+                      <a:tailEnd type="none" w="med" len="med"/>
+                    </a:lnR>
+                    <a:lnT w="9525" cap="flat" cmpd="sng" algn="ctr">
+                      <a:solidFill>
+                        <a:srgbClr val="A6A6A6"/>
+                      </a:solidFill>
+                      <a:prstDash val="solid"/>
+                      <a:round/>
+                      <a:headEnd type="none" w="med" len="med"/>
+                      <a:tailEnd type="none" w="med" len="med"/>
+                    </a:lnT>
+                    <a:lnB w="9525" cap="flat" cmpd="sng" algn="ctr">
+                      <a:solidFill>
+                        <a:srgbClr val="A6A6A6"/>
+                      </a:solidFill>
+                      <a:prstDash val="solid"/>
+                      <a:round/>
+                      <a:headEnd type="none" w="med" len="med"/>
+                      <a:tailEnd type="none" w="med" len="med"/>
+                    </a:lnB>
+                  </a:tcPr>
+                </a:tc>
+              </a:tr>
+              <a:tr h="365760">
+                <a:tc>
+                  <a:txBody>
+                    <a:bodyPr/>
+                    <a:lstStyle/>
+                    <a:p>
+                      <a:pPr algn="ctr" indent="0" marL="0">
+                        <a:buNone/>
+                      </a:pPr>
+                      <a:r>
+                        <a:rPr lang="en-US" sz="850" b="1" dirty="0">
+                          <a:solidFill>
+                            <a:srgbClr val="FFFFFF"/>
+                          </a:solidFill>
+                          <a:latin typeface="Malgun Gothic" pitchFamily="34" charset="0"/>
+                          <a:ea typeface="Malgun Gothic" pitchFamily="34" charset="-122"/>
+                          <a:cs typeface="Malgun Gothic" pitchFamily="34" charset="-120"/>
+                        </a:rPr>
+                        <a:t>단점</a:t>
+                      </a:r>
+                      <a:endParaRPr lang="en-US" sz="850" dirty="0">
+                        <a:latin typeface="Malgun Gothic" charset="0"/>
+                        <a:ea typeface="Malgun Gothic" charset="0"/>
+                        <a:cs typeface="Malgun Gothic" charset="0"/>
+                      </a:endParaRPr>
+                    </a:p>
+                  </a:txBody>
+                  <a:tcPr marL="91440" marR="91440" marT="45720" marB="45720" anchor="ctr">
+                    <a:lnL w="9525" cap="flat" cmpd="sng" algn="ctr">
+                      <a:solidFill>
+                        <a:srgbClr val="A6A6A6"/>
+                      </a:solidFill>
+                      <a:prstDash val="solid"/>
+                      <a:round/>
+                      <a:headEnd type="none" w="med" len="med"/>
+                      <a:tailEnd type="none" w="med" len="med"/>
+                    </a:lnL>
+                    <a:lnR w="9525" cap="flat" cmpd="sng" algn="ctr">
+                      <a:solidFill>
+                        <a:srgbClr val="A6A6A6"/>
+                      </a:solidFill>
+                      <a:prstDash val="solid"/>
+                      <a:round/>
+                      <a:headEnd type="none" w="med" len="med"/>
+                      <a:tailEnd type="none" w="med" len="med"/>
+                    </a:lnR>
+                    <a:lnT w="9525" cap="flat" cmpd="sng" algn="ctr">
+                      <a:solidFill>
+                        <a:srgbClr val="A6A6A6"/>
+                      </a:solidFill>
+                      <a:prstDash val="solid"/>
+                      <a:round/>
+                      <a:headEnd type="none" w="med" len="med"/>
+                      <a:tailEnd type="none" w="med" len="med"/>
+                    </a:lnT>
+                    <a:lnB w="9525" cap="flat" cmpd="sng" algn="ctr">
+                      <a:solidFill>
+                        <a:srgbClr val="A6A6A6"/>
+                      </a:solidFill>
+                      <a:prstDash val="solid"/>
+                      <a:round/>
+                      <a:headEnd type="none" w="med" len="med"/>
+                      <a:tailEnd type="none" w="med" len="med"/>
+                    </a:lnB>
+                    <a:solidFill>
+                      <a:srgbClr val="1F3864"/>
+                    </a:solidFill>
+                  </a:tcPr>
+                </a:tc>
+                <a:tc>
+                  <a:txBody>
+                    <a:bodyPr/>
+                    <a:lstStyle/>
+                    <a:p>
+                      <a:pPr algn="l" indent="0" marL="0">
+                        <a:buNone/>
+                      </a:pPr>
+                      <a:r>
+                        <a:rPr lang="en-US" sz="800" dirty="0">
+                          <a:solidFill>
+                            <a:srgbClr val="262626"/>
+                          </a:solidFill>
+                          <a:latin typeface="Malgun Gothic" pitchFamily="34" charset="0"/>
+                          <a:ea typeface="Malgun Gothic" pitchFamily="34" charset="-122"/>
+                          <a:cs typeface="Malgun Gothic" pitchFamily="34" charset="-120"/>
+                        </a:rPr>
+                        <a:t>요청 단위 루프 → μs 스파이크에 늦음  ·  tier 상태 상시 보고 → 결합도↑  ·  Memory Engine이 수동 executor로 격하</a:t>
+                      </a:r>
+                      <a:endParaRPr lang="en-US" sz="800" dirty="0">
+                        <a:latin typeface="Malgun Gothic" charset="0"/>
+                        <a:ea typeface="Malgun Gothic" charset="0"/>
+                        <a:cs typeface="Malgun Gothic" charset="0"/>
+                      </a:endParaRPr>
+                    </a:p>
+                  </a:txBody>
+                  <a:tcPr marL="38100" marR="38100" marT="12700" marB="12700" anchor="ctr">
+                    <a:lnL w="9525" cap="flat" cmpd="sng" algn="ctr">
+                      <a:solidFill>
+                        <a:srgbClr val="A6A6A6"/>
+                      </a:solidFill>
+                      <a:prstDash val="solid"/>
+                      <a:round/>
+                      <a:headEnd type="none" w="med" len="med"/>
+                      <a:tailEnd type="none" w="med" len="med"/>
+                    </a:lnL>
+                    <a:lnR w="9525" cap="flat" cmpd="sng" algn="ctr">
+                      <a:solidFill>
+                        <a:srgbClr val="A6A6A6"/>
+                      </a:solidFill>
+                      <a:prstDash val="solid"/>
+                      <a:round/>
+                      <a:headEnd type="none" w="med" len="med"/>
+                      <a:tailEnd type="none" w="med" len="med"/>
+                    </a:lnR>
+                    <a:lnT w="9525" cap="flat" cmpd="sng" algn="ctr">
+                      <a:solidFill>
+                        <a:srgbClr val="A6A6A6"/>
+                      </a:solidFill>
+                      <a:prstDash val="solid"/>
+                      <a:round/>
+                      <a:headEnd type="none" w="med" len="med"/>
+                      <a:tailEnd type="none" w="med" len="med"/>
+                    </a:lnT>
+                    <a:lnB w="9525" cap="flat" cmpd="sng" algn="ctr">
+                      <a:solidFill>
+                        <a:srgbClr val="A6A6A6"/>
+                      </a:solidFill>
+                      <a:prstDash val="solid"/>
+                      <a:round/>
+                      <a:headEnd type="none" w="med" len="med"/>
+                      <a:tailEnd type="none" w="med" len="med"/>
+                    </a:lnB>
+                  </a:tcPr>
+                </a:tc>
+                <a:tc>
+                  <a:txBody>
+                    <a:bodyPr/>
+                    <a:lstStyle/>
+                    <a:p>
+                      <a:pPr algn="l" indent="0" marL="0">
+                        <a:buNone/>
+                      </a:pPr>
+                      <a:r>
+                        <a:rPr lang="en-US" sz="800" dirty="0">
+                          <a:solidFill>
+                            <a:srgbClr val="262626"/>
+                          </a:solidFill>
+                          <a:latin typeface="Malgun Gothic" pitchFamily="34" charset="0"/>
+                          <a:ea typeface="Malgun Gothic" pitchFamily="34" charset="-122"/>
+                          <a:cs typeface="Malgun Gothic" pitchFamily="34" charset="-120"/>
+                        </a:rPr>
+                        <a:t>문맥 부재 → 재사용 예정 KV 오강등  ·  품질 예산 로컬 집행 → 요청 간 편차·joint orch. 기여 소실</a:t>
+                      </a:r>
+                      <a:endParaRPr lang="en-US" sz="800" dirty="0">
+                        <a:latin typeface="Malgun Gothic" charset="0"/>
+                        <a:ea typeface="Malgun Gothic" charset="0"/>
+                        <a:cs typeface="Malgun Gothic" charset="0"/>
+                      </a:endParaRPr>
+                    </a:p>
+                  </a:txBody>
+                  <a:tcPr marL="38100" marR="38100" marT="12700" marB="12700" anchor="ctr">
+                    <a:lnL w="9525" cap="flat" cmpd="sng" algn="ctr">
+                      <a:solidFill>
+                        <a:srgbClr val="A6A6A6"/>
+                      </a:solidFill>
+                      <a:prstDash val="solid"/>
+                      <a:round/>
+                      <a:headEnd type="none" w="med" len="med"/>
+                      <a:tailEnd type="none" w="med" len="med"/>
+                    </a:lnL>
+                    <a:lnR w="9525" cap="flat" cmpd="sng" algn="ctr">
+                      <a:solidFill>
+                        <a:srgbClr val="A6A6A6"/>
+                      </a:solidFill>
+                      <a:prstDash val="solid"/>
+                      <a:round/>
+                      <a:headEnd type="none" w="med" len="med"/>
+                      <a:tailEnd type="none" w="med" len="med"/>
+                    </a:lnR>
+                    <a:lnT w="9525" cap="flat" cmpd="sng" algn="ctr">
+                      <a:solidFill>
+                        <a:srgbClr val="A6A6A6"/>
+                      </a:solidFill>
+                      <a:prstDash val="solid"/>
+                      <a:round/>
+                      <a:headEnd type="none" w="med" len="med"/>
+                      <a:tailEnd type="none" w="med" len="med"/>
+                    </a:lnT>
+                    <a:lnB w="9525" cap="flat" cmpd="sng" algn="ctr">
+                      <a:solidFill>
+                        <a:srgbClr val="A6A6A6"/>
+                      </a:solidFill>
+                      <a:prstDash val="solid"/>
+                      <a:round/>
+                      <a:headEnd type="none" w="med" len="med"/>
+                      <a:tailEnd type="none" w="med" len="med"/>
+                    </a:lnB>
+                  </a:tcPr>
+                </a:tc>
+              </a:tr>
+              <a:tr h="256032">
+                <a:tc>
+                  <a:txBody>
+                    <a:bodyPr/>
+                    <a:lstStyle/>
+                    <a:p>
+                      <a:pPr algn="ctr" indent="0" marL="0">
+                        <a:buNone/>
+                      </a:pPr>
+                      <a:r>
+                        <a:rPr lang="en-US" sz="850" b="1" dirty="0">
+                          <a:solidFill>
+                            <a:srgbClr val="FFFFFF"/>
+                          </a:solidFill>
+                          <a:latin typeface="Malgun Gothic" pitchFamily="34" charset="0"/>
+                          <a:ea typeface="Malgun Gothic" pitchFamily="34" charset="-122"/>
+                          <a:cs typeface="Malgun Gothic" pitchFamily="34" charset="-120"/>
+                        </a:rPr>
+                        <a:t>Trade-off</a:t>
+                      </a:r>
+                      <a:endParaRPr lang="en-US" sz="850" dirty="0">
+                        <a:latin typeface="Malgun Gothic" charset="0"/>
+                        <a:ea typeface="Malgun Gothic" charset="0"/>
+                        <a:cs typeface="Malgun Gothic" charset="0"/>
+                      </a:endParaRPr>
+                    </a:p>
+                    <a:p>
+                      <a:pPr algn="ctr" indent="0" marL="0">
+                        <a:buNone/>
+                      </a:pPr>
+                      <a:r>
+                        <a:rPr lang="en-US" sz="850" b="1" dirty="0">
+                          <a:solidFill>
+                            <a:srgbClr val="FFFFFF"/>
+                          </a:solidFill>
+                          <a:latin typeface="Malgun Gothic" pitchFamily="34" charset="0"/>
+                          <a:ea typeface="Malgun Gothic" pitchFamily="34" charset="-122"/>
+                          <a:cs typeface="Malgun Gothic" pitchFamily="34" charset="-120"/>
+                        </a:rPr>
+                        <a:t>(QA 평가)</a:t>
+                      </a:r>
+                      <a:endParaRPr lang="en-US" sz="850" dirty="0">
+                        <a:latin typeface="Malgun Gothic" charset="0"/>
+                        <a:ea typeface="Malgun Gothic" charset="0"/>
+                        <a:cs typeface="Malgun Gothic" charset="0"/>
+                      </a:endParaRPr>
+                    </a:p>
+                  </a:txBody>
+                  <a:tcPr marL="91440" marR="91440" marT="45720" marB="45720" anchor="ctr">
+                    <a:lnL w="9525" cap="flat" cmpd="sng" algn="ctr">
+                      <a:solidFill>
+                        <a:srgbClr val="A6A6A6"/>
+                      </a:solidFill>
+                      <a:prstDash val="solid"/>
+                      <a:round/>
+                      <a:headEnd type="none" w="med" len="med"/>
+                      <a:tailEnd type="none" w="med" len="med"/>
+                    </a:lnL>
+                    <a:lnR w="9525" cap="flat" cmpd="sng" algn="ctr">
+                      <a:solidFill>
+                        <a:srgbClr val="A6A6A6"/>
+                      </a:solidFill>
+                      <a:prstDash val="solid"/>
+                      <a:round/>
+                      <a:headEnd type="none" w="med" len="med"/>
+                      <a:tailEnd type="none" w="med" len="med"/>
+                    </a:lnR>
+                    <a:lnT w="9525" cap="flat" cmpd="sng" algn="ctr">
+                      <a:solidFill>
+                        <a:srgbClr val="A6A6A6"/>
+                      </a:solidFill>
+                      <a:prstDash val="solid"/>
+                      <a:round/>
+                      <a:headEnd type="none" w="med" len="med"/>
+                      <a:tailEnd type="none" w="med" len="med"/>
+                    </a:lnT>
+                    <a:lnB w="9525" cap="flat" cmpd="sng" algn="ctr">
+                      <a:solidFill>
+                        <a:srgbClr val="A6A6A6"/>
+                      </a:solidFill>
+                      <a:prstDash val="solid"/>
+                      <a:round/>
+                      <a:headEnd type="none" w="med" len="med"/>
+                      <a:tailEnd type="none" w="med" len="med"/>
+                    </a:lnB>
+                    <a:solidFill>
+                      <a:srgbClr val="1F3864"/>
+                    </a:solidFill>
+                  </a:tcPr>
+                </a:tc>
+                <a:tc>
+                  <a:txBody>
+                    <a:bodyPr/>
+                    <a:lstStyle/>
+                    <a:p>
+                      <a:pPr algn="l" indent="0" marL="0">
+                        <a:buNone/>
+                      </a:pPr>
+                      <a:r>
+                        <a:rPr lang="en-US" sz="800" b="1" dirty="0">
+                          <a:solidFill>
+                            <a:srgbClr val="B3402A"/>
+                          </a:solidFill>
+                          <a:latin typeface="Malgun Gothic" pitchFamily="34" charset="0"/>
+                          <a:ea typeface="Malgun Gothic" pitchFamily="34" charset="-122"/>
+                          <a:cs typeface="Malgun Gothic" pitchFamily="34" charset="-120"/>
+                        </a:rPr>
+                        <a:t>QA1 ★★☆</a:t>
+                      </a:r>
+                      <a:pPr algn="l" indent="0" marL="0">
+                        <a:buNone/>
+                      </a:pPr>
+                      <a:r>
+                        <a:rPr lang="en-US" sz="800" dirty="0">
+                          <a:solidFill>
+                            <a:srgbClr val="9AA0A6"/>
+                          </a:solidFill>
+                          <a:latin typeface="Malgun Gothic" pitchFamily="34" charset="0"/>
+                          <a:ea typeface="Malgun Gothic" pitchFamily="34" charset="-122"/>
+                          <a:cs typeface="Malgun Gothic" pitchFamily="34" charset="-120"/>
+                        </a:rPr>
+                        <a:t>  ·  </a:t>
+                      </a:r>
+                      <a:pPr algn="l" indent="0" marL="0">
+                        <a:buNone/>
+                      </a:pPr>
+                      <a:r>
+                        <a:rPr lang="en-US" sz="800" b="1" dirty="0">
+                          <a:solidFill>
+                            <a:srgbClr val="1B7A4B"/>
+                          </a:solidFill>
+                          <a:latin typeface="Malgun Gothic" pitchFamily="34" charset="0"/>
+                          <a:ea typeface="Malgun Gothic" pitchFamily="34" charset="-122"/>
+                          <a:cs typeface="Malgun Gothic" pitchFamily="34" charset="-120"/>
+                        </a:rPr>
+                        <a:t>QA2 ★★★</a:t>
+                      </a:r>
+                      <a:pPr algn="l" indent="0" marL="0">
+                        <a:buNone/>
+                      </a:pPr>
+                      <a:r>
+                        <a:rPr lang="en-US" sz="800" dirty="0">
+                          <a:solidFill>
+                            <a:srgbClr val="9AA0A6"/>
+                          </a:solidFill>
+                          <a:latin typeface="Malgun Gothic" pitchFamily="34" charset="0"/>
+                          <a:ea typeface="Malgun Gothic" pitchFamily="34" charset="-122"/>
+                          <a:cs typeface="Malgun Gothic" pitchFamily="34" charset="-120"/>
+                        </a:rPr>
+                        <a:t>  ·  </a:t>
+                      </a:r>
+                      <a:pPr algn="l" indent="0" marL="0">
+                        <a:buNone/>
+                      </a:pPr>
+                      <a:r>
+                        <a:rPr lang="en-US" sz="800" b="1" dirty="0">
+                          <a:solidFill>
+                            <a:srgbClr val="1B7A4B"/>
+                          </a:solidFill>
+                          <a:latin typeface="Malgun Gothic" pitchFamily="34" charset="0"/>
+                          <a:ea typeface="Malgun Gothic" pitchFamily="34" charset="-122"/>
+                          <a:cs typeface="Malgun Gothic" pitchFamily="34" charset="-120"/>
+                        </a:rPr>
+                        <a:t>QA3 ★★★</a:t>
+                      </a:r>
+                      <a:pPr algn="l" indent="0" marL="0">
+                        <a:buNone/>
+                      </a:pPr>
+                      <a:r>
+                        <a:rPr lang="en-US" sz="800" dirty="0">
+                          <a:solidFill>
+                            <a:srgbClr val="9AA0A6"/>
+                          </a:solidFill>
+                          <a:latin typeface="Malgun Gothic" pitchFamily="34" charset="0"/>
+                          <a:ea typeface="Malgun Gothic" pitchFamily="34" charset="-122"/>
+                          <a:cs typeface="Malgun Gothic" pitchFamily="34" charset="-120"/>
+                        </a:rPr>
+                        <a:t>  ·  </a:t>
+                      </a:r>
+                      <a:pPr algn="l" indent="0" marL="0">
+                        <a:buNone/>
+                      </a:pPr>
+                      <a:r>
+                        <a:rPr lang="en-US" sz="800" b="1" dirty="0">
+                          <a:solidFill>
+                            <a:srgbClr val="B3402A"/>
+                          </a:solidFill>
+                          <a:latin typeface="Malgun Gothic" pitchFamily="34" charset="0"/>
+                          <a:ea typeface="Malgun Gothic" pitchFamily="34" charset="-122"/>
+                          <a:cs typeface="Malgun Gothic" pitchFamily="34" charset="-120"/>
+                        </a:rPr>
+                        <a:t>QA4 ★★☆</a:t>
+                      </a:r>
+                      <a:pPr algn="l" indent="0" marL="0">
+                        <a:buNone/>
+                      </a:pPr>
+                      <a:r>
+                        <a:rPr lang="en-US" sz="800" dirty="0">
+                          <a:solidFill>
+                            <a:srgbClr val="9AA0A6"/>
+                          </a:solidFill>
+                          <a:latin typeface="Malgun Gothic" pitchFamily="34" charset="0"/>
+                          <a:ea typeface="Malgun Gothic" pitchFamily="34" charset="-122"/>
+                          <a:cs typeface="Malgun Gothic" pitchFamily="34" charset="-120"/>
+                        </a:rPr>
+                        <a:t>  ·  </a:t>
+                      </a:r>
+                      <a:pPr algn="l" indent="0" marL="0">
+                        <a:buNone/>
+                      </a:pPr>
+                      <a:r>
+                        <a:rPr lang="en-US" sz="800" b="1" dirty="0">
+                          <a:solidFill>
+                            <a:srgbClr val="B3402A"/>
+                          </a:solidFill>
+                          <a:latin typeface="Malgun Gothic" pitchFamily="34" charset="0"/>
+                          <a:ea typeface="Malgun Gothic" pitchFamily="34" charset="-122"/>
+                          <a:cs typeface="Malgun Gothic" pitchFamily="34" charset="-120"/>
+                        </a:rPr>
+                        <a:t>QA5 ★★☆</a:t>
+                      </a:r>
+                      <a:endParaRPr lang="en-US" sz="800" dirty="0">
+                        <a:latin typeface="Malgun Gothic" charset="0"/>
+                        <a:ea typeface="Malgun Gothic" charset="0"/>
+                        <a:cs typeface="Malgun Gothic" charset="0"/>
+                      </a:endParaRPr>
+                    </a:p>
+                  </a:txBody>
+                  <a:tcPr marL="38100" marR="38100" marT="12700" marB="12700" anchor="ctr">
+                    <a:lnL w="9525" cap="flat" cmpd="sng" algn="ctr">
+                      <a:solidFill>
+                        <a:srgbClr val="A6A6A6"/>
+                      </a:solidFill>
+                      <a:prstDash val="solid"/>
+                      <a:round/>
+                      <a:headEnd type="none" w="med" len="med"/>
+                      <a:tailEnd type="none" w="med" len="med"/>
+                    </a:lnL>
+                    <a:lnR w="9525" cap="flat" cmpd="sng" algn="ctr">
+                      <a:solidFill>
+                        <a:srgbClr val="A6A6A6"/>
+                      </a:solidFill>
+                      <a:prstDash val="solid"/>
+                      <a:round/>
+                      <a:headEnd type="none" w="med" len="med"/>
+                      <a:tailEnd type="none" w="med" len="med"/>
+                    </a:lnR>
+                    <a:lnT w="9525" cap="flat" cmpd="sng" algn="ctr">
+                      <a:solidFill>
+                        <a:srgbClr val="A6A6A6"/>
+                      </a:solidFill>
+                      <a:prstDash val="solid"/>
+                      <a:round/>
+                      <a:headEnd type="none" w="med" len="med"/>
+                      <a:tailEnd type="none" w="med" len="med"/>
+                    </a:lnT>
+                    <a:lnB w="9525" cap="flat" cmpd="sng" algn="ctr">
+                      <a:solidFill>
+                        <a:srgbClr val="A6A6A6"/>
+                      </a:solidFill>
+                      <a:prstDash val="solid"/>
+                      <a:round/>
+                      <a:headEnd type="none" w="med" len="med"/>
+                      <a:tailEnd type="none" w="med" len="med"/>
+                    </a:lnB>
+                  </a:tcPr>
+                </a:tc>
+                <a:tc>
+                  <a:txBody>
+                    <a:bodyPr/>
+                    <a:lstStyle/>
+                    <a:p>
+                      <a:pPr algn="l" indent="0" marL="0">
+                        <a:buNone/>
+                      </a:pPr>
+                      <a:r>
+                        <a:rPr lang="en-US" sz="800" b="1" dirty="0">
+                          <a:solidFill>
+                            <a:srgbClr val="1B7A4B"/>
+                          </a:solidFill>
+                          <a:latin typeface="Malgun Gothic" pitchFamily="34" charset="0"/>
+                          <a:ea typeface="Malgun Gothic" pitchFamily="34" charset="-122"/>
+                          <a:cs typeface="Malgun Gothic" pitchFamily="34" charset="-120"/>
+                        </a:rPr>
+                        <a:t>QA1 ★★★</a:t>
+                      </a:r>
+                      <a:pPr algn="l" indent="0" marL="0">
+                        <a:buNone/>
+                      </a:pPr>
+                      <a:r>
+                        <a:rPr lang="en-US" sz="800" dirty="0">
+                          <a:solidFill>
+                            <a:srgbClr val="9AA0A6"/>
+                          </a:solidFill>
+                          <a:latin typeface="Malgun Gothic" pitchFamily="34" charset="0"/>
+                          <a:ea typeface="Malgun Gothic" pitchFamily="34" charset="-122"/>
+                          <a:cs typeface="Malgun Gothic" pitchFamily="34" charset="-120"/>
+                        </a:rPr>
+                        <a:t>  ·  </a:t>
+                      </a:r>
+                      <a:pPr algn="l" indent="0" marL="0">
+                        <a:buNone/>
+                      </a:pPr>
+                      <a:r>
+                        <a:rPr lang="en-US" sz="800" b="1" dirty="0">
+                          <a:solidFill>
+                            <a:srgbClr val="B3402A"/>
+                          </a:solidFill>
+                          <a:latin typeface="Malgun Gothic" pitchFamily="34" charset="0"/>
+                          <a:ea typeface="Malgun Gothic" pitchFamily="34" charset="-122"/>
+                          <a:cs typeface="Malgun Gothic" pitchFamily="34" charset="-120"/>
+                        </a:rPr>
+                        <a:t>QA2 ★★☆</a:t>
+                      </a:r>
+                      <a:pPr algn="l" indent="0" marL="0">
+                        <a:buNone/>
+                      </a:pPr>
+                      <a:r>
+                        <a:rPr lang="en-US" sz="800" dirty="0">
+                          <a:solidFill>
+                            <a:srgbClr val="9AA0A6"/>
+                          </a:solidFill>
+                          <a:latin typeface="Malgun Gothic" pitchFamily="34" charset="0"/>
+                          <a:ea typeface="Malgun Gothic" pitchFamily="34" charset="-122"/>
+                          <a:cs typeface="Malgun Gothic" pitchFamily="34" charset="-120"/>
+                        </a:rPr>
+                        <a:t>  ·  </a:t>
+                      </a:r>
+                      <a:pPr algn="l" indent="0" marL="0">
+                        <a:buNone/>
+                      </a:pPr>
+                      <a:r>
+                        <a:rPr lang="en-US" sz="800" b="1" dirty="0">
+                          <a:solidFill>
+                            <a:srgbClr val="B3402A"/>
+                          </a:solidFill>
+                          <a:latin typeface="Malgun Gothic" pitchFamily="34" charset="0"/>
+                          <a:ea typeface="Malgun Gothic" pitchFamily="34" charset="-122"/>
+                          <a:cs typeface="Malgun Gothic" pitchFamily="34" charset="-120"/>
+                        </a:rPr>
+                        <a:t>QA3 ★★☆</a:t>
+                      </a:r>
+                      <a:pPr algn="l" indent="0" marL="0">
+                        <a:buNone/>
+                      </a:pPr>
+                      <a:r>
+                        <a:rPr lang="en-US" sz="800" dirty="0">
+                          <a:solidFill>
+                            <a:srgbClr val="9AA0A6"/>
+                          </a:solidFill>
+                          <a:latin typeface="Malgun Gothic" pitchFamily="34" charset="0"/>
+                          <a:ea typeface="Malgun Gothic" pitchFamily="34" charset="-122"/>
+                          <a:cs typeface="Malgun Gothic" pitchFamily="34" charset="-120"/>
+                        </a:rPr>
+                        <a:t>  ·  </a:t>
+                      </a:r>
+                      <a:pPr algn="l" indent="0" marL="0">
+                        <a:buNone/>
+                      </a:pPr>
+                      <a:r>
+                        <a:rPr lang="en-US" sz="800" b="1" dirty="0">
+                          <a:solidFill>
+                            <a:srgbClr val="1B7A4B"/>
+                          </a:solidFill>
+                          <a:latin typeface="Malgun Gothic" pitchFamily="34" charset="0"/>
+                          <a:ea typeface="Malgun Gothic" pitchFamily="34" charset="-122"/>
+                          <a:cs typeface="Malgun Gothic" pitchFamily="34" charset="-120"/>
+                        </a:rPr>
+                        <a:t>QA4 ★★★</a:t>
+                      </a:r>
+                      <a:pPr algn="l" indent="0" marL="0">
+                        <a:buNone/>
+                      </a:pPr>
+                      <a:r>
+                        <a:rPr lang="en-US" sz="800" dirty="0">
+                          <a:solidFill>
+                            <a:srgbClr val="9AA0A6"/>
+                          </a:solidFill>
+                          <a:latin typeface="Malgun Gothic" pitchFamily="34" charset="0"/>
+                          <a:ea typeface="Malgun Gothic" pitchFamily="34" charset="-122"/>
+                          <a:cs typeface="Malgun Gothic" pitchFamily="34" charset="-120"/>
+                        </a:rPr>
+                        <a:t>  ·  </a:t>
+                      </a:r>
+                      <a:pPr algn="l" indent="0" marL="0">
+                        <a:buNone/>
+                      </a:pPr>
+                      <a:r>
+                        <a:rPr lang="en-US" sz="800" b="1" dirty="0">
+                          <a:solidFill>
+                            <a:srgbClr val="1B7A4B"/>
+                          </a:solidFill>
+                          <a:latin typeface="Malgun Gothic" pitchFamily="34" charset="0"/>
+                          <a:ea typeface="Malgun Gothic" pitchFamily="34" charset="-122"/>
+                          <a:cs typeface="Malgun Gothic" pitchFamily="34" charset="-120"/>
+                        </a:rPr>
+                        <a:t>QA5 ★★★</a:t>
+                      </a:r>
+                      <a:endParaRPr lang="en-US" sz="800" dirty="0">
+                        <a:latin typeface="Malgun Gothic" charset="0"/>
+                        <a:ea typeface="Malgun Gothic" charset="0"/>
+                        <a:cs typeface="Malgun Gothic" charset="0"/>
+                      </a:endParaRPr>
+                    </a:p>
+                  </a:txBody>
+                  <a:tcPr marL="38100" marR="38100" marT="12700" marB="12700" anchor="ctr">
+                    <a:lnL w="9525" cap="flat" cmpd="sng" algn="ctr">
+                      <a:solidFill>
+                        <a:srgbClr val="A6A6A6"/>
+                      </a:solidFill>
+                      <a:prstDash val="solid"/>
+                      <a:round/>
+                      <a:headEnd type="none" w="med" len="med"/>
+                      <a:tailEnd type="none" w="med" len="med"/>
+                    </a:lnL>
+                    <a:lnR w="9525" cap="flat" cmpd="sng" algn="ctr">
+                      <a:solidFill>
+                        <a:srgbClr val="A6A6A6"/>
+                      </a:solidFill>
+                      <a:prstDash val="solid"/>
+                      <a:round/>
+                      <a:headEnd type="none" w="med" len="med"/>
+                      <a:tailEnd type="none" w="med" len="med"/>
+                    </a:lnR>
+                    <a:lnT w="9525" cap="flat" cmpd="sng" algn="ctr">
+                      <a:solidFill>
+                        <a:srgbClr val="A6A6A6"/>
+                      </a:solidFill>
+                      <a:prstDash val="solid"/>
+                      <a:round/>
+                      <a:headEnd type="none" w="med" len="med"/>
+                      <a:tailEnd type="none" w="med" len="med"/>
+                    </a:lnT>
+                    <a:lnB w="9525" cap="flat" cmpd="sng" algn="ctr">
+                      <a:solidFill>
+                        <a:srgbClr val="A6A6A6"/>
+                      </a:solidFill>
+                      <a:prstDash val="solid"/>
+                      <a:round/>
+                      <a:headEnd type="none" w="med" len="med"/>
+                      <a:tailEnd type="none" w="med" len="med"/>
+                    </a:lnB>
+                  </a:tcPr>
+                </a:tc>
+              </a:tr>
+            </a:tbl>
+          </a:graphicData>
+        </a:graphic>
+      </p:graphicFrame>
     </p:spTree>
   </p:cSld>
   <p:clrMapOvr>
